--- a/CyberTrace_Viva_Presentation.pptx
+++ b/CyberTrace_Viva_Presentation.pptx
@@ -3853,13 +3853,13 @@
         <p:spPr>
           <a:xfrm>
             <a:off x="0" y="0"/>
-            <a:ext cx="12188952" cy="1005840"/>
-          </a:xfrm>
-          <a:prstGeom prst="rect">
-            <a:avLst/>
-          </a:prstGeom>
-          <a:solidFill>
-            <a:srgbClr val="1F3564"/>
+            <a:ext cx="12188952" cy="1051560"/>
+          </a:xfrm>
+          <a:prstGeom prst="rect">
+            <a:avLst/>
+          </a:prstGeom>
+          <a:solidFill>
+            <a:srgbClr val="E8601A"/>
           </a:solidFill>
           <a:ln>
             <a:noFill/>
@@ -3896,13 +3896,13 @@
         <p:spPr>
           <a:xfrm>
             <a:off x="0" y="0"/>
-            <a:ext cx="164592" cy="1005840"/>
-          </a:xfrm>
-          <a:prstGeom prst="rect">
-            <a:avLst/>
-          </a:prstGeom>
-          <a:solidFill>
-            <a:srgbClr val="C00000"/>
+            <a:ext cx="201168" cy="1051560"/>
+          </a:xfrm>
+          <a:prstGeom prst="rect">
+            <a:avLst/>
+          </a:prstGeom>
+          <a:solidFill>
+            <a:srgbClr val="F4A800"/>
           </a:solidFill>
           <a:ln>
             <a:noFill/>
@@ -3932,122 +3932,20 @@
       </p:sp>
       <p:sp>
         <p:nvSpPr>
-          <p:cNvPr id="4" name="TextBox 3"/>
-          <p:cNvSpPr txBox="1"/>
-          <p:nvPr/>
-        </p:nvSpPr>
-        <p:spPr>
-          <a:xfrm>
-            <a:off x="320040" y="109728"/>
-            <a:ext cx="11521440" cy="457200"/>
-          </a:xfrm>
-          <a:prstGeom prst="rect">
-            <a:avLst/>
-          </a:prstGeom>
-          <a:noFill/>
-        </p:spPr>
-        <p:txBody>
-          <a:bodyPr wrap="square">
-            <a:spAutoFit/>
-          </a:bodyPr>
-          <a:lstStyle/>
-          <a:p>
-            <a:pPr algn="ctr"/>
-            <a:r>
-              <a:rPr sz="2200" b="1" i="0">
-                <a:solidFill>
-                  <a:srgbClr val="FFFFFF"/>
-                </a:solidFill>
-              </a:rPr>
-              <a:t>Indore Institute of Science &amp; Technology</a:t>
-            </a:r>
-          </a:p>
-        </p:txBody>
-      </p:sp>
-      <p:sp>
-        <p:nvSpPr>
-          <p:cNvPr id="5" name="TextBox 4"/>
-          <p:cNvSpPr txBox="1"/>
-          <p:nvPr/>
-        </p:nvSpPr>
-        <p:spPr>
-          <a:xfrm>
-            <a:off x="320040" y="566928"/>
-            <a:ext cx="11521440" cy="320040"/>
-          </a:xfrm>
-          <a:prstGeom prst="rect">
-            <a:avLst/>
-          </a:prstGeom>
-          <a:noFill/>
-        </p:spPr>
-        <p:txBody>
-          <a:bodyPr wrap="square">
-            <a:spAutoFit/>
-          </a:bodyPr>
-          <a:lstStyle/>
-          <a:p>
-            <a:pPr algn="ctr"/>
-            <a:r>
-              <a:rPr sz="1600" b="0" i="0">
-                <a:solidFill>
-                  <a:srgbClr val="00B0F0"/>
-                </a:solidFill>
-              </a:rPr>
-              <a:t>Department of Information Technology</a:t>
-            </a:r>
-          </a:p>
-        </p:txBody>
-      </p:sp>
-      <p:sp>
-        <p:nvSpPr>
-          <p:cNvPr id="6" name="TextBox 5"/>
-          <p:cNvSpPr txBox="1"/>
-          <p:nvPr/>
-        </p:nvSpPr>
-        <p:spPr>
-          <a:xfrm>
-            <a:off x="914400" y="1188720"/>
-            <a:ext cx="10332720" cy="411480"/>
-          </a:xfrm>
-          <a:prstGeom prst="rect">
-            <a:avLst/>
-          </a:prstGeom>
-          <a:noFill/>
-        </p:spPr>
-        <p:txBody>
-          <a:bodyPr wrap="square">
-            <a:spAutoFit/>
-          </a:bodyPr>
-          <a:lstStyle/>
-          <a:p>
-            <a:pPr algn="ctr"/>
-            <a:r>
-              <a:rPr sz="1500" b="0" i="0">
-                <a:solidFill>
-                  <a:srgbClr val="002060"/>
-                </a:solidFill>
-              </a:rPr>
-              <a:t>A Minor Project Presentation on</a:t>
-            </a:r>
-          </a:p>
-        </p:txBody>
-      </p:sp>
-      <p:sp>
-        <p:nvSpPr>
-          <p:cNvPr id="7" name="Rectangle 6"/>
+          <p:cNvPr id="4" name="Rectangle 3"/>
           <p:cNvSpPr/>
           <p:nvPr/>
         </p:nvSpPr>
         <p:spPr>
           <a:xfrm>
-            <a:off x="1371600" y="1828800"/>
-            <a:ext cx="9418320" cy="1463040"/>
-          </a:xfrm>
-          <a:prstGeom prst="rect">
-            <a:avLst/>
-          </a:prstGeom>
-          <a:solidFill>
-            <a:srgbClr val="1F3564"/>
+            <a:off x="11987784" y="0"/>
+            <a:ext cx="201168" cy="1051560"/>
+          </a:xfrm>
+          <a:prstGeom prst="rect">
+            <a:avLst/>
+          </a:prstGeom>
+          <a:solidFill>
+            <a:srgbClr val="B84000"/>
           </a:solidFill>
           <a:ln>
             <a:noFill/>
@@ -4077,20 +3975,122 @@
       </p:sp>
       <p:sp>
         <p:nvSpPr>
+          <p:cNvPr id="5" name="TextBox 4"/>
+          <p:cNvSpPr txBox="1"/>
+          <p:nvPr/>
+        </p:nvSpPr>
+        <p:spPr>
+          <a:xfrm>
+            <a:off x="320040" y="91440"/>
+            <a:ext cx="11521440" cy="502920"/>
+          </a:xfrm>
+          <a:prstGeom prst="rect">
+            <a:avLst/>
+          </a:prstGeom>
+          <a:noFill/>
+        </p:spPr>
+        <p:txBody>
+          <a:bodyPr wrap="square">
+            <a:spAutoFit/>
+          </a:bodyPr>
+          <a:lstStyle/>
+          <a:p>
+            <a:pPr algn="ctr"/>
+            <a:r>
+              <a:rPr sz="2200" b="1" i="0">
+                <a:solidFill>
+                  <a:srgbClr val="FFFFFF"/>
+                </a:solidFill>
+              </a:rPr>
+              <a:t>Indore Institute of Science &amp; Technology</a:t>
+            </a:r>
+          </a:p>
+        </p:txBody>
+      </p:sp>
+      <p:sp>
+        <p:nvSpPr>
+          <p:cNvPr id="6" name="TextBox 5"/>
+          <p:cNvSpPr txBox="1"/>
+          <p:nvPr/>
+        </p:nvSpPr>
+        <p:spPr>
+          <a:xfrm>
+            <a:off x="320040" y="594360"/>
+            <a:ext cx="11521440" cy="347472"/>
+          </a:xfrm>
+          <a:prstGeom prst="rect">
+            <a:avLst/>
+          </a:prstGeom>
+          <a:noFill/>
+        </p:spPr>
+        <p:txBody>
+          <a:bodyPr wrap="square">
+            <a:spAutoFit/>
+          </a:bodyPr>
+          <a:lstStyle/>
+          <a:p>
+            <a:pPr algn="ctr"/>
+            <a:r>
+              <a:rPr sz="1400" b="0" i="0">
+                <a:solidFill>
+                  <a:srgbClr val="FDF0E0"/>
+                </a:solidFill>
+              </a:rPr>
+              <a:t>Department of Information Technology</a:t>
+            </a:r>
+          </a:p>
+        </p:txBody>
+      </p:sp>
+      <p:sp>
+        <p:nvSpPr>
+          <p:cNvPr id="7" name="TextBox 6"/>
+          <p:cNvSpPr txBox="1"/>
+          <p:nvPr/>
+        </p:nvSpPr>
+        <p:spPr>
+          <a:xfrm>
+            <a:off x="914400" y="1170432"/>
+            <a:ext cx="10332720" cy="384048"/>
+          </a:xfrm>
+          <a:prstGeom prst="rect">
+            <a:avLst/>
+          </a:prstGeom>
+          <a:noFill/>
+        </p:spPr>
+        <p:txBody>
+          <a:bodyPr wrap="square">
+            <a:spAutoFit/>
+          </a:bodyPr>
+          <a:lstStyle/>
+          <a:p>
+            <a:pPr algn="ctr"/>
+            <a:r>
+              <a:rPr sz="1400" b="0" i="0">
+                <a:solidFill>
+                  <a:srgbClr val="5A3800"/>
+                </a:solidFill>
+              </a:rPr>
+              <a:t>A Minor Project Presentation on</a:t>
+            </a:r>
+          </a:p>
+        </p:txBody>
+      </p:sp>
+      <p:sp>
+        <p:nvSpPr>
           <p:cNvPr id="8" name="Rectangle 7"/>
           <p:cNvSpPr/>
           <p:nvPr/>
         </p:nvSpPr>
         <p:spPr>
           <a:xfrm>
-            <a:off x="1371600" y="1828800"/>
-            <a:ext cx="73152" cy="1463040"/>
-          </a:xfrm>
-          <a:prstGeom prst="rect">
-            <a:avLst/>
-          </a:prstGeom>
-          <a:solidFill>
-            <a:srgbClr val="C00000"/>
+            <a:off x="1280160" y="1719072"/>
+            <a:ext cx="9601200" cy="1572768"/>
+          </a:xfrm>
+          <a:prstGeom prst="rect">
+            <a:avLst/>
+          </a:prstGeom>
+          <a:solidFill>
+            <a:srgbClr val="B84000"/>
           </a:solidFill>
           <a:ln>
             <a:noFill/>
@@ -4126,14 +4126,14 @@
         </p:nvSpPr>
         <p:spPr>
           <a:xfrm>
-            <a:off x="10716768" y="1828800"/>
-            <a:ext cx="73152" cy="1463040"/>
-          </a:xfrm>
-          <a:prstGeom prst="rect">
-            <a:avLst/>
-          </a:prstGeom>
-          <a:solidFill>
-            <a:srgbClr val="C00000"/>
+            <a:off x="1280160" y="1719072"/>
+            <a:ext cx="91440" cy="1572768"/>
+          </a:xfrm>
+          <a:prstGeom prst="rect">
+            <a:avLst/>
+          </a:prstGeom>
+          <a:solidFill>
+            <a:srgbClr val="F4A800"/>
           </a:solidFill>
           <a:ln>
             <a:noFill/>
@@ -4163,89 +4163,20 @@
       </p:sp>
       <p:sp>
         <p:nvSpPr>
-          <p:cNvPr id="10" name="TextBox 9"/>
-          <p:cNvSpPr txBox="1"/>
-          <p:nvPr/>
-        </p:nvSpPr>
-        <p:spPr>
-          <a:xfrm>
-            <a:off x="1554480" y="1920240"/>
-            <a:ext cx="9144000" cy="502920"/>
-          </a:xfrm>
-          <a:prstGeom prst="rect">
-            <a:avLst/>
-          </a:prstGeom>
-          <a:noFill/>
-        </p:spPr>
-        <p:txBody>
-          <a:bodyPr wrap="square">
-            <a:spAutoFit/>
-          </a:bodyPr>
-          <a:lstStyle/>
-          <a:p>
-            <a:pPr algn="ctr"/>
-            <a:r>
-              <a:rPr sz="3400" b="1" i="0">
-                <a:solidFill>
-                  <a:srgbClr val="FFFFFF"/>
-                </a:solidFill>
-              </a:rPr>
-              <a:t>CYBERTRACE</a:t>
-            </a:r>
-          </a:p>
-        </p:txBody>
-      </p:sp>
-      <p:sp>
-        <p:nvSpPr>
-          <p:cNvPr id="11" name="TextBox 10"/>
-          <p:cNvSpPr txBox="1"/>
-          <p:nvPr/>
-        </p:nvSpPr>
-        <p:spPr>
-          <a:xfrm>
-            <a:off x="1554480" y="2423160"/>
-            <a:ext cx="9144000" cy="685800"/>
-          </a:xfrm>
-          <a:prstGeom prst="rect">
-            <a:avLst/>
-          </a:prstGeom>
-          <a:noFill/>
-        </p:spPr>
-        <p:txBody>
-          <a:bodyPr wrap="square">
-            <a:spAutoFit/>
-          </a:bodyPr>
-          <a:lstStyle/>
-          <a:p>
-            <a:pPr algn="ctr"/>
-            <a:r>
-              <a:rPr sz="1800" b="0" i="0">
-                <a:solidFill>
-                  <a:srgbClr val="00B0F0"/>
-                </a:solidFill>
-              </a:rPr>
-              <a:t>Real-Time Network Security Monitoring
-&amp; Anomaly Detection System</a:t>
-            </a:r>
-          </a:p>
-        </p:txBody>
-      </p:sp>
-      <p:sp>
-        <p:nvSpPr>
-          <p:cNvPr id="12" name="Rectangle 11"/>
+          <p:cNvPr id="10" name="Rectangle 9"/>
           <p:cNvSpPr/>
           <p:nvPr/>
         </p:nvSpPr>
         <p:spPr>
           <a:xfrm>
-            <a:off x="1188720" y="3520440"/>
-            <a:ext cx="9784080" cy="19050"/>
-          </a:xfrm>
-          <a:prstGeom prst="rect">
-            <a:avLst/>
-          </a:prstGeom>
-          <a:solidFill>
-            <a:srgbClr val="C00000"/>
+            <a:off x="10789920" y="1719072"/>
+            <a:ext cx="91440" cy="1572768"/>
+          </a:xfrm>
+          <a:prstGeom prst="rect">
+            <a:avLst/>
+          </a:prstGeom>
+          <a:solidFill>
+            <a:srgbClr val="F4A800"/>
           </a:solidFill>
           <a:ln>
             <a:noFill/>
@@ -4275,14 +4206,14 @@
       </p:sp>
       <p:sp>
         <p:nvSpPr>
-          <p:cNvPr id="13" name="TextBox 12"/>
+          <p:cNvPr id="11" name="TextBox 10"/>
           <p:cNvSpPr txBox="1"/>
           <p:nvPr/>
         </p:nvSpPr>
         <p:spPr>
           <a:xfrm>
-            <a:off x="914400" y="3703320"/>
-            <a:ext cx="4114800" cy="411480"/>
+            <a:off x="1463040" y="1810512"/>
+            <a:ext cx="9235440" cy="594360"/>
           </a:xfrm>
           <a:prstGeom prst="rect">
             <a:avLst/>
@@ -4295,28 +4226,28 @@
           </a:bodyPr>
           <a:lstStyle/>
           <a:p>
-            <a:pPr algn="l"/>
-            <a:r>
-              <a:rPr sz="1400" b="1" i="0">
-                <a:solidFill>
-                  <a:srgbClr val="002060"/>
+            <a:pPr algn="ctr"/>
+            <a:r>
+              <a:rPr sz="3600" b="1" i="0">
+                <a:solidFill>
+                  <a:srgbClr val="F4A800"/>
                 </a:solidFill>
               </a:rPr>
-              <a:t>Guided By:</a:t>
-            </a:r>
-          </a:p>
-        </p:txBody>
-      </p:sp>
-      <p:sp>
-        <p:nvSpPr>
-          <p:cNvPr id="14" name="TextBox 13"/>
+              <a:t>CYBERTRACE</a:t>
+            </a:r>
+          </a:p>
+        </p:txBody>
+      </p:sp>
+      <p:sp>
+        <p:nvSpPr>
+          <p:cNvPr id="12" name="TextBox 11"/>
           <p:cNvSpPr txBox="1"/>
           <p:nvPr/>
         </p:nvSpPr>
         <p:spPr>
           <a:xfrm>
-            <a:off x="914400" y="4114800"/>
-            <a:ext cx="4114800" cy="685800"/>
+            <a:off x="1463040" y="2450592"/>
+            <a:ext cx="9235440" cy="713232"/>
           </a:xfrm>
           <a:prstGeom prst="rect">
             <a:avLst/>
@@ -4329,11 +4260,122 @@
           </a:bodyPr>
           <a:lstStyle/>
           <a:p>
+            <a:pPr algn="ctr"/>
+            <a:r>
+              <a:rPr sz="1700" b="0" i="0">
+                <a:solidFill>
+                  <a:srgbClr val="FFFFFF"/>
+                </a:solidFill>
+              </a:rPr>
+              <a:t>Real-Time Network Security Monitoring  &amp;  Anomaly Detection System</a:t>
+            </a:r>
+          </a:p>
+        </p:txBody>
+      </p:sp>
+      <p:sp>
+        <p:nvSpPr>
+          <p:cNvPr id="13" name="Rectangle 12"/>
+          <p:cNvSpPr/>
+          <p:nvPr/>
+        </p:nvSpPr>
+        <p:spPr>
+          <a:xfrm>
+            <a:off x="1188720" y="3456432"/>
+            <a:ext cx="9784080" cy="25400"/>
+          </a:xfrm>
+          <a:prstGeom prst="rect">
+            <a:avLst/>
+          </a:prstGeom>
+          <a:solidFill>
+            <a:srgbClr val="E8601A"/>
+          </a:solidFill>
+          <a:ln>
+            <a:noFill/>
+          </a:ln>
+        </p:spPr>
+        <p:style>
+          <a:lnRef idx="1">
+            <a:schemeClr val="accent1"/>
+          </a:lnRef>
+          <a:fillRef idx="3">
+            <a:schemeClr val="accent1"/>
+          </a:fillRef>
+          <a:effectRef idx="2">
+            <a:schemeClr val="accent1"/>
+          </a:effectRef>
+          <a:fontRef idx="minor">
+            <a:schemeClr val="lt1"/>
+          </a:fontRef>
+        </p:style>
+        <p:txBody>
+          <a:bodyPr rtlCol="0" anchor="ctr"/>
+          <a:lstStyle/>
+          <a:p>
+            <a:pPr algn="ctr"/>
+          </a:p>
+        </p:txBody>
+      </p:sp>
+      <p:sp>
+        <p:nvSpPr>
+          <p:cNvPr id="14" name="TextBox 13"/>
+          <p:cNvSpPr txBox="1"/>
+          <p:nvPr/>
+        </p:nvSpPr>
+        <p:spPr>
+          <a:xfrm>
+            <a:off x="914400" y="3639312"/>
+            <a:ext cx="4114800" cy="384048"/>
+          </a:xfrm>
+          <a:prstGeom prst="rect">
+            <a:avLst/>
+          </a:prstGeom>
+          <a:noFill/>
+        </p:spPr>
+        <p:txBody>
+          <a:bodyPr wrap="square">
+            <a:spAutoFit/>
+          </a:bodyPr>
+          <a:lstStyle/>
+          <a:p>
             <a:pPr algn="l"/>
             <a:r>
+              <a:rPr sz="1400" b="1" i="0">
+                <a:solidFill>
+                  <a:srgbClr val="B84000"/>
+                </a:solidFill>
+              </a:rPr>
+              <a:t>Guided By:</a:t>
+            </a:r>
+          </a:p>
+        </p:txBody>
+      </p:sp>
+      <p:sp>
+        <p:nvSpPr>
+          <p:cNvPr id="15" name="TextBox 14"/>
+          <p:cNvSpPr txBox="1"/>
+          <p:nvPr/>
+        </p:nvSpPr>
+        <p:spPr>
+          <a:xfrm>
+            <a:off x="914400" y="4041648"/>
+            <a:ext cx="4114800" cy="713232"/>
+          </a:xfrm>
+          <a:prstGeom prst="rect">
+            <a:avLst/>
+          </a:prstGeom>
+          <a:noFill/>
+        </p:spPr>
+        <p:txBody>
+          <a:bodyPr wrap="square">
+            <a:spAutoFit/>
+          </a:bodyPr>
+          <a:lstStyle/>
+          <a:p>
+            <a:pPr algn="l"/>
+            <a:r>
               <a:rPr sz="1300" b="0" i="0">
                 <a:solidFill>
-                  <a:srgbClr val="333333"/>
+                  <a:srgbClr val="2A1800"/>
                 </a:solidFill>
               </a:rPr>
               <a:t>[Professor Name]
@@ -4344,14 +4386,14 @@
       </p:sp>
       <p:sp>
         <p:nvSpPr>
-          <p:cNvPr id="15" name="TextBox 14"/>
+          <p:cNvPr id="16" name="TextBox 15"/>
           <p:cNvSpPr txBox="1"/>
           <p:nvPr/>
         </p:nvSpPr>
         <p:spPr>
           <a:xfrm>
-            <a:off x="6858000" y="3703320"/>
-            <a:ext cx="4114800" cy="411480"/>
+            <a:off x="6858000" y="3639312"/>
+            <a:ext cx="4114800" cy="384048"/>
           </a:xfrm>
           <a:prstGeom prst="rect">
             <a:avLst/>
@@ -4368,7 +4410,7 @@
             <a:r>
               <a:rPr sz="1400" b="1" i="0">
                 <a:solidFill>
-                  <a:srgbClr val="002060"/>
+                  <a:srgbClr val="B84000"/>
                 </a:solidFill>
               </a:rPr>
               <a:t>Presented By:</a:t>
@@ -4378,14 +4420,14 @@
       </p:sp>
       <p:sp>
         <p:nvSpPr>
-          <p:cNvPr id="16" name="TextBox 15"/>
+          <p:cNvPr id="17" name="TextBox 16"/>
           <p:cNvSpPr txBox="1"/>
           <p:nvPr/>
         </p:nvSpPr>
         <p:spPr>
           <a:xfrm>
-            <a:off x="6858000" y="4114800"/>
-            <a:ext cx="4114800" cy="685800"/>
+            <a:off x="6858000" y="4041648"/>
+            <a:ext cx="4114800" cy="713232"/>
           </a:xfrm>
           <a:prstGeom prst="rect">
             <a:avLst/>
@@ -4402,7 +4444,7 @@
             <a:r>
               <a:rPr sz="1300" b="0" i="0">
                 <a:solidFill>
-                  <a:srgbClr val="333333"/>
+                  <a:srgbClr val="2A1800"/>
                 </a:solidFill>
               </a:rPr>
               <a:t>Priyanshi Gupta  [Enrollment No.]
@@ -4413,14 +4455,14 @@
       </p:sp>
       <p:sp>
         <p:nvSpPr>
-          <p:cNvPr id="17" name="TextBox 16"/>
+          <p:cNvPr id="18" name="TextBox 17"/>
           <p:cNvSpPr txBox="1"/>
           <p:nvPr/>
         </p:nvSpPr>
         <p:spPr>
           <a:xfrm>
-            <a:off x="3200400" y="5029200"/>
-            <a:ext cx="5486400" cy="411480"/>
+            <a:off x="3200400" y="4983480"/>
+            <a:ext cx="5486400" cy="384048"/>
           </a:xfrm>
           <a:prstGeom prst="rect">
             <a:avLst/>
@@ -4437,7 +4479,7 @@
             <a:r>
               <a:rPr sz="1300" b="0" i="0">
                 <a:solidFill>
-                  <a:srgbClr val="002060"/>
+                  <a:srgbClr val="5A3800"/>
                 </a:solidFill>
               </a:rPr>
               <a:t>Academic Year: 2024 – 2025</a:t>
@@ -4447,14 +4489,57 @@
       </p:sp>
       <p:sp>
         <p:nvSpPr>
-          <p:cNvPr id="18" name="Rectangle 17"/>
+          <p:cNvPr id="19" name="Rectangle 18"/>
           <p:cNvSpPr/>
           <p:nvPr/>
         </p:nvSpPr>
         <p:spPr>
           <a:xfrm>
-            <a:off x="0" y="6748272"/>
-            <a:ext cx="12188952" cy="109728"/>
+            <a:off x="0" y="6729984"/>
+            <a:ext cx="12188952" cy="128016"/>
+          </a:xfrm>
+          <a:prstGeom prst="rect">
+            <a:avLst/>
+          </a:prstGeom>
+          <a:solidFill>
+            <a:srgbClr val="F4A800"/>
+          </a:solidFill>
+          <a:ln>
+            <a:noFill/>
+          </a:ln>
+        </p:spPr>
+        <p:style>
+          <a:lnRef idx="1">
+            <a:schemeClr val="accent1"/>
+          </a:lnRef>
+          <a:fillRef idx="3">
+            <a:schemeClr val="accent1"/>
+          </a:fillRef>
+          <a:effectRef idx="2">
+            <a:schemeClr val="accent1"/>
+          </a:effectRef>
+          <a:fontRef idx="minor">
+            <a:schemeClr val="lt1"/>
+          </a:fontRef>
+        </p:style>
+        <p:txBody>
+          <a:bodyPr rtlCol="0" anchor="ctr"/>
+          <a:lstStyle/>
+          <a:p>
+            <a:pPr algn="ctr"/>
+          </a:p>
+        </p:txBody>
+      </p:sp>
+      <p:sp>
+        <p:nvSpPr>
+          <p:cNvPr id="20" name="Rectangle 19"/>
+          <p:cNvSpPr/>
+          <p:nvPr/>
+        </p:nvSpPr>
+        <p:spPr>
+          <a:xfrm>
+            <a:off x="0" y="6729984"/>
+            <a:ext cx="320040" cy="128016"/>
           </a:xfrm>
           <a:prstGeom prst="rect">
             <a:avLst/>
@@ -4507,7 +4592,7 @@
     <p:bg>
       <p:bgPr>
         <a:solidFill>
-          <a:srgbClr val="F2F2F2"/>
+          <a:srgbClr val="FFF8F0"/>
         </a:solidFill>
         <a:effectLst/>
       </p:bgPr>
@@ -4535,13 +4620,13 @@
         <p:spPr>
           <a:xfrm>
             <a:off x="0" y="0"/>
-            <a:ext cx="12188952" cy="1280160"/>
-          </a:xfrm>
-          <a:prstGeom prst="rect">
-            <a:avLst/>
-          </a:prstGeom>
-          <a:solidFill>
-            <a:srgbClr val="1F3564"/>
+            <a:ext cx="12188952" cy="1261872"/>
+          </a:xfrm>
+          <a:prstGeom prst="rect">
+            <a:avLst/>
+          </a:prstGeom>
+          <a:solidFill>
+            <a:srgbClr val="B84000"/>
           </a:solidFill>
           <a:ln>
             <a:noFill/>
@@ -4578,13 +4663,13 @@
         <p:spPr>
           <a:xfrm>
             <a:off x="0" y="0"/>
-            <a:ext cx="109728" cy="1280160"/>
-          </a:xfrm>
-          <a:prstGeom prst="rect">
-            <a:avLst/>
-          </a:prstGeom>
-          <a:solidFill>
-            <a:srgbClr val="C00000"/>
+            <a:ext cx="164592" cy="1261872"/>
+          </a:xfrm>
+          <a:prstGeom prst="rect">
+            <a:avLst/>
+          </a:prstGeom>
+          <a:solidFill>
+            <a:srgbClr val="F4A800"/>
           </a:solidFill>
           <a:ln>
             <a:noFill/>
@@ -4614,82 +4699,14 @@
       </p:sp>
       <p:sp>
         <p:nvSpPr>
-          <p:cNvPr id="4" name="TextBox 3"/>
-          <p:cNvSpPr txBox="1"/>
-          <p:nvPr/>
-        </p:nvSpPr>
-        <p:spPr>
-          <a:xfrm>
-            <a:off x="274320" y="182880"/>
-            <a:ext cx="11430000" cy="914400"/>
-          </a:xfrm>
-          <a:prstGeom prst="rect">
-            <a:avLst/>
-          </a:prstGeom>
-          <a:noFill/>
-        </p:spPr>
-        <p:txBody>
-          <a:bodyPr wrap="square">
-            <a:spAutoFit/>
-          </a:bodyPr>
-          <a:lstStyle/>
-          <a:p>
-            <a:pPr algn="l"/>
-            <a:r>
-              <a:rPr sz="3000" b="1" i="0">
-                <a:solidFill>
-                  <a:srgbClr val="FFFFFF"/>
-                </a:solidFill>
-              </a:rPr>
-              <a:t>Outline</a:t>
-            </a:r>
-          </a:p>
-        </p:txBody>
-      </p:sp>
-      <p:sp>
-        <p:nvSpPr>
-          <p:cNvPr id="5" name="TextBox 4"/>
-          <p:cNvSpPr txBox="1"/>
-          <p:nvPr/>
-        </p:nvSpPr>
-        <p:spPr>
-          <a:xfrm>
-            <a:off x="274320" y="749808"/>
-            <a:ext cx="11430000" cy="457200"/>
-          </a:xfrm>
-          <a:prstGeom prst="rect">
-            <a:avLst/>
-          </a:prstGeom>
-          <a:noFill/>
-        </p:spPr>
-        <p:txBody>
-          <a:bodyPr wrap="square">
-            <a:spAutoFit/>
-          </a:bodyPr>
-          <a:lstStyle/>
-          <a:p>
-            <a:pPr algn="l"/>
-            <a:r>
-              <a:rPr sz="1300" b="0" i="0">
-                <a:solidFill>
-                  <a:srgbClr val="00B0F0"/>
-                </a:solidFill>
-              </a:rPr>
-              <a:t>Topics Covered in This Presentation</a:t>
-            </a:r>
-          </a:p>
-        </p:txBody>
-      </p:sp>
-      <p:sp>
-        <p:nvSpPr>
-          <p:cNvPr id="6" name="Rectangle 5"/>
+          <p:cNvPr id="4" name="Rectangle 3"/>
           <p:cNvSpPr/>
           <p:nvPr/>
         </p:nvSpPr>
         <p:spPr>
           <a:xfrm>
-            <a:off x="0" y="6748272"/>
-            <a:ext cx="12188952" cy="109728"/>
+            <a:off x="12115800" y="0"/>
+            <a:ext cx="73152" cy="1261872"/>
           </a:xfrm>
           <a:prstGeom prst="rect">
             <a:avLst/>
@@ -4725,20 +4742,88 @@
       </p:sp>
       <p:sp>
         <p:nvSpPr>
+          <p:cNvPr id="5" name="TextBox 4"/>
+          <p:cNvSpPr txBox="1"/>
+          <p:nvPr/>
+        </p:nvSpPr>
+        <p:spPr>
+          <a:xfrm>
+            <a:off x="320040" y="164592"/>
+            <a:ext cx="11430000" cy="685800"/>
+          </a:xfrm>
+          <a:prstGeom prst="rect">
+            <a:avLst/>
+          </a:prstGeom>
+          <a:noFill/>
+        </p:spPr>
+        <p:txBody>
+          <a:bodyPr wrap="square">
+            <a:spAutoFit/>
+          </a:bodyPr>
+          <a:lstStyle/>
+          <a:p>
+            <a:pPr algn="l"/>
+            <a:r>
+              <a:rPr sz="3000" b="1" i="0">
+                <a:solidFill>
+                  <a:srgbClr val="FFFFFF"/>
+                </a:solidFill>
+              </a:rPr>
+              <a:t>Outline</a:t>
+            </a:r>
+          </a:p>
+        </p:txBody>
+      </p:sp>
+      <p:sp>
+        <p:nvSpPr>
+          <p:cNvPr id="6" name="TextBox 5"/>
+          <p:cNvSpPr txBox="1"/>
+          <p:nvPr/>
+        </p:nvSpPr>
+        <p:spPr>
+          <a:xfrm>
+            <a:off x="320040" y="841248"/>
+            <a:ext cx="11430000" cy="347472"/>
+          </a:xfrm>
+          <a:prstGeom prst="rect">
+            <a:avLst/>
+          </a:prstGeom>
+          <a:noFill/>
+        </p:spPr>
+        <p:txBody>
+          <a:bodyPr wrap="square">
+            <a:spAutoFit/>
+          </a:bodyPr>
+          <a:lstStyle/>
+          <a:p>
+            <a:pPr algn="l"/>
+            <a:r>
+              <a:rPr sz="1200" b="0" i="0">
+                <a:solidFill>
+                  <a:srgbClr val="F4A800"/>
+                </a:solidFill>
+              </a:rPr>
+              <a:t>Topics Covered in This Presentation</a:t>
+            </a:r>
+          </a:p>
+        </p:txBody>
+      </p:sp>
+      <p:sp>
+        <p:nvSpPr>
           <p:cNvPr id="7" name="Rectangle 6"/>
           <p:cNvSpPr/>
           <p:nvPr/>
         </p:nvSpPr>
         <p:spPr>
           <a:xfrm>
-            <a:off x="640080" y="1508760"/>
-            <a:ext cx="5029200" cy="566928"/>
-          </a:xfrm>
-          <a:prstGeom prst="rect">
-            <a:avLst/>
-          </a:prstGeom>
-          <a:solidFill>
-            <a:srgbClr val="1F3564"/>
+            <a:off x="0" y="6729984"/>
+            <a:ext cx="12188952" cy="128016"/>
+          </a:xfrm>
+          <a:prstGeom prst="rect">
+            <a:avLst/>
+          </a:prstGeom>
+          <a:solidFill>
+            <a:srgbClr val="F4A800"/>
           </a:solidFill>
           <a:ln>
             <a:noFill/>
@@ -4774,8 +4859,8 @@
         </p:nvSpPr>
         <p:spPr>
           <a:xfrm>
-            <a:off x="640080" y="1508760"/>
-            <a:ext cx="502920" cy="566928"/>
+            <a:off x="0" y="6729984"/>
+            <a:ext cx="320040" cy="128016"/>
           </a:xfrm>
           <a:prstGeom prst="rect">
             <a:avLst/>
@@ -4811,88 +4896,20 @@
       </p:sp>
       <p:sp>
         <p:nvSpPr>
-          <p:cNvPr id="9" name="TextBox 8"/>
-          <p:cNvSpPr txBox="1"/>
-          <p:nvPr/>
-        </p:nvSpPr>
-        <p:spPr>
-          <a:xfrm>
-            <a:off x="685800" y="1563624"/>
-            <a:ext cx="457200" cy="457200"/>
-          </a:xfrm>
-          <a:prstGeom prst="rect">
-            <a:avLst/>
-          </a:prstGeom>
-          <a:noFill/>
-        </p:spPr>
-        <p:txBody>
-          <a:bodyPr wrap="square">
-            <a:spAutoFit/>
-          </a:bodyPr>
-          <a:lstStyle/>
-          <a:p>
-            <a:pPr algn="ctr"/>
-            <a:r>
-              <a:rPr sz="1800" b="1" i="0">
-                <a:solidFill>
-                  <a:srgbClr val="FFFFFF"/>
-                </a:solidFill>
-              </a:rPr>
-              <a:t>01</a:t>
-            </a:r>
-          </a:p>
-        </p:txBody>
-      </p:sp>
-      <p:sp>
-        <p:nvSpPr>
-          <p:cNvPr id="10" name="TextBox 9"/>
-          <p:cNvSpPr txBox="1"/>
-          <p:nvPr/>
-        </p:nvSpPr>
-        <p:spPr>
-          <a:xfrm>
-            <a:off x="1234440" y="1600200"/>
-            <a:ext cx="4297680" cy="411480"/>
-          </a:xfrm>
-          <a:prstGeom prst="rect">
-            <a:avLst/>
-          </a:prstGeom>
-          <a:noFill/>
-        </p:spPr>
-        <p:txBody>
-          <a:bodyPr wrap="square">
-            <a:spAutoFit/>
-          </a:bodyPr>
-          <a:lstStyle/>
-          <a:p>
-            <a:pPr algn="l"/>
-            <a:r>
-              <a:rPr sz="1700" b="1" i="0">
-                <a:solidFill>
-                  <a:srgbClr val="FFFFFF"/>
-                </a:solidFill>
-              </a:rPr>
-              <a:t>Proposed Area &amp; Topic</a:t>
-            </a:r>
-          </a:p>
-        </p:txBody>
-      </p:sp>
-      <p:sp>
-        <p:nvSpPr>
-          <p:cNvPr id="11" name="Rectangle 10"/>
+          <p:cNvPr id="9" name="Rectangle 8"/>
           <p:cNvSpPr/>
           <p:nvPr/>
         </p:nvSpPr>
         <p:spPr>
           <a:xfrm>
-            <a:off x="6400800" y="1508760"/>
-            <a:ext cx="5029200" cy="566928"/>
-          </a:xfrm>
-          <a:prstGeom prst="rect">
-            <a:avLst/>
-          </a:prstGeom>
-          <a:solidFill>
-            <a:srgbClr val="1F3564"/>
+            <a:off x="640080" y="1481328"/>
+            <a:ext cx="5029200" cy="585216"/>
+          </a:xfrm>
+          <a:prstGeom prst="rect">
+            <a:avLst/>
+          </a:prstGeom>
+          <a:solidFill>
+            <a:srgbClr val="E8601A"/>
           </a:solidFill>
           <a:ln>
             <a:noFill/>
@@ -4922,20 +4939,20 @@
       </p:sp>
       <p:sp>
         <p:nvSpPr>
-          <p:cNvPr id="12" name="Rectangle 11"/>
+          <p:cNvPr id="10" name="Rectangle 9"/>
           <p:cNvSpPr/>
           <p:nvPr/>
         </p:nvSpPr>
         <p:spPr>
           <a:xfrm>
-            <a:off x="6400800" y="1508760"/>
-            <a:ext cx="502920" cy="566928"/>
-          </a:xfrm>
-          <a:prstGeom prst="rect">
-            <a:avLst/>
-          </a:prstGeom>
-          <a:solidFill>
-            <a:srgbClr val="C00000"/>
+            <a:off x="640080" y="1481328"/>
+            <a:ext cx="530352" cy="585216"/>
+          </a:xfrm>
+          <a:prstGeom prst="rect">
+            <a:avLst/>
+          </a:prstGeom>
+          <a:solidFill>
+            <a:srgbClr val="FFFFFF"/>
           </a:solidFill>
           <a:ln>
             <a:noFill/>
@@ -4965,14 +4982,14 @@
       </p:sp>
       <p:sp>
         <p:nvSpPr>
-          <p:cNvPr id="13" name="TextBox 12"/>
+          <p:cNvPr id="11" name="TextBox 10"/>
           <p:cNvSpPr txBox="1"/>
           <p:nvPr/>
         </p:nvSpPr>
         <p:spPr>
           <a:xfrm>
-            <a:off x="6446520" y="1563624"/>
-            <a:ext cx="457200" cy="457200"/>
+            <a:off x="676656" y="1572768"/>
+            <a:ext cx="457200" cy="411480"/>
           </a:xfrm>
           <a:prstGeom prst="rect">
             <a:avLst/>
@@ -4989,24 +5006,24 @@
             <a:r>
               <a:rPr sz="1800" b="1" i="0">
                 <a:solidFill>
-                  <a:srgbClr val="FFFFFF"/>
+                  <a:srgbClr val="E8601A"/>
                 </a:solidFill>
               </a:rPr>
-              <a:t>02</a:t>
-            </a:r>
-          </a:p>
-        </p:txBody>
-      </p:sp>
-      <p:sp>
-        <p:nvSpPr>
-          <p:cNvPr id="14" name="TextBox 13"/>
+              <a:t>01</a:t>
+            </a:r>
+          </a:p>
+        </p:txBody>
+      </p:sp>
+      <p:sp>
+        <p:nvSpPr>
+          <p:cNvPr id="12" name="TextBox 11"/>
           <p:cNvSpPr txBox="1"/>
           <p:nvPr/>
         </p:nvSpPr>
         <p:spPr>
           <a:xfrm>
-            <a:off x="6995160" y="1600200"/>
-            <a:ext cx="4297680" cy="411480"/>
+            <a:off x="1243584" y="1591056"/>
+            <a:ext cx="4297680" cy="384048"/>
           </a:xfrm>
           <a:prstGeom prst="rect">
             <a:avLst/>
@@ -5026,27 +5043,27 @@
                   <a:srgbClr val="FFFFFF"/>
                 </a:solidFill>
               </a:rPr>
-              <a:t>Introduction</a:t>
-            </a:r>
-          </a:p>
-        </p:txBody>
-      </p:sp>
-      <p:sp>
-        <p:nvSpPr>
-          <p:cNvPr id="15" name="Rectangle 14"/>
+              <a:t>Proposed Area &amp; Topic</a:t>
+            </a:r>
+          </a:p>
+        </p:txBody>
+      </p:sp>
+      <p:sp>
+        <p:nvSpPr>
+          <p:cNvPr id="13" name="Rectangle 12"/>
           <p:cNvSpPr/>
           <p:nvPr/>
         </p:nvSpPr>
         <p:spPr>
           <a:xfrm>
-            <a:off x="640080" y="2167128"/>
-            <a:ext cx="5029200" cy="566928"/>
-          </a:xfrm>
-          <a:prstGeom prst="rect">
-            <a:avLst/>
-          </a:prstGeom>
-          <a:solidFill>
-            <a:srgbClr val="1F3564"/>
+            <a:off x="6400800" y="1481328"/>
+            <a:ext cx="5029200" cy="585216"/>
+          </a:xfrm>
+          <a:prstGeom prst="rect">
+            <a:avLst/>
+          </a:prstGeom>
+          <a:solidFill>
+            <a:srgbClr val="F4A800"/>
           </a:solidFill>
           <a:ln>
             <a:noFill/>
@@ -5076,20 +5093,20 @@
       </p:sp>
       <p:sp>
         <p:nvSpPr>
-          <p:cNvPr id="16" name="Rectangle 15"/>
+          <p:cNvPr id="14" name="Rectangle 13"/>
           <p:cNvSpPr/>
           <p:nvPr/>
         </p:nvSpPr>
         <p:spPr>
           <a:xfrm>
-            <a:off x="640080" y="2167128"/>
-            <a:ext cx="502920" cy="566928"/>
-          </a:xfrm>
-          <a:prstGeom prst="rect">
-            <a:avLst/>
-          </a:prstGeom>
-          <a:solidFill>
-            <a:srgbClr val="C00000"/>
+            <a:off x="6400800" y="1481328"/>
+            <a:ext cx="530352" cy="585216"/>
+          </a:xfrm>
+          <a:prstGeom prst="rect">
+            <a:avLst/>
+          </a:prstGeom>
+          <a:solidFill>
+            <a:srgbClr val="FFFFFF"/>
           </a:solidFill>
           <a:ln>
             <a:noFill/>
@@ -5119,14 +5136,14 @@
       </p:sp>
       <p:sp>
         <p:nvSpPr>
-          <p:cNvPr id="17" name="TextBox 16"/>
+          <p:cNvPr id="15" name="TextBox 14"/>
           <p:cNvSpPr txBox="1"/>
           <p:nvPr/>
         </p:nvSpPr>
         <p:spPr>
           <a:xfrm>
-            <a:off x="685800" y="2221992"/>
-            <a:ext cx="457200" cy="457200"/>
+            <a:off x="6437376" y="1572768"/>
+            <a:ext cx="457200" cy="411480"/>
           </a:xfrm>
           <a:prstGeom prst="rect">
             <a:avLst/>
@@ -5143,24 +5160,24 @@
             <a:r>
               <a:rPr sz="1800" b="1" i="0">
                 <a:solidFill>
-                  <a:srgbClr val="FFFFFF"/>
+                  <a:srgbClr val="F4A800"/>
                 </a:solidFill>
               </a:rPr>
-              <a:t>03</a:t>
-            </a:r>
-          </a:p>
-        </p:txBody>
-      </p:sp>
-      <p:sp>
-        <p:nvSpPr>
-          <p:cNvPr id="18" name="TextBox 17"/>
+              <a:t>02</a:t>
+            </a:r>
+          </a:p>
+        </p:txBody>
+      </p:sp>
+      <p:sp>
+        <p:nvSpPr>
+          <p:cNvPr id="16" name="TextBox 15"/>
           <p:cNvSpPr txBox="1"/>
           <p:nvPr/>
         </p:nvSpPr>
         <p:spPr>
           <a:xfrm>
-            <a:off x="1234440" y="2258568"/>
-            <a:ext cx="4297680" cy="411480"/>
+            <a:off x="7004304" y="1591056"/>
+            <a:ext cx="4297680" cy="384048"/>
           </a:xfrm>
           <a:prstGeom prst="rect">
             <a:avLst/>
@@ -5177,30 +5194,30 @@
             <a:r>
               <a:rPr sz="1700" b="1" i="0">
                 <a:solidFill>
-                  <a:srgbClr val="FFFFFF"/>
+                  <a:srgbClr val="2A1800"/>
                 </a:solidFill>
               </a:rPr>
-              <a:t>Objectives</a:t>
-            </a:r>
-          </a:p>
-        </p:txBody>
-      </p:sp>
-      <p:sp>
-        <p:nvSpPr>
-          <p:cNvPr id="19" name="Rectangle 18"/>
+              <a:t>Introduction</a:t>
+            </a:r>
+          </a:p>
+        </p:txBody>
+      </p:sp>
+      <p:sp>
+        <p:nvSpPr>
+          <p:cNvPr id="17" name="Rectangle 16"/>
           <p:cNvSpPr/>
           <p:nvPr/>
         </p:nvSpPr>
         <p:spPr>
           <a:xfrm>
-            <a:off x="6400800" y="2167128"/>
-            <a:ext cx="5029200" cy="566928"/>
-          </a:xfrm>
-          <a:prstGeom prst="rect">
-            <a:avLst/>
-          </a:prstGeom>
-          <a:solidFill>
-            <a:srgbClr val="1F3564"/>
+            <a:off x="640080" y="2167128"/>
+            <a:ext cx="5029200" cy="585216"/>
+          </a:xfrm>
+          <a:prstGeom prst="rect">
+            <a:avLst/>
+          </a:prstGeom>
+          <a:solidFill>
+            <a:srgbClr val="E8601A"/>
           </a:solidFill>
           <a:ln>
             <a:noFill/>
@@ -5230,20 +5247,20 @@
       </p:sp>
       <p:sp>
         <p:nvSpPr>
-          <p:cNvPr id="20" name="Rectangle 19"/>
+          <p:cNvPr id="18" name="Rectangle 17"/>
           <p:cNvSpPr/>
           <p:nvPr/>
         </p:nvSpPr>
         <p:spPr>
           <a:xfrm>
-            <a:off x="6400800" y="2167128"/>
-            <a:ext cx="502920" cy="566928"/>
-          </a:xfrm>
-          <a:prstGeom prst="rect">
-            <a:avLst/>
-          </a:prstGeom>
-          <a:solidFill>
-            <a:srgbClr val="C00000"/>
+            <a:off x="640080" y="2167128"/>
+            <a:ext cx="530352" cy="585216"/>
+          </a:xfrm>
+          <a:prstGeom prst="rect">
+            <a:avLst/>
+          </a:prstGeom>
+          <a:solidFill>
+            <a:srgbClr val="FFFFFF"/>
           </a:solidFill>
           <a:ln>
             <a:noFill/>
@@ -5273,14 +5290,14 @@
       </p:sp>
       <p:sp>
         <p:nvSpPr>
-          <p:cNvPr id="21" name="TextBox 20"/>
+          <p:cNvPr id="19" name="TextBox 18"/>
           <p:cNvSpPr txBox="1"/>
           <p:nvPr/>
         </p:nvSpPr>
         <p:spPr>
           <a:xfrm>
-            <a:off x="6446520" y="2221992"/>
-            <a:ext cx="457200" cy="457200"/>
+            <a:off x="676656" y="2258568"/>
+            <a:ext cx="457200" cy="411480"/>
           </a:xfrm>
           <a:prstGeom prst="rect">
             <a:avLst/>
@@ -5297,24 +5314,24 @@
             <a:r>
               <a:rPr sz="1800" b="1" i="0">
                 <a:solidFill>
-                  <a:srgbClr val="FFFFFF"/>
+                  <a:srgbClr val="E8601A"/>
                 </a:solidFill>
               </a:rPr>
-              <a:t>04</a:t>
-            </a:r>
-          </a:p>
-        </p:txBody>
-      </p:sp>
-      <p:sp>
-        <p:nvSpPr>
-          <p:cNvPr id="22" name="TextBox 21"/>
+              <a:t>03</a:t>
+            </a:r>
+          </a:p>
+        </p:txBody>
+      </p:sp>
+      <p:sp>
+        <p:nvSpPr>
+          <p:cNvPr id="20" name="TextBox 19"/>
           <p:cNvSpPr txBox="1"/>
           <p:nvPr/>
         </p:nvSpPr>
         <p:spPr>
           <a:xfrm>
-            <a:off x="6995160" y="2258568"/>
-            <a:ext cx="4297680" cy="411480"/>
+            <a:off x="1243584" y="2276856"/>
+            <a:ext cx="4297680" cy="384048"/>
           </a:xfrm>
           <a:prstGeom prst="rect">
             <a:avLst/>
@@ -5334,27 +5351,27 @@
                   <a:srgbClr val="FFFFFF"/>
                 </a:solidFill>
               </a:rPr>
-              <a:t>Proposed Methodology</a:t>
-            </a:r>
-          </a:p>
-        </p:txBody>
-      </p:sp>
-      <p:sp>
-        <p:nvSpPr>
-          <p:cNvPr id="23" name="Rectangle 22"/>
+              <a:t>Objectives</a:t>
+            </a:r>
+          </a:p>
+        </p:txBody>
+      </p:sp>
+      <p:sp>
+        <p:nvSpPr>
+          <p:cNvPr id="21" name="Rectangle 20"/>
           <p:cNvSpPr/>
           <p:nvPr/>
         </p:nvSpPr>
         <p:spPr>
           <a:xfrm>
-            <a:off x="640080" y="2825496"/>
-            <a:ext cx="5029200" cy="566928"/>
-          </a:xfrm>
-          <a:prstGeom prst="rect">
-            <a:avLst/>
-          </a:prstGeom>
-          <a:solidFill>
-            <a:srgbClr val="1F3564"/>
+            <a:off x="6400800" y="2167128"/>
+            <a:ext cx="5029200" cy="585216"/>
+          </a:xfrm>
+          <a:prstGeom prst="rect">
+            <a:avLst/>
+          </a:prstGeom>
+          <a:solidFill>
+            <a:srgbClr val="F4A800"/>
           </a:solidFill>
           <a:ln>
             <a:noFill/>
@@ -5384,20 +5401,20 @@
       </p:sp>
       <p:sp>
         <p:nvSpPr>
-          <p:cNvPr id="24" name="Rectangle 23"/>
+          <p:cNvPr id="22" name="Rectangle 21"/>
           <p:cNvSpPr/>
           <p:nvPr/>
         </p:nvSpPr>
         <p:spPr>
           <a:xfrm>
-            <a:off x="640080" y="2825496"/>
-            <a:ext cx="502920" cy="566928"/>
-          </a:xfrm>
-          <a:prstGeom prst="rect">
-            <a:avLst/>
-          </a:prstGeom>
-          <a:solidFill>
-            <a:srgbClr val="C00000"/>
+            <a:off x="6400800" y="2167128"/>
+            <a:ext cx="530352" cy="585216"/>
+          </a:xfrm>
+          <a:prstGeom prst="rect">
+            <a:avLst/>
+          </a:prstGeom>
+          <a:solidFill>
+            <a:srgbClr val="FFFFFF"/>
           </a:solidFill>
           <a:ln>
             <a:noFill/>
@@ -5427,14 +5444,14 @@
       </p:sp>
       <p:sp>
         <p:nvSpPr>
-          <p:cNvPr id="25" name="TextBox 24"/>
+          <p:cNvPr id="23" name="TextBox 22"/>
           <p:cNvSpPr txBox="1"/>
           <p:nvPr/>
         </p:nvSpPr>
         <p:spPr>
           <a:xfrm>
-            <a:off x="685800" y="2880360"/>
-            <a:ext cx="457200" cy="457200"/>
+            <a:off x="6437376" y="2258568"/>
+            <a:ext cx="457200" cy="411480"/>
           </a:xfrm>
           <a:prstGeom prst="rect">
             <a:avLst/>
@@ -5451,24 +5468,24 @@
             <a:r>
               <a:rPr sz="1800" b="1" i="0">
                 <a:solidFill>
-                  <a:srgbClr val="FFFFFF"/>
+                  <a:srgbClr val="F4A800"/>
                 </a:solidFill>
               </a:rPr>
-              <a:t>05</a:t>
-            </a:r>
-          </a:p>
-        </p:txBody>
-      </p:sp>
-      <p:sp>
-        <p:nvSpPr>
-          <p:cNvPr id="26" name="TextBox 25"/>
+              <a:t>04</a:t>
+            </a:r>
+          </a:p>
+        </p:txBody>
+      </p:sp>
+      <p:sp>
+        <p:nvSpPr>
+          <p:cNvPr id="24" name="TextBox 23"/>
           <p:cNvSpPr txBox="1"/>
           <p:nvPr/>
         </p:nvSpPr>
         <p:spPr>
           <a:xfrm>
-            <a:off x="1234440" y="2916936"/>
-            <a:ext cx="4297680" cy="411480"/>
+            <a:off x="7004304" y="2276856"/>
+            <a:ext cx="4297680" cy="384048"/>
           </a:xfrm>
           <a:prstGeom prst="rect">
             <a:avLst/>
@@ -5485,30 +5502,30 @@
             <a:r>
               <a:rPr sz="1700" b="1" i="0">
                 <a:solidFill>
-                  <a:srgbClr val="FFFFFF"/>
+                  <a:srgbClr val="2A1800"/>
                 </a:solidFill>
               </a:rPr>
-              <a:t>Technical Details</a:t>
-            </a:r>
-          </a:p>
-        </p:txBody>
-      </p:sp>
-      <p:sp>
-        <p:nvSpPr>
-          <p:cNvPr id="27" name="Rectangle 26"/>
+              <a:t>Proposed Methodology</a:t>
+            </a:r>
+          </a:p>
+        </p:txBody>
+      </p:sp>
+      <p:sp>
+        <p:nvSpPr>
+          <p:cNvPr id="25" name="Rectangle 24"/>
           <p:cNvSpPr/>
           <p:nvPr/>
         </p:nvSpPr>
         <p:spPr>
           <a:xfrm>
-            <a:off x="6400800" y="2825496"/>
-            <a:ext cx="5029200" cy="566928"/>
-          </a:xfrm>
-          <a:prstGeom prst="rect">
-            <a:avLst/>
-          </a:prstGeom>
-          <a:solidFill>
-            <a:srgbClr val="1F3564"/>
+            <a:off x="640080" y="2852928"/>
+            <a:ext cx="5029200" cy="585216"/>
+          </a:xfrm>
+          <a:prstGeom prst="rect">
+            <a:avLst/>
+          </a:prstGeom>
+          <a:solidFill>
+            <a:srgbClr val="E8601A"/>
           </a:solidFill>
           <a:ln>
             <a:noFill/>
@@ -5538,20 +5555,20 @@
       </p:sp>
       <p:sp>
         <p:nvSpPr>
-          <p:cNvPr id="28" name="Rectangle 27"/>
+          <p:cNvPr id="26" name="Rectangle 25"/>
           <p:cNvSpPr/>
           <p:nvPr/>
         </p:nvSpPr>
         <p:spPr>
           <a:xfrm>
-            <a:off x="6400800" y="2825496"/>
-            <a:ext cx="502920" cy="566928"/>
-          </a:xfrm>
-          <a:prstGeom prst="rect">
-            <a:avLst/>
-          </a:prstGeom>
-          <a:solidFill>
-            <a:srgbClr val="C00000"/>
+            <a:off x="640080" y="2852928"/>
+            <a:ext cx="530352" cy="585216"/>
+          </a:xfrm>
+          <a:prstGeom prst="rect">
+            <a:avLst/>
+          </a:prstGeom>
+          <a:solidFill>
+            <a:srgbClr val="FFFFFF"/>
           </a:solidFill>
           <a:ln>
             <a:noFill/>
@@ -5581,14 +5598,14 @@
       </p:sp>
       <p:sp>
         <p:nvSpPr>
-          <p:cNvPr id="29" name="TextBox 28"/>
+          <p:cNvPr id="27" name="TextBox 26"/>
           <p:cNvSpPr txBox="1"/>
           <p:nvPr/>
         </p:nvSpPr>
         <p:spPr>
           <a:xfrm>
-            <a:off x="6446520" y="2880360"/>
-            <a:ext cx="457200" cy="457200"/>
+            <a:off x="676656" y="2944368"/>
+            <a:ext cx="457200" cy="411480"/>
           </a:xfrm>
           <a:prstGeom prst="rect">
             <a:avLst/>
@@ -5605,24 +5622,24 @@
             <a:r>
               <a:rPr sz="1800" b="1" i="0">
                 <a:solidFill>
-                  <a:srgbClr val="FFFFFF"/>
+                  <a:srgbClr val="E8601A"/>
                 </a:solidFill>
               </a:rPr>
-              <a:t>06</a:t>
-            </a:r>
-          </a:p>
-        </p:txBody>
-      </p:sp>
-      <p:sp>
-        <p:nvSpPr>
-          <p:cNvPr id="30" name="TextBox 29"/>
+              <a:t>05</a:t>
+            </a:r>
+          </a:p>
+        </p:txBody>
+      </p:sp>
+      <p:sp>
+        <p:nvSpPr>
+          <p:cNvPr id="28" name="TextBox 27"/>
           <p:cNvSpPr txBox="1"/>
           <p:nvPr/>
         </p:nvSpPr>
         <p:spPr>
           <a:xfrm>
-            <a:off x="6995160" y="2916936"/>
-            <a:ext cx="4297680" cy="411480"/>
+            <a:off x="1243584" y="2962656"/>
+            <a:ext cx="4297680" cy="384048"/>
           </a:xfrm>
           <a:prstGeom prst="rect">
             <a:avLst/>
@@ -5642,27 +5659,27 @@
                   <a:srgbClr val="FFFFFF"/>
                 </a:solidFill>
               </a:rPr>
-              <a:t>Expected Outcome</a:t>
-            </a:r>
-          </a:p>
-        </p:txBody>
-      </p:sp>
-      <p:sp>
-        <p:nvSpPr>
-          <p:cNvPr id="31" name="Rectangle 30"/>
+              <a:t>Technical Details</a:t>
+            </a:r>
+          </a:p>
+        </p:txBody>
+      </p:sp>
+      <p:sp>
+        <p:nvSpPr>
+          <p:cNvPr id="29" name="Rectangle 28"/>
           <p:cNvSpPr/>
           <p:nvPr/>
         </p:nvSpPr>
         <p:spPr>
           <a:xfrm>
-            <a:off x="640080" y="3483864"/>
-            <a:ext cx="5029200" cy="566928"/>
-          </a:xfrm>
-          <a:prstGeom prst="rect">
-            <a:avLst/>
-          </a:prstGeom>
-          <a:solidFill>
-            <a:srgbClr val="1F3564"/>
+            <a:off x="6400800" y="2852928"/>
+            <a:ext cx="5029200" cy="585216"/>
+          </a:xfrm>
+          <a:prstGeom prst="rect">
+            <a:avLst/>
+          </a:prstGeom>
+          <a:solidFill>
+            <a:srgbClr val="F4A800"/>
           </a:solidFill>
           <a:ln>
             <a:noFill/>
@@ -5692,20 +5709,20 @@
       </p:sp>
       <p:sp>
         <p:nvSpPr>
-          <p:cNvPr id="32" name="Rectangle 31"/>
+          <p:cNvPr id="30" name="Rectangle 29"/>
           <p:cNvSpPr/>
           <p:nvPr/>
         </p:nvSpPr>
         <p:spPr>
           <a:xfrm>
-            <a:off x="640080" y="3483864"/>
-            <a:ext cx="502920" cy="566928"/>
-          </a:xfrm>
-          <a:prstGeom prst="rect">
-            <a:avLst/>
-          </a:prstGeom>
-          <a:solidFill>
-            <a:srgbClr val="C00000"/>
+            <a:off x="6400800" y="2852928"/>
+            <a:ext cx="530352" cy="585216"/>
+          </a:xfrm>
+          <a:prstGeom prst="rect">
+            <a:avLst/>
+          </a:prstGeom>
+          <a:solidFill>
+            <a:srgbClr val="FFFFFF"/>
           </a:solidFill>
           <a:ln>
             <a:noFill/>
@@ -5735,14 +5752,14 @@
       </p:sp>
       <p:sp>
         <p:nvSpPr>
-          <p:cNvPr id="33" name="TextBox 32"/>
+          <p:cNvPr id="31" name="TextBox 30"/>
           <p:cNvSpPr txBox="1"/>
           <p:nvPr/>
         </p:nvSpPr>
         <p:spPr>
           <a:xfrm>
-            <a:off x="685800" y="3538728"/>
-            <a:ext cx="457200" cy="457200"/>
+            <a:off x="6437376" y="2944368"/>
+            <a:ext cx="457200" cy="411480"/>
           </a:xfrm>
           <a:prstGeom prst="rect">
             <a:avLst/>
@@ -5759,7 +5776,161 @@
             <a:r>
               <a:rPr sz="1800" b="1" i="0">
                 <a:solidFill>
-                  <a:srgbClr val="FFFFFF"/>
+                  <a:srgbClr val="F4A800"/>
+                </a:solidFill>
+              </a:rPr>
+              <a:t>06</a:t>
+            </a:r>
+          </a:p>
+        </p:txBody>
+      </p:sp>
+      <p:sp>
+        <p:nvSpPr>
+          <p:cNvPr id="32" name="TextBox 31"/>
+          <p:cNvSpPr txBox="1"/>
+          <p:nvPr/>
+        </p:nvSpPr>
+        <p:spPr>
+          <a:xfrm>
+            <a:off x="7004304" y="2962656"/>
+            <a:ext cx="4297680" cy="384048"/>
+          </a:xfrm>
+          <a:prstGeom prst="rect">
+            <a:avLst/>
+          </a:prstGeom>
+          <a:noFill/>
+        </p:spPr>
+        <p:txBody>
+          <a:bodyPr wrap="square">
+            <a:spAutoFit/>
+          </a:bodyPr>
+          <a:lstStyle/>
+          <a:p>
+            <a:pPr algn="l"/>
+            <a:r>
+              <a:rPr sz="1700" b="1" i="0">
+                <a:solidFill>
+                  <a:srgbClr val="2A1800"/>
+                </a:solidFill>
+              </a:rPr>
+              <a:t>Expected Outcome</a:t>
+            </a:r>
+          </a:p>
+        </p:txBody>
+      </p:sp>
+      <p:sp>
+        <p:nvSpPr>
+          <p:cNvPr id="33" name="Rectangle 32"/>
+          <p:cNvSpPr/>
+          <p:nvPr/>
+        </p:nvSpPr>
+        <p:spPr>
+          <a:xfrm>
+            <a:off x="640080" y="3538728"/>
+            <a:ext cx="5029200" cy="585216"/>
+          </a:xfrm>
+          <a:prstGeom prst="rect">
+            <a:avLst/>
+          </a:prstGeom>
+          <a:solidFill>
+            <a:srgbClr val="E8601A"/>
+          </a:solidFill>
+          <a:ln>
+            <a:noFill/>
+          </a:ln>
+        </p:spPr>
+        <p:style>
+          <a:lnRef idx="1">
+            <a:schemeClr val="accent1"/>
+          </a:lnRef>
+          <a:fillRef idx="3">
+            <a:schemeClr val="accent1"/>
+          </a:fillRef>
+          <a:effectRef idx="2">
+            <a:schemeClr val="accent1"/>
+          </a:effectRef>
+          <a:fontRef idx="minor">
+            <a:schemeClr val="lt1"/>
+          </a:fontRef>
+        </p:style>
+        <p:txBody>
+          <a:bodyPr rtlCol="0" anchor="ctr"/>
+          <a:lstStyle/>
+          <a:p>
+            <a:pPr algn="ctr"/>
+          </a:p>
+        </p:txBody>
+      </p:sp>
+      <p:sp>
+        <p:nvSpPr>
+          <p:cNvPr id="34" name="Rectangle 33"/>
+          <p:cNvSpPr/>
+          <p:nvPr/>
+        </p:nvSpPr>
+        <p:spPr>
+          <a:xfrm>
+            <a:off x="640080" y="3538728"/>
+            <a:ext cx="530352" cy="585216"/>
+          </a:xfrm>
+          <a:prstGeom prst="rect">
+            <a:avLst/>
+          </a:prstGeom>
+          <a:solidFill>
+            <a:srgbClr val="FFFFFF"/>
+          </a:solidFill>
+          <a:ln>
+            <a:noFill/>
+          </a:ln>
+        </p:spPr>
+        <p:style>
+          <a:lnRef idx="1">
+            <a:schemeClr val="accent1"/>
+          </a:lnRef>
+          <a:fillRef idx="3">
+            <a:schemeClr val="accent1"/>
+          </a:fillRef>
+          <a:effectRef idx="2">
+            <a:schemeClr val="accent1"/>
+          </a:effectRef>
+          <a:fontRef idx="minor">
+            <a:schemeClr val="lt1"/>
+          </a:fontRef>
+        </p:style>
+        <p:txBody>
+          <a:bodyPr rtlCol="0" anchor="ctr"/>
+          <a:lstStyle/>
+          <a:p>
+            <a:pPr algn="ctr"/>
+          </a:p>
+        </p:txBody>
+      </p:sp>
+      <p:sp>
+        <p:nvSpPr>
+          <p:cNvPr id="35" name="TextBox 34"/>
+          <p:cNvSpPr txBox="1"/>
+          <p:nvPr/>
+        </p:nvSpPr>
+        <p:spPr>
+          <a:xfrm>
+            <a:off x="676656" y="3630168"/>
+            <a:ext cx="457200" cy="411480"/>
+          </a:xfrm>
+          <a:prstGeom prst="rect">
+            <a:avLst/>
+          </a:prstGeom>
+          <a:noFill/>
+        </p:spPr>
+        <p:txBody>
+          <a:bodyPr wrap="square">
+            <a:spAutoFit/>
+          </a:bodyPr>
+          <a:lstStyle/>
+          <a:p>
+            <a:pPr algn="ctr"/>
+            <a:r>
+              <a:rPr sz="1800" b="1" i="0">
+                <a:solidFill>
+                  <a:srgbClr val="E8601A"/>
                 </a:solidFill>
               </a:rPr>
               <a:t>07</a:t>
@@ -5769,14 +5940,14 @@
       </p:sp>
       <p:sp>
         <p:nvSpPr>
-          <p:cNvPr id="34" name="TextBox 33"/>
+          <p:cNvPr id="36" name="TextBox 35"/>
           <p:cNvSpPr txBox="1"/>
           <p:nvPr/>
         </p:nvSpPr>
         <p:spPr>
           <a:xfrm>
-            <a:off x="1234440" y="3575304"/>
-            <a:ext cx="4297680" cy="411480"/>
+            <a:off x="1243584" y="3648456"/>
+            <a:ext cx="4297680" cy="384048"/>
           </a:xfrm>
           <a:prstGeom prst="rect">
             <a:avLst/>
@@ -5820,7 +5991,7 @@
     <p:bg>
       <p:bgPr>
         <a:solidFill>
-          <a:srgbClr val="FFFFFF"/>
+          <a:srgbClr val="FFF8F0"/>
         </a:solidFill>
         <a:effectLst/>
       </p:bgPr>
@@ -5848,13 +6019,13 @@
         <p:spPr>
           <a:xfrm>
             <a:off x="0" y="0"/>
-            <a:ext cx="12188952" cy="1280160"/>
-          </a:xfrm>
-          <a:prstGeom prst="rect">
-            <a:avLst/>
-          </a:prstGeom>
-          <a:solidFill>
-            <a:srgbClr val="1F3564"/>
+            <a:ext cx="12188952" cy="1261872"/>
+          </a:xfrm>
+          <a:prstGeom prst="rect">
+            <a:avLst/>
+          </a:prstGeom>
+          <a:solidFill>
+            <a:srgbClr val="B84000"/>
           </a:solidFill>
           <a:ln>
             <a:noFill/>
@@ -5891,13 +6062,13 @@
         <p:spPr>
           <a:xfrm>
             <a:off x="0" y="0"/>
-            <a:ext cx="109728" cy="1280160"/>
-          </a:xfrm>
-          <a:prstGeom prst="rect">
-            <a:avLst/>
-          </a:prstGeom>
-          <a:solidFill>
-            <a:srgbClr val="C00000"/>
+            <a:ext cx="164592" cy="1261872"/>
+          </a:xfrm>
+          <a:prstGeom prst="rect">
+            <a:avLst/>
+          </a:prstGeom>
+          <a:solidFill>
+            <a:srgbClr val="F4A800"/>
           </a:solidFill>
           <a:ln>
             <a:noFill/>
@@ -5927,82 +6098,14 @@
       </p:sp>
       <p:sp>
         <p:nvSpPr>
-          <p:cNvPr id="4" name="TextBox 3"/>
-          <p:cNvSpPr txBox="1"/>
-          <p:nvPr/>
-        </p:nvSpPr>
-        <p:spPr>
-          <a:xfrm>
-            <a:off x="274320" y="182880"/>
-            <a:ext cx="11430000" cy="914400"/>
-          </a:xfrm>
-          <a:prstGeom prst="rect">
-            <a:avLst/>
-          </a:prstGeom>
-          <a:noFill/>
-        </p:spPr>
-        <p:txBody>
-          <a:bodyPr wrap="square">
-            <a:spAutoFit/>
-          </a:bodyPr>
-          <a:lstStyle/>
-          <a:p>
-            <a:pPr algn="l"/>
-            <a:r>
-              <a:rPr sz="3000" b="1" i="0">
-                <a:solidFill>
-                  <a:srgbClr val="FFFFFF"/>
-                </a:solidFill>
-              </a:rPr>
-              <a:t>Proposed Area &amp; Topic</a:t>
-            </a:r>
-          </a:p>
-        </p:txBody>
-      </p:sp>
-      <p:sp>
-        <p:nvSpPr>
-          <p:cNvPr id="5" name="TextBox 4"/>
-          <p:cNvSpPr txBox="1"/>
-          <p:nvPr/>
-        </p:nvSpPr>
-        <p:spPr>
-          <a:xfrm>
-            <a:off x="274320" y="749808"/>
-            <a:ext cx="11430000" cy="457200"/>
-          </a:xfrm>
-          <a:prstGeom prst="rect">
-            <a:avLst/>
-          </a:prstGeom>
-          <a:noFill/>
-        </p:spPr>
-        <p:txBody>
-          <a:bodyPr wrap="square">
-            <a:spAutoFit/>
-          </a:bodyPr>
-          <a:lstStyle/>
-          <a:p>
-            <a:pPr algn="l"/>
-            <a:r>
-              <a:rPr sz="1300" b="0" i="0">
-                <a:solidFill>
-                  <a:srgbClr val="00B0F0"/>
-                </a:solidFill>
-              </a:rPr>
-              <a:t>Problem Domain  |  Research Focus  |  Motivation</a:t>
-            </a:r>
-          </a:p>
-        </p:txBody>
-      </p:sp>
-      <p:sp>
-        <p:nvSpPr>
-          <p:cNvPr id="6" name="Rectangle 5"/>
+          <p:cNvPr id="4" name="Rectangle 3"/>
           <p:cNvSpPr/>
           <p:nvPr/>
         </p:nvSpPr>
         <p:spPr>
           <a:xfrm>
-            <a:off x="0" y="6748272"/>
-            <a:ext cx="12188952" cy="109728"/>
+            <a:off x="12115800" y="0"/>
+            <a:ext cx="73152" cy="1261872"/>
           </a:xfrm>
           <a:prstGeom prst="rect">
             <a:avLst/>
@@ -6038,20 +6141,88 @@
       </p:sp>
       <p:sp>
         <p:nvSpPr>
+          <p:cNvPr id="5" name="TextBox 4"/>
+          <p:cNvSpPr txBox="1"/>
+          <p:nvPr/>
+        </p:nvSpPr>
+        <p:spPr>
+          <a:xfrm>
+            <a:off x="320040" y="164592"/>
+            <a:ext cx="11430000" cy="685800"/>
+          </a:xfrm>
+          <a:prstGeom prst="rect">
+            <a:avLst/>
+          </a:prstGeom>
+          <a:noFill/>
+        </p:spPr>
+        <p:txBody>
+          <a:bodyPr wrap="square">
+            <a:spAutoFit/>
+          </a:bodyPr>
+          <a:lstStyle/>
+          <a:p>
+            <a:pPr algn="l"/>
+            <a:r>
+              <a:rPr sz="3000" b="1" i="0">
+                <a:solidFill>
+                  <a:srgbClr val="FFFFFF"/>
+                </a:solidFill>
+              </a:rPr>
+              <a:t>Proposed Area &amp; Topic</a:t>
+            </a:r>
+          </a:p>
+        </p:txBody>
+      </p:sp>
+      <p:sp>
+        <p:nvSpPr>
+          <p:cNvPr id="6" name="TextBox 5"/>
+          <p:cNvSpPr txBox="1"/>
+          <p:nvPr/>
+        </p:nvSpPr>
+        <p:spPr>
+          <a:xfrm>
+            <a:off x="320040" y="841248"/>
+            <a:ext cx="11430000" cy="347472"/>
+          </a:xfrm>
+          <a:prstGeom prst="rect">
+            <a:avLst/>
+          </a:prstGeom>
+          <a:noFill/>
+        </p:spPr>
+        <p:txBody>
+          <a:bodyPr wrap="square">
+            <a:spAutoFit/>
+          </a:bodyPr>
+          <a:lstStyle/>
+          <a:p>
+            <a:pPr algn="l"/>
+            <a:r>
+              <a:rPr sz="1200" b="0" i="0">
+                <a:solidFill>
+                  <a:srgbClr val="F4A800"/>
+                </a:solidFill>
+              </a:rPr>
+              <a:t>Problem Domain  |  Research Focus  |  Motivation</a:t>
+            </a:r>
+          </a:p>
+        </p:txBody>
+      </p:sp>
+      <p:sp>
+        <p:nvSpPr>
           <p:cNvPr id="7" name="Rectangle 6"/>
           <p:cNvSpPr/>
           <p:nvPr/>
         </p:nvSpPr>
         <p:spPr>
           <a:xfrm>
-            <a:off x="457200" y="1417320"/>
-            <a:ext cx="5303520" cy="5120640"/>
-          </a:xfrm>
-          <a:prstGeom prst="rect">
-            <a:avLst/>
-          </a:prstGeom>
-          <a:solidFill>
-            <a:srgbClr val="F2F2F2"/>
+            <a:off x="0" y="6729984"/>
+            <a:ext cx="12188952" cy="128016"/>
+          </a:xfrm>
+          <a:prstGeom prst="rect">
+            <a:avLst/>
+          </a:prstGeom>
+          <a:solidFill>
+            <a:srgbClr val="F4A800"/>
           </a:solidFill>
           <a:ln>
             <a:noFill/>
@@ -6087,8 +6258,8 @@
         </p:nvSpPr>
         <p:spPr>
           <a:xfrm>
-            <a:off x="457200" y="1417320"/>
-            <a:ext cx="5303520" cy="457200"/>
+            <a:off x="0" y="6729984"/>
+            <a:ext cx="320040" cy="128016"/>
           </a:xfrm>
           <a:prstGeom prst="rect">
             <a:avLst/>
@@ -6124,224 +6295,20 @@
       </p:sp>
       <p:sp>
         <p:nvSpPr>
-          <p:cNvPr id="9" name="TextBox 8"/>
-          <p:cNvSpPr txBox="1"/>
-          <p:nvPr/>
-        </p:nvSpPr>
-        <p:spPr>
-          <a:xfrm>
-            <a:off x="548640" y="1463040"/>
-            <a:ext cx="5029200" cy="365760"/>
-          </a:xfrm>
-          <a:prstGeom prst="rect">
-            <a:avLst/>
-          </a:prstGeom>
-          <a:noFill/>
-        </p:spPr>
-        <p:txBody>
-          <a:bodyPr wrap="square">
-            <a:spAutoFit/>
-          </a:bodyPr>
-          <a:lstStyle/>
-          <a:p>
-            <a:pPr algn="l"/>
-            <a:r>
-              <a:rPr sz="1400" b="1" i="0">
-                <a:solidFill>
-                  <a:srgbClr val="FFFFFF"/>
-                </a:solidFill>
-              </a:rPr>
-              <a:t>AREA</a:t>
-            </a:r>
-          </a:p>
-        </p:txBody>
-      </p:sp>
-      <p:sp>
-        <p:nvSpPr>
-          <p:cNvPr id="10" name="TextBox 9"/>
-          <p:cNvSpPr txBox="1"/>
-          <p:nvPr/>
-        </p:nvSpPr>
-        <p:spPr>
-          <a:xfrm>
-            <a:off x="594360" y="1993392"/>
-            <a:ext cx="5029200" cy="548640"/>
-          </a:xfrm>
-          <a:prstGeom prst="rect">
-            <a:avLst/>
-          </a:prstGeom>
-          <a:noFill/>
-        </p:spPr>
-        <p:txBody>
-          <a:bodyPr wrap="square">
-            <a:spAutoFit/>
-          </a:bodyPr>
-          <a:lstStyle/>
-          <a:p>
-            <a:pPr algn="l"/>
-            <a:r>
-              <a:rPr sz="1500" b="0" i="0">
-                <a:solidFill>
-                  <a:srgbClr val="202020"/>
-                </a:solidFill>
-              </a:rPr>
-              <a:t>• Cybersecurity &amp; Network Traffic Analysis</a:t>
-            </a:r>
-          </a:p>
-        </p:txBody>
-      </p:sp>
-      <p:sp>
-        <p:nvSpPr>
-          <p:cNvPr id="11" name="TextBox 10"/>
-          <p:cNvSpPr txBox="1"/>
-          <p:nvPr/>
-        </p:nvSpPr>
-        <p:spPr>
-          <a:xfrm>
-            <a:off x="594360" y="2560320"/>
-            <a:ext cx="5029200" cy="548640"/>
-          </a:xfrm>
-          <a:prstGeom prst="rect">
-            <a:avLst/>
-          </a:prstGeom>
-          <a:noFill/>
-        </p:spPr>
-        <p:txBody>
-          <a:bodyPr wrap="square">
-            <a:spAutoFit/>
-          </a:bodyPr>
-          <a:lstStyle/>
-          <a:p>
-            <a:pPr algn="l"/>
-            <a:r>
-              <a:rPr sz="1500" b="0" i="0">
-                <a:solidFill>
-                  <a:srgbClr val="202020"/>
-                </a:solidFill>
-              </a:rPr>
-              <a:t>• Intrusion Detection Systems (IDS)</a:t>
-            </a:r>
-          </a:p>
-        </p:txBody>
-      </p:sp>
-      <p:sp>
-        <p:nvSpPr>
-          <p:cNvPr id="12" name="TextBox 11"/>
-          <p:cNvSpPr txBox="1"/>
-          <p:nvPr/>
-        </p:nvSpPr>
-        <p:spPr>
-          <a:xfrm>
-            <a:off x="594360" y="3127248"/>
-            <a:ext cx="5029200" cy="548640"/>
-          </a:xfrm>
-          <a:prstGeom prst="rect">
-            <a:avLst/>
-          </a:prstGeom>
-          <a:noFill/>
-        </p:spPr>
-        <p:txBody>
-          <a:bodyPr wrap="square">
-            <a:spAutoFit/>
-          </a:bodyPr>
-          <a:lstStyle/>
-          <a:p>
-            <a:pPr algn="l"/>
-            <a:r>
-              <a:rPr sz="1500" b="0" i="0">
-                <a:solidFill>
-                  <a:srgbClr val="202020"/>
-                </a:solidFill>
-              </a:rPr>
-              <a:t>• Real-time Packet Monitoring</a:t>
-            </a:r>
-          </a:p>
-        </p:txBody>
-      </p:sp>
-      <p:sp>
-        <p:nvSpPr>
-          <p:cNvPr id="13" name="TextBox 12"/>
-          <p:cNvSpPr txBox="1"/>
-          <p:nvPr/>
-        </p:nvSpPr>
-        <p:spPr>
-          <a:xfrm>
-            <a:off x="548640" y="3657600"/>
-            <a:ext cx="5029200" cy="365760"/>
-          </a:xfrm>
-          <a:prstGeom prst="rect">
-            <a:avLst/>
-          </a:prstGeom>
-          <a:noFill/>
-        </p:spPr>
-        <p:txBody>
-          <a:bodyPr wrap="square">
-            <a:spAutoFit/>
-          </a:bodyPr>
-          <a:lstStyle/>
-          <a:p>
-            <a:pPr algn="l"/>
-            <a:r>
-              <a:rPr sz="1300" b="1" i="0">
-                <a:solidFill>
-                  <a:srgbClr val="C00000"/>
-                </a:solidFill>
-              </a:rPr>
-              <a:t>MOTIVATION</a:t>
-            </a:r>
-          </a:p>
-        </p:txBody>
-      </p:sp>
-      <p:sp>
-        <p:nvSpPr>
-          <p:cNvPr id="14" name="TextBox 13"/>
-          <p:cNvSpPr txBox="1"/>
-          <p:nvPr/>
-        </p:nvSpPr>
-        <p:spPr>
-          <a:xfrm>
-            <a:off x="548640" y="4023360"/>
-            <a:ext cx="5029200" cy="1463040"/>
-          </a:xfrm>
-          <a:prstGeom prst="rect">
-            <a:avLst/>
-          </a:prstGeom>
-          <a:noFill/>
-        </p:spPr>
-        <p:txBody>
-          <a:bodyPr wrap="square">
-            <a:spAutoFit/>
-          </a:bodyPr>
-          <a:lstStyle/>
-          <a:p>
-            <a:pPr algn="l"/>
-            <a:r>
-              <a:rPr sz="1400" b="0" i="0">
-                <a:solidFill>
-                  <a:srgbClr val="333333"/>
-                </a:solidFill>
-              </a:rPr>
-              <a:t>Cyber attacks are rising exponentially. Traditional monitoring tools are complex and siloed. CyberTrace aims to bring clarity and simplicity to network threat detection using open-source technology.</a:t>
-            </a:r>
-          </a:p>
-        </p:txBody>
-      </p:sp>
-      <p:sp>
-        <p:nvSpPr>
-          <p:cNvPr id="15" name="Rectangle 14"/>
+          <p:cNvPr id="9" name="Rectangle 8"/>
           <p:cNvSpPr/>
           <p:nvPr/>
         </p:nvSpPr>
         <p:spPr>
           <a:xfrm>
-            <a:off x="6035040" y="1417320"/>
-            <a:ext cx="5669280" cy="5120640"/>
-          </a:xfrm>
-          <a:prstGeom prst="rect">
-            <a:avLst/>
-          </a:prstGeom>
-          <a:solidFill>
-            <a:srgbClr val="1F3564"/>
+            <a:off x="457200" y="1371600"/>
+            <a:ext cx="5349240" cy="5166360"/>
+          </a:xfrm>
+          <a:prstGeom prst="rect">
+            <a:avLst/>
+          </a:prstGeom>
+          <a:solidFill>
+            <a:srgbClr val="FDF0E0"/>
           </a:solidFill>
           <a:ln>
             <a:noFill/>
@@ -6371,20 +6338,20 @@
       </p:sp>
       <p:sp>
         <p:nvSpPr>
-          <p:cNvPr id="16" name="Rectangle 15"/>
+          <p:cNvPr id="10" name="Rectangle 9"/>
           <p:cNvSpPr/>
           <p:nvPr/>
         </p:nvSpPr>
         <p:spPr>
           <a:xfrm>
-            <a:off x="6035040" y="1417320"/>
-            <a:ext cx="5669280" cy="457200"/>
-          </a:xfrm>
-          <a:prstGeom prst="rect">
-            <a:avLst/>
-          </a:prstGeom>
-          <a:solidFill>
-            <a:srgbClr val="0070C0"/>
+            <a:off x="457200" y="1371600"/>
+            <a:ext cx="5349240" cy="475488"/>
+          </a:xfrm>
+          <a:prstGeom prst="rect">
+            <a:avLst/>
+          </a:prstGeom>
+          <a:solidFill>
+            <a:srgbClr val="E8601A"/>
           </a:solidFill>
           <a:ln>
             <a:noFill/>
@@ -6414,14 +6381,14 @@
       </p:sp>
       <p:sp>
         <p:nvSpPr>
-          <p:cNvPr id="17" name="TextBox 16"/>
+          <p:cNvPr id="11" name="TextBox 10"/>
           <p:cNvSpPr txBox="1"/>
           <p:nvPr/>
         </p:nvSpPr>
         <p:spPr>
           <a:xfrm>
-            <a:off x="6126480" y="1463040"/>
-            <a:ext cx="5486400" cy="365760"/>
+            <a:off x="566928" y="1417320"/>
+            <a:ext cx="5029200" cy="365760"/>
           </a:xfrm>
           <a:prstGeom prst="rect">
             <a:avLst/>
@@ -6441,21 +6408,21 @@
                   <a:srgbClr val="FFFFFF"/>
                 </a:solidFill>
               </a:rPr>
-              <a:t>TOPIC</a:t>
-            </a:r>
-          </a:p>
-        </p:txBody>
-      </p:sp>
-      <p:sp>
-        <p:nvSpPr>
-          <p:cNvPr id="18" name="TextBox 17"/>
+              <a:t>AREA</a:t>
+            </a:r>
+          </a:p>
+        </p:txBody>
+      </p:sp>
+      <p:sp>
+        <p:nvSpPr>
+          <p:cNvPr id="12" name="TextBox 11"/>
           <p:cNvSpPr txBox="1"/>
           <p:nvPr/>
         </p:nvSpPr>
         <p:spPr>
           <a:xfrm>
-            <a:off x="6126480" y="1993392"/>
-            <a:ext cx="5303520" cy="457200"/>
+            <a:off x="594360" y="1993392"/>
+            <a:ext cx="5029200" cy="502920"/>
           </a:xfrm>
           <a:prstGeom prst="rect">
             <a:avLst/>
@@ -6470,26 +6437,26 @@
           <a:p>
             <a:pPr algn="l"/>
             <a:r>
-              <a:rPr sz="2400" b="1" i="0">
-                <a:solidFill>
-                  <a:srgbClr val="00B0F0"/>
+              <a:rPr sz="1400" b="0" i="0">
+                <a:solidFill>
+                  <a:srgbClr val="2A1800"/>
                 </a:solidFill>
               </a:rPr>
-              <a:t>CyberTrace</a:t>
-            </a:r>
-          </a:p>
-        </p:txBody>
-      </p:sp>
-      <p:sp>
-        <p:nvSpPr>
-          <p:cNvPr id="19" name="TextBox 18"/>
+              <a:t>• Cybersecurity &amp; Network Traffic Analysis</a:t>
+            </a:r>
+          </a:p>
+        </p:txBody>
+      </p:sp>
+      <p:sp>
+        <p:nvSpPr>
+          <p:cNvPr id="13" name="TextBox 12"/>
           <p:cNvSpPr txBox="1"/>
           <p:nvPr/>
         </p:nvSpPr>
         <p:spPr>
           <a:xfrm>
-            <a:off x="6126480" y="2542032"/>
-            <a:ext cx="5303520" cy="640080"/>
+            <a:off x="594360" y="2587752"/>
+            <a:ext cx="5029200" cy="502920"/>
           </a:xfrm>
           <a:prstGeom prst="rect">
             <a:avLst/>
@@ -6504,33 +6471,66 @@
           <a:p>
             <a:pPr algn="l"/>
             <a:r>
-              <a:rPr sz="1500" b="0" i="0">
-                <a:solidFill>
-                  <a:srgbClr val="FFFFFF"/>
+              <a:rPr sz="1400" b="0" i="0">
+                <a:solidFill>
+                  <a:srgbClr val="2A1800"/>
                 </a:solidFill>
               </a:rPr>
-              <a:t>Real-Time Network Security Monitoring
-&amp; Anomaly Detection System</a:t>
-            </a:r>
-          </a:p>
-        </p:txBody>
-      </p:sp>
-      <p:sp>
-        <p:nvSpPr>
-          <p:cNvPr id="20" name="Rectangle 19"/>
+              <a:t>• Intrusion Detection Systems (IDS)</a:t>
+            </a:r>
+          </a:p>
+        </p:txBody>
+      </p:sp>
+      <p:sp>
+        <p:nvSpPr>
+          <p:cNvPr id="14" name="TextBox 13"/>
+          <p:cNvSpPr txBox="1"/>
+          <p:nvPr/>
+        </p:nvSpPr>
+        <p:spPr>
+          <a:xfrm>
+            <a:off x="594360" y="3182112"/>
+            <a:ext cx="5029200" cy="502920"/>
+          </a:xfrm>
+          <a:prstGeom prst="rect">
+            <a:avLst/>
+          </a:prstGeom>
+          <a:noFill/>
+        </p:spPr>
+        <p:txBody>
+          <a:bodyPr wrap="square">
+            <a:spAutoFit/>
+          </a:bodyPr>
+          <a:lstStyle/>
+          <a:p>
+            <a:pPr algn="l"/>
+            <a:r>
+              <a:rPr sz="1400" b="0" i="0">
+                <a:solidFill>
+                  <a:srgbClr val="2A1800"/>
+                </a:solidFill>
+              </a:rPr>
+              <a:t>• Real-time Packet Monitoring</a:t>
+            </a:r>
+          </a:p>
+        </p:txBody>
+      </p:sp>
+      <p:sp>
+        <p:nvSpPr>
+          <p:cNvPr id="15" name="Rectangle 14"/>
           <p:cNvSpPr/>
           <p:nvPr/>
         </p:nvSpPr>
         <p:spPr>
           <a:xfrm>
-            <a:off x="6126480" y="3291840"/>
-            <a:ext cx="5029200" cy="19050"/>
-          </a:xfrm>
-          <a:prstGeom prst="rect">
-            <a:avLst/>
-          </a:prstGeom>
-          <a:solidFill>
-            <a:srgbClr val="C00000"/>
+            <a:off x="594360" y="3520440"/>
+            <a:ext cx="4937760" cy="19050"/>
+          </a:xfrm>
+          <a:prstGeom prst="rect">
+            <a:avLst/>
+          </a:prstGeom>
+          <a:solidFill>
+            <a:srgbClr val="E8601A"/>
           </a:solidFill>
           <a:ln>
             <a:noFill/>
@@ -6560,14 +6560,14 @@
       </p:sp>
       <p:sp>
         <p:nvSpPr>
-          <p:cNvPr id="21" name="TextBox 20"/>
+          <p:cNvPr id="16" name="TextBox 15"/>
           <p:cNvSpPr txBox="1"/>
           <p:nvPr/>
         </p:nvSpPr>
         <p:spPr>
           <a:xfrm>
-            <a:off x="6126480" y="3429000"/>
-            <a:ext cx="5303520" cy="2834640"/>
+            <a:off x="594360" y="3657600"/>
+            <a:ext cx="5029200" cy="347472"/>
           </a:xfrm>
           <a:prstGeom prst="rect">
             <a:avLst/>
@@ -6582,9 +6582,309 @@
           <a:p>
             <a:pPr algn="l"/>
             <a:r>
+              <a:rPr sz="1300" b="1" i="0">
+                <a:solidFill>
+                  <a:srgbClr val="C00000"/>
+                </a:solidFill>
+              </a:rPr>
+              <a:t>MOTIVATION</a:t>
+            </a:r>
+          </a:p>
+        </p:txBody>
+      </p:sp>
+      <p:sp>
+        <p:nvSpPr>
+          <p:cNvPr id="17" name="TextBox 16"/>
+          <p:cNvSpPr txBox="1"/>
+          <p:nvPr/>
+        </p:nvSpPr>
+        <p:spPr>
+          <a:xfrm>
+            <a:off x="594360" y="4041648"/>
+            <a:ext cx="5029200" cy="1417320"/>
+          </a:xfrm>
+          <a:prstGeom prst="rect">
+            <a:avLst/>
+          </a:prstGeom>
+          <a:noFill/>
+        </p:spPr>
+        <p:txBody>
+          <a:bodyPr wrap="square">
+            <a:spAutoFit/>
+          </a:bodyPr>
+          <a:lstStyle/>
+          <a:p>
+            <a:pPr algn="l"/>
+            <a:r>
+              <a:rPr sz="1300" b="0" i="0">
+                <a:solidFill>
+                  <a:srgbClr val="2A1800"/>
+                </a:solidFill>
+              </a:rPr>
+              <a:t>Cyber attacks are rising exponentially. Traditional monitoring tools are complex and siloed. CyberTrace brings clarity to threat detection using open-source technology.</a:t>
+            </a:r>
+          </a:p>
+        </p:txBody>
+      </p:sp>
+      <p:sp>
+        <p:nvSpPr>
+          <p:cNvPr id="18" name="Rectangle 17"/>
+          <p:cNvSpPr/>
+          <p:nvPr/>
+        </p:nvSpPr>
+        <p:spPr>
+          <a:xfrm>
+            <a:off x="6035040" y="1371600"/>
+            <a:ext cx="5715000" cy="5166360"/>
+          </a:xfrm>
+          <a:prstGeom prst="rect">
+            <a:avLst/>
+          </a:prstGeom>
+          <a:solidFill>
+            <a:srgbClr val="B84000"/>
+          </a:solidFill>
+          <a:ln>
+            <a:noFill/>
+          </a:ln>
+        </p:spPr>
+        <p:style>
+          <a:lnRef idx="1">
+            <a:schemeClr val="accent1"/>
+          </a:lnRef>
+          <a:fillRef idx="3">
+            <a:schemeClr val="accent1"/>
+          </a:fillRef>
+          <a:effectRef idx="2">
+            <a:schemeClr val="accent1"/>
+          </a:effectRef>
+          <a:fontRef idx="minor">
+            <a:schemeClr val="lt1"/>
+          </a:fontRef>
+        </p:style>
+        <p:txBody>
+          <a:bodyPr rtlCol="0" anchor="ctr"/>
+          <a:lstStyle/>
+          <a:p>
+            <a:pPr algn="ctr"/>
+          </a:p>
+        </p:txBody>
+      </p:sp>
+      <p:sp>
+        <p:nvSpPr>
+          <p:cNvPr id="19" name="Rectangle 18"/>
+          <p:cNvSpPr/>
+          <p:nvPr/>
+        </p:nvSpPr>
+        <p:spPr>
+          <a:xfrm>
+            <a:off x="6035040" y="1371600"/>
+            <a:ext cx="5715000" cy="475488"/>
+          </a:xfrm>
+          <a:prstGeom prst="rect">
+            <a:avLst/>
+          </a:prstGeom>
+          <a:solidFill>
+            <a:srgbClr val="F4A800"/>
+          </a:solidFill>
+          <a:ln>
+            <a:noFill/>
+          </a:ln>
+        </p:spPr>
+        <p:style>
+          <a:lnRef idx="1">
+            <a:schemeClr val="accent1"/>
+          </a:lnRef>
+          <a:fillRef idx="3">
+            <a:schemeClr val="accent1"/>
+          </a:fillRef>
+          <a:effectRef idx="2">
+            <a:schemeClr val="accent1"/>
+          </a:effectRef>
+          <a:fontRef idx="minor">
+            <a:schemeClr val="lt1"/>
+          </a:fontRef>
+        </p:style>
+        <p:txBody>
+          <a:bodyPr rtlCol="0" anchor="ctr"/>
+          <a:lstStyle/>
+          <a:p>
+            <a:pPr algn="ctr"/>
+          </a:p>
+        </p:txBody>
+      </p:sp>
+      <p:sp>
+        <p:nvSpPr>
+          <p:cNvPr id="20" name="TextBox 19"/>
+          <p:cNvSpPr txBox="1"/>
+          <p:nvPr/>
+        </p:nvSpPr>
+        <p:spPr>
+          <a:xfrm>
+            <a:off x="6144768" y="1417320"/>
+            <a:ext cx="5486400" cy="365760"/>
+          </a:xfrm>
+          <a:prstGeom prst="rect">
+            <a:avLst/>
+          </a:prstGeom>
+          <a:noFill/>
+        </p:spPr>
+        <p:txBody>
+          <a:bodyPr wrap="square">
+            <a:spAutoFit/>
+          </a:bodyPr>
+          <a:lstStyle/>
+          <a:p>
+            <a:pPr algn="l"/>
+            <a:r>
+              <a:rPr sz="1400" b="1" i="0">
+                <a:solidFill>
+                  <a:srgbClr val="2A1800"/>
+                </a:solidFill>
+              </a:rPr>
+              <a:t>TOPIC</a:t>
+            </a:r>
+          </a:p>
+        </p:txBody>
+      </p:sp>
+      <p:sp>
+        <p:nvSpPr>
+          <p:cNvPr id="21" name="TextBox 20"/>
+          <p:cNvSpPr txBox="1"/>
+          <p:nvPr/>
+        </p:nvSpPr>
+        <p:spPr>
+          <a:xfrm>
+            <a:off x="6144768" y="1965960"/>
+            <a:ext cx="5349240" cy="502920"/>
+          </a:xfrm>
+          <a:prstGeom prst="rect">
+            <a:avLst/>
+          </a:prstGeom>
+          <a:noFill/>
+        </p:spPr>
+        <p:txBody>
+          <a:bodyPr wrap="square">
+            <a:spAutoFit/>
+          </a:bodyPr>
+          <a:lstStyle/>
+          <a:p>
+            <a:pPr algn="l"/>
+            <a:r>
+              <a:rPr sz="2600" b="1" i="0">
+                <a:solidFill>
+                  <a:srgbClr val="F4A800"/>
+                </a:solidFill>
+              </a:rPr>
+              <a:t>CyberTrace</a:t>
+            </a:r>
+          </a:p>
+        </p:txBody>
+      </p:sp>
+      <p:sp>
+        <p:nvSpPr>
+          <p:cNvPr id="22" name="TextBox 21"/>
+          <p:cNvSpPr txBox="1"/>
+          <p:nvPr/>
+        </p:nvSpPr>
+        <p:spPr>
+          <a:xfrm>
+            <a:off x="6144768" y="2542032"/>
+            <a:ext cx="5349240" cy="658368"/>
+          </a:xfrm>
+          <a:prstGeom prst="rect">
+            <a:avLst/>
+          </a:prstGeom>
+          <a:noFill/>
+        </p:spPr>
+        <p:txBody>
+          <a:bodyPr wrap="square">
+            <a:spAutoFit/>
+          </a:bodyPr>
+          <a:lstStyle/>
+          <a:p>
+            <a:pPr algn="l"/>
+            <a:r>
+              <a:rPr sz="1500" b="0" i="0">
+                <a:solidFill>
+                  <a:srgbClr val="FFFFFF"/>
+                </a:solidFill>
+              </a:rPr>
+              <a:t>Real-Time Network Security Monitoring
+&amp; Anomaly Detection System</a:t>
+            </a:r>
+          </a:p>
+        </p:txBody>
+      </p:sp>
+      <p:sp>
+        <p:nvSpPr>
+          <p:cNvPr id="23" name="Rectangle 22"/>
+          <p:cNvSpPr/>
+          <p:nvPr/>
+        </p:nvSpPr>
+        <p:spPr>
+          <a:xfrm>
+            <a:off x="6144768" y="3337560"/>
+            <a:ext cx="5120640" cy="19050"/>
+          </a:xfrm>
+          <a:prstGeom prst="rect">
+            <a:avLst/>
+          </a:prstGeom>
+          <a:solidFill>
+            <a:srgbClr val="F4A800"/>
+          </a:solidFill>
+          <a:ln>
+            <a:noFill/>
+          </a:ln>
+        </p:spPr>
+        <p:style>
+          <a:lnRef idx="1">
+            <a:schemeClr val="accent1"/>
+          </a:lnRef>
+          <a:fillRef idx="3">
+            <a:schemeClr val="accent1"/>
+          </a:fillRef>
+          <a:effectRef idx="2">
+            <a:schemeClr val="accent1"/>
+          </a:effectRef>
+          <a:fontRef idx="minor">
+            <a:schemeClr val="lt1"/>
+          </a:fontRef>
+        </p:style>
+        <p:txBody>
+          <a:bodyPr rtlCol="0" anchor="ctr"/>
+          <a:lstStyle/>
+          <a:p>
+            <a:pPr algn="ctr"/>
+          </a:p>
+        </p:txBody>
+      </p:sp>
+      <p:sp>
+        <p:nvSpPr>
+          <p:cNvPr id="24" name="TextBox 23"/>
+          <p:cNvSpPr txBox="1"/>
+          <p:nvPr/>
+        </p:nvSpPr>
+        <p:spPr>
+          <a:xfrm>
+            <a:off x="6144768" y="3493008"/>
+            <a:ext cx="5349240" cy="2834640"/>
+          </a:xfrm>
+          <a:prstGeom prst="rect">
+            <a:avLst/>
+          </a:prstGeom>
+          <a:noFill/>
+        </p:spPr>
+        <p:txBody>
+          <a:bodyPr wrap="square">
+            <a:spAutoFit/>
+          </a:bodyPr>
+          <a:lstStyle/>
+          <a:p>
+            <a:pPr algn="l"/>
+            <a:r>
               <a:rPr sz="1400" b="0" i="0">
                 <a:solidFill>
-                  <a:srgbClr val="FFFFFF"/>
+                  <a:srgbClr val="FDF0E0"/>
                 </a:solidFill>
               </a:rPr>
               <a:t>The project captures live or recorded network packets, passes them through anomaly detection engines (rule-based + ML thresholding), and displays real-time metrics on a modern web dashboard built with React + FastAPI.</a:t>
@@ -6611,7 +6911,7 @@
     <p:bg>
       <p:bgPr>
         <a:solidFill>
-          <a:srgbClr val="F2F2F2"/>
+          <a:srgbClr val="FFF8F0"/>
         </a:solidFill>
         <a:effectLst/>
       </p:bgPr>
@@ -6639,13 +6939,13 @@
         <p:spPr>
           <a:xfrm>
             <a:off x="0" y="0"/>
-            <a:ext cx="12188952" cy="1280160"/>
-          </a:xfrm>
-          <a:prstGeom prst="rect">
-            <a:avLst/>
-          </a:prstGeom>
-          <a:solidFill>
-            <a:srgbClr val="1F3564"/>
+            <a:ext cx="12188952" cy="1261872"/>
+          </a:xfrm>
+          <a:prstGeom prst="rect">
+            <a:avLst/>
+          </a:prstGeom>
+          <a:solidFill>
+            <a:srgbClr val="B84000"/>
           </a:solidFill>
           <a:ln>
             <a:noFill/>
@@ -6682,13 +6982,13 @@
         <p:spPr>
           <a:xfrm>
             <a:off x="0" y="0"/>
-            <a:ext cx="109728" cy="1280160"/>
-          </a:xfrm>
-          <a:prstGeom prst="rect">
-            <a:avLst/>
-          </a:prstGeom>
-          <a:solidFill>
-            <a:srgbClr val="C00000"/>
+            <a:ext cx="164592" cy="1261872"/>
+          </a:xfrm>
+          <a:prstGeom prst="rect">
+            <a:avLst/>
+          </a:prstGeom>
+          <a:solidFill>
+            <a:srgbClr val="F4A800"/>
           </a:solidFill>
           <a:ln>
             <a:noFill/>
@@ -6718,82 +7018,14 @@
       </p:sp>
       <p:sp>
         <p:nvSpPr>
-          <p:cNvPr id="4" name="TextBox 3"/>
-          <p:cNvSpPr txBox="1"/>
-          <p:nvPr/>
-        </p:nvSpPr>
-        <p:spPr>
-          <a:xfrm>
-            <a:off x="274320" y="182880"/>
-            <a:ext cx="11430000" cy="914400"/>
-          </a:xfrm>
-          <a:prstGeom prst="rect">
-            <a:avLst/>
-          </a:prstGeom>
-          <a:noFill/>
-        </p:spPr>
-        <p:txBody>
-          <a:bodyPr wrap="square">
-            <a:spAutoFit/>
-          </a:bodyPr>
-          <a:lstStyle/>
-          <a:p>
-            <a:pPr algn="l"/>
-            <a:r>
-              <a:rPr sz="3000" b="1" i="0">
-                <a:solidFill>
-                  <a:srgbClr val="FFFFFF"/>
-                </a:solidFill>
-              </a:rPr>
-              <a:t>Introduction</a:t>
-            </a:r>
-          </a:p>
-        </p:txBody>
-      </p:sp>
-      <p:sp>
-        <p:nvSpPr>
-          <p:cNvPr id="5" name="TextBox 4"/>
-          <p:cNvSpPr txBox="1"/>
-          <p:nvPr/>
-        </p:nvSpPr>
-        <p:spPr>
-          <a:xfrm>
-            <a:off x="274320" y="749808"/>
-            <a:ext cx="11430000" cy="457200"/>
-          </a:xfrm>
-          <a:prstGeom prst="rect">
-            <a:avLst/>
-          </a:prstGeom>
-          <a:noFill/>
-        </p:spPr>
-        <p:txBody>
-          <a:bodyPr wrap="square">
-            <a:spAutoFit/>
-          </a:bodyPr>
-          <a:lstStyle/>
-          <a:p>
-            <a:pPr algn="l"/>
-            <a:r>
-              <a:rPr sz="1300" b="0" i="0">
-                <a:solidFill>
-                  <a:srgbClr val="00B0F0"/>
-                </a:solidFill>
-              </a:rPr>
-              <a:t>What is CyberTrace?  |  Why does it matter?</a:t>
-            </a:r>
-          </a:p>
-        </p:txBody>
-      </p:sp>
-      <p:sp>
-        <p:nvSpPr>
-          <p:cNvPr id="6" name="Rectangle 5"/>
+          <p:cNvPr id="4" name="Rectangle 3"/>
           <p:cNvSpPr/>
           <p:nvPr/>
         </p:nvSpPr>
         <p:spPr>
           <a:xfrm>
-            <a:off x="0" y="6748272"/>
-            <a:ext cx="12188952" cy="109728"/>
+            <a:off x="12115800" y="0"/>
+            <a:ext cx="73152" cy="1261872"/>
           </a:xfrm>
           <a:prstGeom prst="rect">
             <a:avLst/>
@@ -6829,20 +7061,88 @@
       </p:sp>
       <p:sp>
         <p:nvSpPr>
+          <p:cNvPr id="5" name="TextBox 4"/>
+          <p:cNvSpPr txBox="1"/>
+          <p:nvPr/>
+        </p:nvSpPr>
+        <p:spPr>
+          <a:xfrm>
+            <a:off x="320040" y="164592"/>
+            <a:ext cx="11430000" cy="685800"/>
+          </a:xfrm>
+          <a:prstGeom prst="rect">
+            <a:avLst/>
+          </a:prstGeom>
+          <a:noFill/>
+        </p:spPr>
+        <p:txBody>
+          <a:bodyPr wrap="square">
+            <a:spAutoFit/>
+          </a:bodyPr>
+          <a:lstStyle/>
+          <a:p>
+            <a:pPr algn="l"/>
+            <a:r>
+              <a:rPr sz="3000" b="1" i="0">
+                <a:solidFill>
+                  <a:srgbClr val="FFFFFF"/>
+                </a:solidFill>
+              </a:rPr>
+              <a:t>Introduction</a:t>
+            </a:r>
+          </a:p>
+        </p:txBody>
+      </p:sp>
+      <p:sp>
+        <p:nvSpPr>
+          <p:cNvPr id="6" name="TextBox 5"/>
+          <p:cNvSpPr txBox="1"/>
+          <p:nvPr/>
+        </p:nvSpPr>
+        <p:spPr>
+          <a:xfrm>
+            <a:off x="320040" y="841248"/>
+            <a:ext cx="11430000" cy="347472"/>
+          </a:xfrm>
+          <a:prstGeom prst="rect">
+            <a:avLst/>
+          </a:prstGeom>
+          <a:noFill/>
+        </p:spPr>
+        <p:txBody>
+          <a:bodyPr wrap="square">
+            <a:spAutoFit/>
+          </a:bodyPr>
+          <a:lstStyle/>
+          <a:p>
+            <a:pPr algn="l"/>
+            <a:r>
+              <a:rPr sz="1200" b="0" i="0">
+                <a:solidFill>
+                  <a:srgbClr val="F4A800"/>
+                </a:solidFill>
+              </a:rPr>
+              <a:t>What is CyberTrace?  |  Why does it matter?</a:t>
+            </a:r>
+          </a:p>
+        </p:txBody>
+      </p:sp>
+      <p:sp>
+        <p:nvSpPr>
           <p:cNvPr id="7" name="Rectangle 6"/>
           <p:cNvSpPr/>
           <p:nvPr/>
         </p:nvSpPr>
         <p:spPr>
           <a:xfrm>
-            <a:off x="457200" y="1417320"/>
-            <a:ext cx="11247120" cy="777240"/>
-          </a:xfrm>
-          <a:prstGeom prst="rect">
-            <a:avLst/>
-          </a:prstGeom>
-          <a:solidFill>
-            <a:srgbClr val="1F3564"/>
+            <a:off x="0" y="6729984"/>
+            <a:ext cx="12188952" cy="128016"/>
+          </a:xfrm>
+          <a:prstGeom prst="rect">
+            <a:avLst/>
+          </a:prstGeom>
+          <a:solidFill>
+            <a:srgbClr val="F4A800"/>
           </a:solidFill>
           <a:ln>
             <a:noFill/>
@@ -6878,14 +7178,14 @@
         </p:nvSpPr>
         <p:spPr>
           <a:xfrm>
-            <a:off x="457200" y="1417320"/>
-            <a:ext cx="91440" cy="777240"/>
-          </a:xfrm>
-          <a:prstGeom prst="rect">
-            <a:avLst/>
-          </a:prstGeom>
-          <a:solidFill>
-            <a:srgbClr val="00B0F0"/>
+            <a:off x="0" y="6729984"/>
+            <a:ext cx="320040" cy="128016"/>
+          </a:xfrm>
+          <a:prstGeom prst="rect">
+            <a:avLst/>
+          </a:prstGeom>
+          <a:solidFill>
+            <a:srgbClr val="C00000"/>
           </a:solidFill>
           <a:ln>
             <a:noFill/>
@@ -6915,54 +7215,20 @@
       </p:sp>
       <p:sp>
         <p:nvSpPr>
-          <p:cNvPr id="9" name="TextBox 8"/>
-          <p:cNvSpPr txBox="1"/>
-          <p:nvPr/>
-        </p:nvSpPr>
-        <p:spPr>
-          <a:xfrm>
-            <a:off x="685800" y="1536192"/>
-            <a:ext cx="10789920" cy="548640"/>
-          </a:xfrm>
-          <a:prstGeom prst="rect">
-            <a:avLst/>
-          </a:prstGeom>
-          <a:noFill/>
-        </p:spPr>
-        <p:txBody>
-          <a:bodyPr wrap="square">
-            <a:spAutoFit/>
-          </a:bodyPr>
-          <a:lstStyle/>
-          <a:p>
-            <a:pPr algn="ctr"/>
-            <a:r>
-              <a:rPr sz="1600" b="1" i="1">
-                <a:solidFill>
-                  <a:srgbClr val="FFFFFF"/>
-                </a:solidFill>
-              </a:rPr>
-              <a:t>"CyberTrace bridges raw network data and actionable security intelligence — in real time."</a:t>
-            </a:r>
-          </a:p>
-        </p:txBody>
-      </p:sp>
-      <p:sp>
-        <p:nvSpPr>
-          <p:cNvPr id="10" name="Rectangle 9"/>
+          <p:cNvPr id="9" name="Rectangle 8"/>
           <p:cNvSpPr/>
           <p:nvPr/>
         </p:nvSpPr>
         <p:spPr>
           <a:xfrm>
-            <a:off x="457200" y="2377440"/>
-            <a:ext cx="3566160" cy="4023360"/>
-          </a:xfrm>
-          <a:prstGeom prst="rect">
-            <a:avLst/>
-          </a:prstGeom>
-          <a:solidFill>
-            <a:srgbClr val="FFFFFF"/>
+            <a:off x="457200" y="1389888"/>
+            <a:ext cx="11247120" cy="804672"/>
+          </a:xfrm>
+          <a:prstGeom prst="rect">
+            <a:avLst/>
+          </a:prstGeom>
+          <a:solidFill>
+            <a:srgbClr val="F4A800"/>
           </a:solidFill>
           <a:ln>
             <a:noFill/>
@@ -6992,14 +7258,14 @@
       </p:sp>
       <p:sp>
         <p:nvSpPr>
-          <p:cNvPr id="11" name="Rectangle 10"/>
+          <p:cNvPr id="10" name="Rectangle 9"/>
           <p:cNvSpPr/>
           <p:nvPr/>
         </p:nvSpPr>
         <p:spPr>
           <a:xfrm>
-            <a:off x="457200" y="2377440"/>
-            <a:ext cx="3566160" cy="502920"/>
+            <a:off x="457200" y="1389888"/>
+            <a:ext cx="109728" cy="804672"/>
           </a:xfrm>
           <a:prstGeom prst="rect">
             <a:avLst/>
@@ -7035,14 +7301,14 @@
       </p:sp>
       <p:sp>
         <p:nvSpPr>
-          <p:cNvPr id="12" name="TextBox 11"/>
+          <p:cNvPr id="11" name="TextBox 10"/>
           <p:cNvSpPr txBox="1"/>
           <p:nvPr/>
         </p:nvSpPr>
         <p:spPr>
           <a:xfrm>
-            <a:off x="548640" y="2423160"/>
-            <a:ext cx="3383280" cy="411480"/>
+            <a:off x="685800" y="1517904"/>
+            <a:ext cx="10835640" cy="548640"/>
           </a:xfrm>
           <a:prstGeom prst="rect">
             <a:avLst/>
@@ -7055,62 +7321,28 @@
           </a:bodyPr>
           <a:lstStyle/>
           <a:p>
-            <a:pPr algn="l"/>
-            <a:r>
-              <a:rPr sz="1400" b="1" i="0">
-                <a:solidFill>
-                  <a:srgbClr val="FFFFFF"/>
+            <a:pPr algn="ctr"/>
+            <a:r>
+              <a:rPr sz="1600" b="1" i="1">
+                <a:solidFill>
+                  <a:srgbClr val="2A1800"/>
                 </a:solidFill>
               </a:rPr>
-              <a:t>What It Does</a:t>
-            </a:r>
-          </a:p>
-        </p:txBody>
-      </p:sp>
-      <p:sp>
-        <p:nvSpPr>
-          <p:cNvPr id="13" name="TextBox 12"/>
-          <p:cNvSpPr txBox="1"/>
-          <p:nvPr/>
-        </p:nvSpPr>
-        <p:spPr>
-          <a:xfrm>
-            <a:off x="594360" y="2999232"/>
-            <a:ext cx="3291840" cy="3291840"/>
-          </a:xfrm>
-          <a:prstGeom prst="rect">
-            <a:avLst/>
-          </a:prstGeom>
-          <a:noFill/>
-        </p:spPr>
-        <p:txBody>
-          <a:bodyPr wrap="square">
-            <a:spAutoFit/>
-          </a:bodyPr>
-          <a:lstStyle/>
-          <a:p>
-            <a:pPr algn="l"/>
-            <a:r>
-              <a:rPr sz="1300" b="0" i="0">
-                <a:solidFill>
-                  <a:srgbClr val="333333"/>
-                </a:solidFill>
-              </a:rPr>
-              <a:t>Captures &amp; parses live or PCAP-based network packets and runs them through multiple detection algorithms to flag threats automatically.</a:t>
-            </a:r>
-          </a:p>
-        </p:txBody>
-      </p:sp>
-      <p:sp>
-        <p:nvSpPr>
-          <p:cNvPr id="14" name="Rectangle 13"/>
+              <a:t>"CyberTrace bridges raw network data and actionable security intelligence — in real time."</a:t>
+            </a:r>
+          </a:p>
+        </p:txBody>
+      </p:sp>
+      <p:sp>
+        <p:nvSpPr>
+          <p:cNvPr id="12" name="Rectangle 11"/>
           <p:cNvSpPr/>
           <p:nvPr/>
         </p:nvSpPr>
         <p:spPr>
           <a:xfrm>
-            <a:off x="4297680" y="2377440"/>
-            <a:ext cx="3566160" cy="4023360"/>
+            <a:off x="457200" y="2359152"/>
+            <a:ext cx="3566160" cy="4069080"/>
           </a:xfrm>
           <a:prstGeom prst="rect">
             <a:avLst/>
@@ -7118,8 +7350,10 @@
           <a:solidFill>
             <a:srgbClr val="FFFFFF"/>
           </a:solidFill>
-          <a:ln>
-            <a:noFill/>
+          <a:ln w="10160">
+            <a:solidFill>
+              <a:srgbClr val="F4A800"/>
+            </a:solidFill>
           </a:ln>
         </p:spPr>
         <p:style>
@@ -7146,20 +7380,20 @@
       </p:sp>
       <p:sp>
         <p:nvSpPr>
-          <p:cNvPr id="15" name="Rectangle 14"/>
+          <p:cNvPr id="13" name="Rectangle 12"/>
           <p:cNvSpPr/>
           <p:nvPr/>
         </p:nvSpPr>
         <p:spPr>
           <a:xfrm>
-            <a:off x="4297680" y="2377440"/>
-            <a:ext cx="3566160" cy="502920"/>
-          </a:xfrm>
-          <a:prstGeom prst="rect">
-            <a:avLst/>
-          </a:prstGeom>
-          <a:solidFill>
-            <a:srgbClr val="C00000"/>
+            <a:off x="457200" y="2359152"/>
+            <a:ext cx="3566160" cy="512064"/>
+          </a:xfrm>
+          <a:prstGeom prst="rect">
+            <a:avLst/>
+          </a:prstGeom>
+          <a:solidFill>
+            <a:srgbClr val="E8601A"/>
           </a:solidFill>
           <a:ln>
             <a:noFill/>
@@ -7189,14 +7423,14 @@
       </p:sp>
       <p:sp>
         <p:nvSpPr>
-          <p:cNvPr id="16" name="TextBox 15"/>
+          <p:cNvPr id="14" name="TextBox 13"/>
           <p:cNvSpPr txBox="1"/>
           <p:nvPr/>
         </p:nvSpPr>
         <p:spPr>
           <a:xfrm>
-            <a:off x="4389120" y="2423160"/>
-            <a:ext cx="3383280" cy="411480"/>
+            <a:off x="566928" y="2414016"/>
+            <a:ext cx="3364992" cy="402336"/>
           </a:xfrm>
           <a:prstGeom prst="rect">
             <a:avLst/>
@@ -7216,21 +7450,21 @@
                   <a:srgbClr val="FFFFFF"/>
                 </a:solidFill>
               </a:rPr>
-              <a:t>How It Works</a:t>
-            </a:r>
-          </a:p>
-        </p:txBody>
-      </p:sp>
-      <p:sp>
-        <p:nvSpPr>
-          <p:cNvPr id="17" name="TextBox 16"/>
+              <a:t>What It Does</a:t>
+            </a:r>
+          </a:p>
+        </p:txBody>
+      </p:sp>
+      <p:sp>
+        <p:nvSpPr>
+          <p:cNvPr id="15" name="TextBox 14"/>
           <p:cNvSpPr txBox="1"/>
           <p:nvPr/>
         </p:nvSpPr>
         <p:spPr>
           <a:xfrm>
-            <a:off x="4434840" y="2999232"/>
-            <a:ext cx="3291840" cy="3291840"/>
+            <a:off x="594360" y="2990088"/>
+            <a:ext cx="3291840" cy="3337560"/>
           </a:xfrm>
           <a:prstGeom prst="rect">
             <a:avLst/>
@@ -7247,24 +7481,24 @@
             <a:r>
               <a:rPr sz="1300" b="0" i="0">
                 <a:solidFill>
-                  <a:srgbClr val="333333"/>
+                  <a:srgbClr val="2A1800"/>
                 </a:solidFill>
               </a:rPr>
-              <a:t>A decoupled architecture: Scapy handles capture, FastAPI serves a RESTful API, and React renders beautiful, real-time dashboards.</a:t>
-            </a:r>
-          </a:p>
-        </p:txBody>
-      </p:sp>
-      <p:sp>
-        <p:nvSpPr>
-          <p:cNvPr id="18" name="Rectangle 17"/>
+              <a:t>Captures &amp; parses live or PCAP-based network packets and runs them through multiple detection algorithms to flag threats automatically.</a:t>
+            </a:r>
+          </a:p>
+        </p:txBody>
+      </p:sp>
+      <p:sp>
+        <p:nvSpPr>
+          <p:cNvPr id="16" name="Rectangle 15"/>
           <p:cNvSpPr/>
           <p:nvPr/>
         </p:nvSpPr>
         <p:spPr>
           <a:xfrm>
-            <a:off x="8138160" y="2377440"/>
-            <a:ext cx="3566160" cy="4023360"/>
+            <a:off x="4315968" y="2359152"/>
+            <a:ext cx="3566160" cy="4069080"/>
           </a:xfrm>
           <a:prstGeom prst="rect">
             <a:avLst/>
@@ -7272,8 +7506,10 @@
           <a:solidFill>
             <a:srgbClr val="FFFFFF"/>
           </a:solidFill>
-          <a:ln>
-            <a:noFill/>
+          <a:ln w="10160">
+            <a:solidFill>
+              <a:srgbClr val="F4A800"/>
+            </a:solidFill>
           </a:ln>
         </p:spPr>
         <p:style>
@@ -7300,20 +7536,20 @@
       </p:sp>
       <p:sp>
         <p:nvSpPr>
-          <p:cNvPr id="19" name="Rectangle 18"/>
+          <p:cNvPr id="17" name="Rectangle 16"/>
           <p:cNvSpPr/>
           <p:nvPr/>
         </p:nvSpPr>
         <p:spPr>
           <a:xfrm>
-            <a:off x="8138160" y="2377440"/>
-            <a:ext cx="3566160" cy="502920"/>
-          </a:xfrm>
-          <a:prstGeom prst="rect">
-            <a:avLst/>
-          </a:prstGeom>
-          <a:solidFill>
-            <a:srgbClr val="C00000"/>
+            <a:off x="4315968" y="2359152"/>
+            <a:ext cx="3566160" cy="512064"/>
+          </a:xfrm>
+          <a:prstGeom prst="rect">
+            <a:avLst/>
+          </a:prstGeom>
+          <a:solidFill>
+            <a:srgbClr val="B84000"/>
           </a:solidFill>
           <a:ln>
             <a:noFill/>
@@ -7343,14 +7579,14 @@
       </p:sp>
       <p:sp>
         <p:nvSpPr>
-          <p:cNvPr id="20" name="TextBox 19"/>
+          <p:cNvPr id="18" name="TextBox 17"/>
           <p:cNvSpPr txBox="1"/>
           <p:nvPr/>
         </p:nvSpPr>
         <p:spPr>
           <a:xfrm>
-            <a:off x="8229600" y="2423160"/>
-            <a:ext cx="3383280" cy="411480"/>
+            <a:off x="4425696" y="2414016"/>
+            <a:ext cx="3364992" cy="402336"/>
           </a:xfrm>
           <a:prstGeom prst="rect">
             <a:avLst/>
@@ -7370,21 +7606,21 @@
                   <a:srgbClr val="FFFFFF"/>
                 </a:solidFill>
               </a:rPr>
-              <a:t>Why It Matters</a:t>
-            </a:r>
-          </a:p>
-        </p:txBody>
-      </p:sp>
-      <p:sp>
-        <p:nvSpPr>
-          <p:cNvPr id="21" name="TextBox 20"/>
+              <a:t>How It Works</a:t>
+            </a:r>
+          </a:p>
+        </p:txBody>
+      </p:sp>
+      <p:sp>
+        <p:nvSpPr>
+          <p:cNvPr id="19" name="TextBox 18"/>
           <p:cNvSpPr txBox="1"/>
           <p:nvPr/>
         </p:nvSpPr>
         <p:spPr>
           <a:xfrm>
-            <a:off x="8275320" y="2999232"/>
-            <a:ext cx="3291840" cy="3291840"/>
+            <a:off x="4453128" y="2990088"/>
+            <a:ext cx="3291840" cy="3337560"/>
           </a:xfrm>
           <a:prstGeom prst="rect">
             <a:avLst/>
@@ -7401,10 +7637,166 @@
             <a:r>
               <a:rPr sz="1300" b="0" i="0">
                 <a:solidFill>
-                  <a:srgbClr val="333333"/>
+                  <a:srgbClr val="2A1800"/>
                 </a:solidFill>
               </a:rPr>
-              <a:t>Early threat detection reduces incident response time. CyberTrace makes that accessible to students and small teams without enterprise cost.</a:t>
+              <a:t>A decoupled architecture: Scapy handles capture, FastAPI serves a REST API, and React renders beautiful, real-time dashboards.</a:t>
+            </a:r>
+          </a:p>
+        </p:txBody>
+      </p:sp>
+      <p:sp>
+        <p:nvSpPr>
+          <p:cNvPr id="20" name="Rectangle 19"/>
+          <p:cNvSpPr/>
+          <p:nvPr/>
+        </p:nvSpPr>
+        <p:spPr>
+          <a:xfrm>
+            <a:off x="8174736" y="2359152"/>
+            <a:ext cx="3566160" cy="4069080"/>
+          </a:xfrm>
+          <a:prstGeom prst="rect">
+            <a:avLst/>
+          </a:prstGeom>
+          <a:solidFill>
+            <a:srgbClr val="FFFFFF"/>
+          </a:solidFill>
+          <a:ln w="10160">
+            <a:solidFill>
+              <a:srgbClr val="F4A800"/>
+            </a:solidFill>
+          </a:ln>
+        </p:spPr>
+        <p:style>
+          <a:lnRef idx="1">
+            <a:schemeClr val="accent1"/>
+          </a:lnRef>
+          <a:fillRef idx="3">
+            <a:schemeClr val="accent1"/>
+          </a:fillRef>
+          <a:effectRef idx="2">
+            <a:schemeClr val="accent1"/>
+          </a:effectRef>
+          <a:fontRef idx="minor">
+            <a:schemeClr val="lt1"/>
+          </a:fontRef>
+        </p:style>
+        <p:txBody>
+          <a:bodyPr rtlCol="0" anchor="ctr"/>
+          <a:lstStyle/>
+          <a:p>
+            <a:pPr algn="ctr"/>
+          </a:p>
+        </p:txBody>
+      </p:sp>
+      <p:sp>
+        <p:nvSpPr>
+          <p:cNvPr id="21" name="Rectangle 20"/>
+          <p:cNvSpPr/>
+          <p:nvPr/>
+        </p:nvSpPr>
+        <p:spPr>
+          <a:xfrm>
+            <a:off x="8174736" y="2359152"/>
+            <a:ext cx="3566160" cy="512064"/>
+          </a:xfrm>
+          <a:prstGeom prst="rect">
+            <a:avLst/>
+          </a:prstGeom>
+          <a:solidFill>
+            <a:srgbClr val="E8601A"/>
+          </a:solidFill>
+          <a:ln>
+            <a:noFill/>
+          </a:ln>
+        </p:spPr>
+        <p:style>
+          <a:lnRef idx="1">
+            <a:schemeClr val="accent1"/>
+          </a:lnRef>
+          <a:fillRef idx="3">
+            <a:schemeClr val="accent1"/>
+          </a:fillRef>
+          <a:effectRef idx="2">
+            <a:schemeClr val="accent1"/>
+          </a:effectRef>
+          <a:fontRef idx="minor">
+            <a:schemeClr val="lt1"/>
+          </a:fontRef>
+        </p:style>
+        <p:txBody>
+          <a:bodyPr rtlCol="0" anchor="ctr"/>
+          <a:lstStyle/>
+          <a:p>
+            <a:pPr algn="ctr"/>
+          </a:p>
+        </p:txBody>
+      </p:sp>
+      <p:sp>
+        <p:nvSpPr>
+          <p:cNvPr id="22" name="TextBox 21"/>
+          <p:cNvSpPr txBox="1"/>
+          <p:nvPr/>
+        </p:nvSpPr>
+        <p:spPr>
+          <a:xfrm>
+            <a:off x="8284464" y="2414016"/>
+            <a:ext cx="3364992" cy="402336"/>
+          </a:xfrm>
+          <a:prstGeom prst="rect">
+            <a:avLst/>
+          </a:prstGeom>
+          <a:noFill/>
+        </p:spPr>
+        <p:txBody>
+          <a:bodyPr wrap="square">
+            <a:spAutoFit/>
+          </a:bodyPr>
+          <a:lstStyle/>
+          <a:p>
+            <a:pPr algn="l"/>
+            <a:r>
+              <a:rPr sz="1400" b="1" i="0">
+                <a:solidFill>
+                  <a:srgbClr val="FFFFFF"/>
+                </a:solidFill>
+              </a:rPr>
+              <a:t>Why It Matters</a:t>
+            </a:r>
+          </a:p>
+        </p:txBody>
+      </p:sp>
+      <p:sp>
+        <p:nvSpPr>
+          <p:cNvPr id="23" name="TextBox 22"/>
+          <p:cNvSpPr txBox="1"/>
+          <p:nvPr/>
+        </p:nvSpPr>
+        <p:spPr>
+          <a:xfrm>
+            <a:off x="8311896" y="2990088"/>
+            <a:ext cx="3291840" cy="3337560"/>
+          </a:xfrm>
+          <a:prstGeom prst="rect">
+            <a:avLst/>
+          </a:prstGeom>
+          <a:noFill/>
+        </p:spPr>
+        <p:txBody>
+          <a:bodyPr wrap="square">
+            <a:spAutoFit/>
+          </a:bodyPr>
+          <a:lstStyle/>
+          <a:p>
+            <a:pPr algn="l"/>
+            <a:r>
+              <a:rPr sz="1300" b="0" i="0">
+                <a:solidFill>
+                  <a:srgbClr val="2A1800"/>
+                </a:solidFill>
+              </a:rPr>
+              <a:t>Early threat detection reduces incident response time. CyberTrace makes that accessible without enterprise cost.</a:t>
             </a:r>
           </a:p>
         </p:txBody>
@@ -7428,7 +7820,7 @@
     <p:bg>
       <p:bgPr>
         <a:solidFill>
-          <a:srgbClr val="FFFFFF"/>
+          <a:srgbClr val="FFF8F0"/>
         </a:solidFill>
         <a:effectLst/>
       </p:bgPr>
@@ -7456,13 +7848,13 @@
         <p:spPr>
           <a:xfrm>
             <a:off x="0" y="0"/>
-            <a:ext cx="12188952" cy="1280160"/>
-          </a:xfrm>
-          <a:prstGeom prst="rect">
-            <a:avLst/>
-          </a:prstGeom>
-          <a:solidFill>
-            <a:srgbClr val="1F3564"/>
+            <a:ext cx="12188952" cy="1261872"/>
+          </a:xfrm>
+          <a:prstGeom prst="rect">
+            <a:avLst/>
+          </a:prstGeom>
+          <a:solidFill>
+            <a:srgbClr val="B84000"/>
           </a:solidFill>
           <a:ln>
             <a:noFill/>
@@ -7499,13 +7891,13 @@
         <p:spPr>
           <a:xfrm>
             <a:off x="0" y="0"/>
-            <a:ext cx="109728" cy="1280160"/>
-          </a:xfrm>
-          <a:prstGeom prst="rect">
-            <a:avLst/>
-          </a:prstGeom>
-          <a:solidFill>
-            <a:srgbClr val="C00000"/>
+            <a:ext cx="164592" cy="1261872"/>
+          </a:xfrm>
+          <a:prstGeom prst="rect">
+            <a:avLst/>
+          </a:prstGeom>
+          <a:solidFill>
+            <a:srgbClr val="F4A800"/>
           </a:solidFill>
           <a:ln>
             <a:noFill/>
@@ -7535,82 +7927,14 @@
       </p:sp>
       <p:sp>
         <p:nvSpPr>
-          <p:cNvPr id="4" name="TextBox 3"/>
-          <p:cNvSpPr txBox="1"/>
-          <p:nvPr/>
-        </p:nvSpPr>
-        <p:spPr>
-          <a:xfrm>
-            <a:off x="274320" y="182880"/>
-            <a:ext cx="11430000" cy="914400"/>
-          </a:xfrm>
-          <a:prstGeom prst="rect">
-            <a:avLst/>
-          </a:prstGeom>
-          <a:noFill/>
-        </p:spPr>
-        <p:txBody>
-          <a:bodyPr wrap="square">
-            <a:spAutoFit/>
-          </a:bodyPr>
-          <a:lstStyle/>
-          <a:p>
-            <a:pPr algn="l"/>
-            <a:r>
-              <a:rPr sz="3000" b="1" i="0">
-                <a:solidFill>
-                  <a:srgbClr val="FFFFFF"/>
-                </a:solidFill>
-              </a:rPr>
-              <a:t>Objectives</a:t>
-            </a:r>
-          </a:p>
-        </p:txBody>
-      </p:sp>
-      <p:sp>
-        <p:nvSpPr>
-          <p:cNvPr id="5" name="TextBox 4"/>
-          <p:cNvSpPr txBox="1"/>
-          <p:nvPr/>
-        </p:nvSpPr>
-        <p:spPr>
-          <a:xfrm>
-            <a:off x="274320" y="749808"/>
-            <a:ext cx="11430000" cy="457200"/>
-          </a:xfrm>
-          <a:prstGeom prst="rect">
-            <a:avLst/>
-          </a:prstGeom>
-          <a:noFill/>
-        </p:spPr>
-        <p:txBody>
-          <a:bodyPr wrap="square">
-            <a:spAutoFit/>
-          </a:bodyPr>
-          <a:lstStyle/>
-          <a:p>
-            <a:pPr algn="l"/>
-            <a:r>
-              <a:rPr sz="1300" b="0" i="0">
-                <a:solidFill>
-                  <a:srgbClr val="00B0F0"/>
-                </a:solidFill>
-              </a:rPr>
-              <a:t>Clear Goals for the CyberTrace Project</a:t>
-            </a:r>
-          </a:p>
-        </p:txBody>
-      </p:sp>
-      <p:sp>
-        <p:nvSpPr>
-          <p:cNvPr id="6" name="Rectangle 5"/>
+          <p:cNvPr id="4" name="Rectangle 3"/>
           <p:cNvSpPr/>
           <p:nvPr/>
         </p:nvSpPr>
         <p:spPr>
           <a:xfrm>
-            <a:off x="0" y="6748272"/>
-            <a:ext cx="12188952" cy="109728"/>
+            <a:off x="12115800" y="0"/>
+            <a:ext cx="73152" cy="1261872"/>
           </a:xfrm>
           <a:prstGeom prst="rect">
             <a:avLst/>
@@ -7646,20 +7970,88 @@
       </p:sp>
       <p:sp>
         <p:nvSpPr>
+          <p:cNvPr id="5" name="TextBox 4"/>
+          <p:cNvSpPr txBox="1"/>
+          <p:nvPr/>
+        </p:nvSpPr>
+        <p:spPr>
+          <a:xfrm>
+            <a:off x="320040" y="164592"/>
+            <a:ext cx="11430000" cy="685800"/>
+          </a:xfrm>
+          <a:prstGeom prst="rect">
+            <a:avLst/>
+          </a:prstGeom>
+          <a:noFill/>
+        </p:spPr>
+        <p:txBody>
+          <a:bodyPr wrap="square">
+            <a:spAutoFit/>
+          </a:bodyPr>
+          <a:lstStyle/>
+          <a:p>
+            <a:pPr algn="l"/>
+            <a:r>
+              <a:rPr sz="3000" b="1" i="0">
+                <a:solidFill>
+                  <a:srgbClr val="FFFFFF"/>
+                </a:solidFill>
+              </a:rPr>
+              <a:t>Objectives</a:t>
+            </a:r>
+          </a:p>
+        </p:txBody>
+      </p:sp>
+      <p:sp>
+        <p:nvSpPr>
+          <p:cNvPr id="6" name="TextBox 5"/>
+          <p:cNvSpPr txBox="1"/>
+          <p:nvPr/>
+        </p:nvSpPr>
+        <p:spPr>
+          <a:xfrm>
+            <a:off x="320040" y="841248"/>
+            <a:ext cx="11430000" cy="347472"/>
+          </a:xfrm>
+          <a:prstGeom prst="rect">
+            <a:avLst/>
+          </a:prstGeom>
+          <a:noFill/>
+        </p:spPr>
+        <p:txBody>
+          <a:bodyPr wrap="square">
+            <a:spAutoFit/>
+          </a:bodyPr>
+          <a:lstStyle/>
+          <a:p>
+            <a:pPr algn="l"/>
+            <a:r>
+              <a:rPr sz="1200" b="0" i="0">
+                <a:solidFill>
+                  <a:srgbClr val="F4A800"/>
+                </a:solidFill>
+              </a:rPr>
+              <a:t>Clear Goals for the CyberTrace Project</a:t>
+            </a:r>
+          </a:p>
+        </p:txBody>
+      </p:sp>
+      <p:sp>
+        <p:nvSpPr>
           <p:cNvPr id="7" name="Rectangle 6"/>
           <p:cNvSpPr/>
           <p:nvPr/>
         </p:nvSpPr>
         <p:spPr>
           <a:xfrm>
-            <a:off x="594360" y="1417320"/>
-            <a:ext cx="10972800" cy="685800"/>
-          </a:xfrm>
-          <a:prstGeom prst="rect">
-            <a:avLst/>
-          </a:prstGeom>
-          <a:solidFill>
-            <a:srgbClr val="1F3564"/>
+            <a:off x="0" y="6729984"/>
+            <a:ext cx="12188952" cy="128016"/>
+          </a:xfrm>
+          <a:prstGeom prst="rect">
+            <a:avLst/>
+          </a:prstGeom>
+          <a:solidFill>
+            <a:srgbClr val="F4A800"/>
           </a:solidFill>
           <a:ln>
             <a:noFill/>
@@ -7695,8 +8087,8 @@
         </p:nvSpPr>
         <p:spPr>
           <a:xfrm>
-            <a:off x="594360" y="1417320"/>
-            <a:ext cx="548640" cy="685800"/>
+            <a:off x="0" y="6729984"/>
+            <a:ext cx="320040" cy="128016"/>
           </a:xfrm>
           <a:prstGeom prst="rect">
             <a:avLst/>
@@ -7732,122 +8124,20 @@
       </p:sp>
       <p:sp>
         <p:nvSpPr>
-          <p:cNvPr id="9" name="TextBox 8"/>
-          <p:cNvSpPr txBox="1"/>
-          <p:nvPr/>
-        </p:nvSpPr>
-        <p:spPr>
-          <a:xfrm>
-            <a:off x="612648" y="1527048"/>
-            <a:ext cx="530352" cy="457200"/>
-          </a:xfrm>
-          <a:prstGeom prst="rect">
-            <a:avLst/>
-          </a:prstGeom>
-          <a:noFill/>
-        </p:spPr>
-        <p:txBody>
-          <a:bodyPr wrap="square">
-            <a:spAutoFit/>
-          </a:bodyPr>
-          <a:lstStyle/>
-          <a:p>
-            <a:pPr algn="ctr"/>
-            <a:r>
-              <a:rPr sz="1600" b="1" i="0">
-                <a:solidFill>
-                  <a:srgbClr val="FFFFFF"/>
-                </a:solidFill>
-              </a:rPr>
-              <a:t>01</a:t>
-            </a:r>
-          </a:p>
-        </p:txBody>
-      </p:sp>
-      <p:sp>
-        <p:nvSpPr>
-          <p:cNvPr id="10" name="TextBox 9"/>
-          <p:cNvSpPr txBox="1"/>
-          <p:nvPr/>
-        </p:nvSpPr>
-        <p:spPr>
-          <a:xfrm>
-            <a:off x="1280160" y="1490472"/>
-            <a:ext cx="2560320" cy="365760"/>
-          </a:xfrm>
-          <a:prstGeom prst="rect">
-            <a:avLst/>
-          </a:prstGeom>
-          <a:noFill/>
-        </p:spPr>
-        <p:txBody>
-          <a:bodyPr wrap="square">
-            <a:spAutoFit/>
-          </a:bodyPr>
-          <a:lstStyle/>
-          <a:p>
-            <a:pPr algn="l"/>
-            <a:r>
-              <a:rPr sz="1500" b="1" i="0">
-                <a:solidFill>
-                  <a:srgbClr val="FFFFFF"/>
-                </a:solidFill>
-              </a:rPr>
-              <a:t>Packet Capture</a:t>
-            </a:r>
-          </a:p>
-        </p:txBody>
-      </p:sp>
-      <p:sp>
-        <p:nvSpPr>
-          <p:cNvPr id="11" name="TextBox 10"/>
-          <p:cNvSpPr txBox="1"/>
-          <p:nvPr/>
-        </p:nvSpPr>
-        <p:spPr>
-          <a:xfrm>
-            <a:off x="3931920" y="1490472"/>
-            <a:ext cx="7315200" cy="457200"/>
-          </a:xfrm>
-          <a:prstGeom prst="rect">
-            <a:avLst/>
-          </a:prstGeom>
-          <a:noFill/>
-        </p:spPr>
-        <p:txBody>
-          <a:bodyPr wrap="square">
-            <a:spAutoFit/>
-          </a:bodyPr>
-          <a:lstStyle/>
-          <a:p>
-            <a:pPr algn="l"/>
-            <a:r>
-              <a:rPr sz="1300" b="0" i="0">
-                <a:solidFill>
-                  <a:srgbClr val="00B0F0"/>
-                </a:solidFill>
-              </a:rPr>
-              <a:t>Efficiently capture and parse live or file-based network traffic using Scapy.</a:t>
-            </a:r>
-          </a:p>
-        </p:txBody>
-      </p:sp>
-      <p:sp>
-        <p:nvSpPr>
-          <p:cNvPr id="12" name="Rectangle 11"/>
+          <p:cNvPr id="9" name="Rectangle 8"/>
           <p:cNvSpPr/>
           <p:nvPr/>
         </p:nvSpPr>
         <p:spPr>
           <a:xfrm>
-            <a:off x="594360" y="2194560"/>
-            <a:ext cx="10972800" cy="685800"/>
-          </a:xfrm>
-          <a:prstGeom prst="rect">
-            <a:avLst/>
-          </a:prstGeom>
-          <a:solidFill>
-            <a:srgbClr val="E8EFF8"/>
+            <a:off x="594360" y="1389888"/>
+            <a:ext cx="10972800" cy="704088"/>
+          </a:xfrm>
+          <a:prstGeom prst="rect">
+            <a:avLst/>
+          </a:prstGeom>
+          <a:solidFill>
+            <a:srgbClr val="E8601A"/>
           </a:solidFill>
           <a:ln>
             <a:noFill/>
@@ -7877,20 +8167,20 @@
       </p:sp>
       <p:sp>
         <p:nvSpPr>
-          <p:cNvPr id="13" name="Rectangle 12"/>
+          <p:cNvPr id="10" name="Rectangle 9"/>
           <p:cNvSpPr/>
           <p:nvPr/>
         </p:nvSpPr>
         <p:spPr>
           <a:xfrm>
-            <a:off x="594360" y="2194560"/>
-            <a:ext cx="548640" cy="685800"/>
-          </a:xfrm>
-          <a:prstGeom prst="rect">
-            <a:avLst/>
-          </a:prstGeom>
-          <a:solidFill>
-            <a:srgbClr val="C00000"/>
+            <a:off x="594360" y="1389888"/>
+            <a:ext cx="566928" cy="704088"/>
+          </a:xfrm>
+          <a:prstGeom prst="rect">
+            <a:avLst/>
+          </a:prstGeom>
+          <a:solidFill>
+            <a:srgbClr val="F4A800"/>
           </a:solidFill>
           <a:ln>
             <a:noFill/>
@@ -7920,13 +8210,13 @@
       </p:sp>
       <p:sp>
         <p:nvSpPr>
-          <p:cNvPr id="14" name="TextBox 13"/>
+          <p:cNvPr id="11" name="TextBox 10"/>
           <p:cNvSpPr txBox="1"/>
           <p:nvPr/>
         </p:nvSpPr>
         <p:spPr>
           <a:xfrm>
-            <a:off x="612648" y="2304288"/>
+            <a:off x="612648" y="1517904"/>
             <a:ext cx="530352" cy="457200"/>
           </a:xfrm>
           <a:prstGeom prst="rect">
@@ -7947,21 +8237,21 @@
                   <a:srgbClr val="FFFFFF"/>
                 </a:solidFill>
               </a:rPr>
-              <a:t>02</a:t>
-            </a:r>
-          </a:p>
-        </p:txBody>
-      </p:sp>
-      <p:sp>
-        <p:nvSpPr>
-          <p:cNvPr id="15" name="TextBox 14"/>
+              <a:t>01</a:t>
+            </a:r>
+          </a:p>
+        </p:txBody>
+      </p:sp>
+      <p:sp>
+        <p:nvSpPr>
+          <p:cNvPr id="12" name="TextBox 11"/>
           <p:cNvSpPr txBox="1"/>
           <p:nvPr/>
         </p:nvSpPr>
         <p:spPr>
           <a:xfrm>
-            <a:off x="1280160" y="2267712"/>
-            <a:ext cx="2560320" cy="365760"/>
+            <a:off x="1280160" y="1481328"/>
+            <a:ext cx="2651760" cy="457200"/>
           </a:xfrm>
           <a:prstGeom prst="rect">
             <a:avLst/>
@@ -7978,23 +8268,23 @@
             <a:r>
               <a:rPr sz="1500" b="1" i="0">
                 <a:solidFill>
-                  <a:srgbClr val="1F3564"/>
+                  <a:srgbClr val="FFFFFF"/>
                 </a:solidFill>
               </a:rPr>
-              <a:t>Anomaly Detection</a:t>
-            </a:r>
-          </a:p>
-        </p:txBody>
-      </p:sp>
-      <p:sp>
-        <p:nvSpPr>
-          <p:cNvPr id="16" name="TextBox 15"/>
+              <a:t>Packet Capture</a:t>
+            </a:r>
+          </a:p>
+        </p:txBody>
+      </p:sp>
+      <p:sp>
+        <p:nvSpPr>
+          <p:cNvPr id="13" name="TextBox 12"/>
           <p:cNvSpPr txBox="1"/>
           <p:nvPr/>
         </p:nvSpPr>
         <p:spPr>
           <a:xfrm>
-            <a:off x="3931920" y="2267712"/>
+            <a:off x="4069080" y="1481328"/>
             <a:ext cx="7315200" cy="457200"/>
           </a:xfrm>
           <a:prstGeom prst="rect">
@@ -8012,30 +8302,30 @@
             <a:r>
               <a:rPr sz="1300" b="0" i="0">
                 <a:solidFill>
-                  <a:srgbClr val="0070C0"/>
+                  <a:srgbClr val="FFFFFF"/>
                 </a:solidFill>
               </a:rPr>
-              <a:t>Detect threats like DoS attacks, Port Scans, and DNS anomalies in real time.</a:t>
-            </a:r>
-          </a:p>
-        </p:txBody>
-      </p:sp>
-      <p:sp>
-        <p:nvSpPr>
-          <p:cNvPr id="17" name="Rectangle 16"/>
+              <a:t>Efficiently capture and parse live or file-based network traffic using Scapy.</a:t>
+            </a:r>
+          </a:p>
+        </p:txBody>
+      </p:sp>
+      <p:sp>
+        <p:nvSpPr>
+          <p:cNvPr id="14" name="Rectangle 13"/>
           <p:cNvSpPr/>
           <p:nvPr/>
         </p:nvSpPr>
         <p:spPr>
           <a:xfrm>
-            <a:off x="594360" y="2971800"/>
-            <a:ext cx="10972800" cy="685800"/>
-          </a:xfrm>
-          <a:prstGeom prst="rect">
-            <a:avLst/>
-          </a:prstGeom>
-          <a:solidFill>
-            <a:srgbClr val="1F3564"/>
+            <a:off x="594360" y="2167128"/>
+            <a:ext cx="10972800" cy="704088"/>
+          </a:xfrm>
+          <a:prstGeom prst="rect">
+            <a:avLst/>
+          </a:prstGeom>
+          <a:solidFill>
+            <a:srgbClr val="FDF0E0"/>
           </a:solidFill>
           <a:ln>
             <a:noFill/>
@@ -8065,20 +8355,20 @@
       </p:sp>
       <p:sp>
         <p:nvSpPr>
-          <p:cNvPr id="18" name="Rectangle 17"/>
+          <p:cNvPr id="15" name="Rectangle 14"/>
           <p:cNvSpPr/>
           <p:nvPr/>
         </p:nvSpPr>
         <p:spPr>
           <a:xfrm>
-            <a:off x="594360" y="2971800"/>
-            <a:ext cx="548640" cy="685800"/>
-          </a:xfrm>
-          <a:prstGeom prst="rect">
-            <a:avLst/>
-          </a:prstGeom>
-          <a:solidFill>
-            <a:srgbClr val="C00000"/>
+            <a:off x="594360" y="2167128"/>
+            <a:ext cx="566928" cy="704088"/>
+          </a:xfrm>
+          <a:prstGeom prst="rect">
+            <a:avLst/>
+          </a:prstGeom>
+          <a:solidFill>
+            <a:srgbClr val="E8601A"/>
           </a:solidFill>
           <a:ln>
             <a:noFill/>
@@ -8108,13 +8398,13 @@
       </p:sp>
       <p:sp>
         <p:nvSpPr>
-          <p:cNvPr id="19" name="TextBox 18"/>
+          <p:cNvPr id="16" name="TextBox 15"/>
           <p:cNvSpPr txBox="1"/>
           <p:nvPr/>
         </p:nvSpPr>
         <p:spPr>
           <a:xfrm>
-            <a:off x="612648" y="3081528"/>
+            <a:off x="612648" y="2295144"/>
             <a:ext cx="530352" cy="457200"/>
           </a:xfrm>
           <a:prstGeom prst="rect">
@@ -8132,24 +8422,24 @@
             <a:r>
               <a:rPr sz="1600" b="1" i="0">
                 <a:solidFill>
-                  <a:srgbClr val="FFFFFF"/>
+                  <a:srgbClr val="2A1800"/>
                 </a:solidFill>
               </a:rPr>
-              <a:t>03</a:t>
-            </a:r>
-          </a:p>
-        </p:txBody>
-      </p:sp>
-      <p:sp>
-        <p:nvSpPr>
-          <p:cNvPr id="20" name="TextBox 19"/>
+              <a:t>02</a:t>
+            </a:r>
+          </a:p>
+        </p:txBody>
+      </p:sp>
+      <p:sp>
+        <p:nvSpPr>
+          <p:cNvPr id="17" name="TextBox 16"/>
           <p:cNvSpPr txBox="1"/>
           <p:nvPr/>
         </p:nvSpPr>
         <p:spPr>
           <a:xfrm>
-            <a:off x="1280160" y="3044952"/>
-            <a:ext cx="2560320" cy="365760"/>
+            <a:off x="1280160" y="2258568"/>
+            <a:ext cx="2651760" cy="457200"/>
           </a:xfrm>
           <a:prstGeom prst="rect">
             <a:avLst/>
@@ -8166,23 +8456,23 @@
             <a:r>
               <a:rPr sz="1500" b="1" i="0">
                 <a:solidFill>
-                  <a:srgbClr val="FFFFFF"/>
+                  <a:srgbClr val="2A1800"/>
                 </a:solidFill>
               </a:rPr>
-              <a:t>Web Dashboard</a:t>
-            </a:r>
-          </a:p>
-        </p:txBody>
-      </p:sp>
-      <p:sp>
-        <p:nvSpPr>
-          <p:cNvPr id="21" name="TextBox 20"/>
+              <a:t>Anomaly Detection</a:t>
+            </a:r>
+          </a:p>
+        </p:txBody>
+      </p:sp>
+      <p:sp>
+        <p:nvSpPr>
+          <p:cNvPr id="18" name="TextBox 17"/>
           <p:cNvSpPr txBox="1"/>
           <p:nvPr/>
         </p:nvSpPr>
         <p:spPr>
           <a:xfrm>
-            <a:off x="3931920" y="3044952"/>
+            <a:off x="4069080" y="2258568"/>
             <a:ext cx="7315200" cy="457200"/>
           </a:xfrm>
           <a:prstGeom prst="rect">
@@ -8200,30 +8490,30 @@
             <a:r>
               <a:rPr sz="1300" b="0" i="0">
                 <a:solidFill>
-                  <a:srgbClr val="00B0F0"/>
+                  <a:srgbClr val="2A1800"/>
                 </a:solidFill>
               </a:rPr>
-              <a:t>Provide an intuitive, responsive UI to visualize traffic metrics and alerts.</a:t>
-            </a:r>
-          </a:p>
-        </p:txBody>
-      </p:sp>
-      <p:sp>
-        <p:nvSpPr>
-          <p:cNvPr id="22" name="Rectangle 21"/>
+              <a:t>Detect threats like DoS attacks, Port Scans, and DNS anomalies in real time.</a:t>
+            </a:r>
+          </a:p>
+        </p:txBody>
+      </p:sp>
+      <p:sp>
+        <p:nvSpPr>
+          <p:cNvPr id="19" name="Rectangle 18"/>
           <p:cNvSpPr/>
           <p:nvPr/>
         </p:nvSpPr>
         <p:spPr>
           <a:xfrm>
-            <a:off x="594360" y="3749040"/>
-            <a:ext cx="10972800" cy="685800"/>
-          </a:xfrm>
-          <a:prstGeom prst="rect">
-            <a:avLst/>
-          </a:prstGeom>
-          <a:solidFill>
-            <a:srgbClr val="E8EFF8"/>
+            <a:off x="594360" y="2944368"/>
+            <a:ext cx="10972800" cy="704088"/>
+          </a:xfrm>
+          <a:prstGeom prst="rect">
+            <a:avLst/>
+          </a:prstGeom>
+          <a:solidFill>
+            <a:srgbClr val="E8601A"/>
           </a:solidFill>
           <a:ln>
             <a:noFill/>
@@ -8253,20 +8543,20 @@
       </p:sp>
       <p:sp>
         <p:nvSpPr>
-          <p:cNvPr id="23" name="Rectangle 22"/>
+          <p:cNvPr id="20" name="Rectangle 19"/>
           <p:cNvSpPr/>
           <p:nvPr/>
         </p:nvSpPr>
         <p:spPr>
           <a:xfrm>
-            <a:off x="594360" y="3749040"/>
-            <a:ext cx="548640" cy="685800"/>
-          </a:xfrm>
-          <a:prstGeom prst="rect">
-            <a:avLst/>
-          </a:prstGeom>
-          <a:solidFill>
-            <a:srgbClr val="C00000"/>
+            <a:off x="594360" y="2944368"/>
+            <a:ext cx="566928" cy="704088"/>
+          </a:xfrm>
+          <a:prstGeom prst="rect">
+            <a:avLst/>
+          </a:prstGeom>
+          <a:solidFill>
+            <a:srgbClr val="F4A800"/>
           </a:solidFill>
           <a:ln>
             <a:noFill/>
@@ -8296,13 +8586,13 @@
       </p:sp>
       <p:sp>
         <p:nvSpPr>
-          <p:cNvPr id="24" name="TextBox 23"/>
+          <p:cNvPr id="21" name="TextBox 20"/>
           <p:cNvSpPr txBox="1"/>
           <p:nvPr/>
         </p:nvSpPr>
         <p:spPr>
           <a:xfrm>
-            <a:off x="612648" y="3858768"/>
+            <a:off x="612648" y="3072384"/>
             <a:ext cx="530352" cy="457200"/>
           </a:xfrm>
           <a:prstGeom prst="rect">
@@ -8323,21 +8613,21 @@
                   <a:srgbClr val="FFFFFF"/>
                 </a:solidFill>
               </a:rPr>
-              <a:t>04</a:t>
-            </a:r>
-          </a:p>
-        </p:txBody>
-      </p:sp>
-      <p:sp>
-        <p:nvSpPr>
-          <p:cNvPr id="25" name="TextBox 24"/>
+              <a:t>03</a:t>
+            </a:r>
+          </a:p>
+        </p:txBody>
+      </p:sp>
+      <p:sp>
+        <p:nvSpPr>
+          <p:cNvPr id="22" name="TextBox 21"/>
           <p:cNvSpPr txBox="1"/>
           <p:nvPr/>
         </p:nvSpPr>
         <p:spPr>
           <a:xfrm>
-            <a:off x="1280160" y="3822192"/>
-            <a:ext cx="2560320" cy="365760"/>
+            <a:off x="1280160" y="3035808"/>
+            <a:ext cx="2651760" cy="457200"/>
           </a:xfrm>
           <a:prstGeom prst="rect">
             <a:avLst/>
@@ -8354,23 +8644,23 @@
             <a:r>
               <a:rPr sz="1500" b="1" i="0">
                 <a:solidFill>
-                  <a:srgbClr val="1F3564"/>
+                  <a:srgbClr val="FFFFFF"/>
                 </a:solidFill>
               </a:rPr>
-              <a:t>PCAP Forensics</a:t>
-            </a:r>
-          </a:p>
-        </p:txBody>
-      </p:sp>
-      <p:sp>
-        <p:nvSpPr>
-          <p:cNvPr id="26" name="TextBox 25"/>
+              <a:t>Web Dashboard</a:t>
+            </a:r>
+          </a:p>
+        </p:txBody>
+      </p:sp>
+      <p:sp>
+        <p:nvSpPr>
+          <p:cNvPr id="23" name="TextBox 22"/>
           <p:cNvSpPr txBox="1"/>
           <p:nvPr/>
         </p:nvSpPr>
         <p:spPr>
           <a:xfrm>
-            <a:off x="3931920" y="3822192"/>
+            <a:off x="4069080" y="3035808"/>
             <a:ext cx="7315200" cy="457200"/>
           </a:xfrm>
           <a:prstGeom prst="rect">
@@ -8388,30 +8678,30 @@
             <a:r>
               <a:rPr sz="1300" b="0" i="0">
                 <a:solidFill>
-                  <a:srgbClr val="0070C0"/>
+                  <a:srgbClr val="FFFFFF"/>
                 </a:solidFill>
               </a:rPr>
-              <a:t>Allow post-incident analysis by uploading .pcap files for offline investigation.</a:t>
-            </a:r>
-          </a:p>
-        </p:txBody>
-      </p:sp>
-      <p:sp>
-        <p:nvSpPr>
-          <p:cNvPr id="27" name="Rectangle 26"/>
+              <a:t>Provide an intuitive, responsive UI to visualize traffic metrics and alerts.</a:t>
+            </a:r>
+          </a:p>
+        </p:txBody>
+      </p:sp>
+      <p:sp>
+        <p:nvSpPr>
+          <p:cNvPr id="24" name="Rectangle 23"/>
           <p:cNvSpPr/>
           <p:nvPr/>
         </p:nvSpPr>
         <p:spPr>
           <a:xfrm>
-            <a:off x="594360" y="4526280"/>
-            <a:ext cx="10972800" cy="685800"/>
-          </a:xfrm>
-          <a:prstGeom prst="rect">
-            <a:avLst/>
-          </a:prstGeom>
-          <a:solidFill>
-            <a:srgbClr val="1F3564"/>
+            <a:off x="594360" y="3721608"/>
+            <a:ext cx="10972800" cy="704088"/>
+          </a:xfrm>
+          <a:prstGeom prst="rect">
+            <a:avLst/>
+          </a:prstGeom>
+          <a:solidFill>
+            <a:srgbClr val="FDF0E0"/>
           </a:solidFill>
           <a:ln>
             <a:noFill/>
@@ -8441,20 +8731,20 @@
       </p:sp>
       <p:sp>
         <p:nvSpPr>
-          <p:cNvPr id="28" name="Rectangle 27"/>
+          <p:cNvPr id="25" name="Rectangle 24"/>
           <p:cNvSpPr/>
           <p:nvPr/>
         </p:nvSpPr>
         <p:spPr>
           <a:xfrm>
-            <a:off x="594360" y="4526280"/>
-            <a:ext cx="548640" cy="685800"/>
-          </a:xfrm>
-          <a:prstGeom prst="rect">
-            <a:avLst/>
-          </a:prstGeom>
-          <a:solidFill>
-            <a:srgbClr val="C00000"/>
+            <a:off x="594360" y="3721608"/>
+            <a:ext cx="566928" cy="704088"/>
+          </a:xfrm>
+          <a:prstGeom prst="rect">
+            <a:avLst/>
+          </a:prstGeom>
+          <a:solidFill>
+            <a:srgbClr val="E8601A"/>
           </a:solidFill>
           <a:ln>
             <a:noFill/>
@@ -8484,13 +8774,13 @@
       </p:sp>
       <p:sp>
         <p:nvSpPr>
-          <p:cNvPr id="29" name="TextBox 28"/>
+          <p:cNvPr id="26" name="TextBox 25"/>
           <p:cNvSpPr txBox="1"/>
           <p:nvPr/>
         </p:nvSpPr>
         <p:spPr>
           <a:xfrm>
-            <a:off x="612648" y="4636008"/>
+            <a:off x="612648" y="3849624"/>
             <a:ext cx="530352" cy="457200"/>
           </a:xfrm>
           <a:prstGeom prst="rect">
@@ -8508,24 +8798,24 @@
             <a:r>
               <a:rPr sz="1600" b="1" i="0">
                 <a:solidFill>
-                  <a:srgbClr val="FFFFFF"/>
+                  <a:srgbClr val="2A1800"/>
                 </a:solidFill>
               </a:rPr>
-              <a:t>05</a:t>
-            </a:r>
-          </a:p>
-        </p:txBody>
-      </p:sp>
-      <p:sp>
-        <p:nvSpPr>
-          <p:cNvPr id="30" name="TextBox 29"/>
+              <a:t>04</a:t>
+            </a:r>
+          </a:p>
+        </p:txBody>
+      </p:sp>
+      <p:sp>
+        <p:nvSpPr>
+          <p:cNvPr id="27" name="TextBox 26"/>
           <p:cNvSpPr txBox="1"/>
           <p:nvPr/>
         </p:nvSpPr>
         <p:spPr>
           <a:xfrm>
-            <a:off x="1280160" y="4599432"/>
-            <a:ext cx="2560320" cy="365760"/>
+            <a:off x="1280160" y="3813048"/>
+            <a:ext cx="2651760" cy="457200"/>
           </a:xfrm>
           <a:prstGeom prst="rect">
             <a:avLst/>
@@ -8542,23 +8832,23 @@
             <a:r>
               <a:rPr sz="1500" b="1" i="0">
                 <a:solidFill>
-                  <a:srgbClr val="FFFFFF"/>
+                  <a:srgbClr val="2A1800"/>
                 </a:solidFill>
               </a:rPr>
-              <a:t>Decoupled Design</a:t>
-            </a:r>
-          </a:p>
-        </p:txBody>
-      </p:sp>
-      <p:sp>
-        <p:nvSpPr>
-          <p:cNvPr id="31" name="TextBox 30"/>
+              <a:t>PCAP Forensics</a:t>
+            </a:r>
+          </a:p>
+        </p:txBody>
+      </p:sp>
+      <p:sp>
+        <p:nvSpPr>
+          <p:cNvPr id="28" name="TextBox 27"/>
           <p:cNvSpPr txBox="1"/>
           <p:nvPr/>
         </p:nvSpPr>
         <p:spPr>
           <a:xfrm>
-            <a:off x="3931920" y="4599432"/>
+            <a:off x="4069080" y="3813048"/>
             <a:ext cx="7315200" cy="457200"/>
           </a:xfrm>
           <a:prstGeom prst="rect">
@@ -8576,7 +8866,195 @@
             <a:r>
               <a:rPr sz="1300" b="0" i="0">
                 <a:solidFill>
-                  <a:srgbClr val="00B0F0"/>
+                  <a:srgbClr val="2A1800"/>
+                </a:solidFill>
+              </a:rPr>
+              <a:t>Allow post-incident analysis by uploading .pcap files for offline investigation.</a:t>
+            </a:r>
+          </a:p>
+        </p:txBody>
+      </p:sp>
+      <p:sp>
+        <p:nvSpPr>
+          <p:cNvPr id="29" name="Rectangle 28"/>
+          <p:cNvSpPr/>
+          <p:nvPr/>
+        </p:nvSpPr>
+        <p:spPr>
+          <a:xfrm>
+            <a:off x="594360" y="4498848"/>
+            <a:ext cx="10972800" cy="704088"/>
+          </a:xfrm>
+          <a:prstGeom prst="rect">
+            <a:avLst/>
+          </a:prstGeom>
+          <a:solidFill>
+            <a:srgbClr val="E8601A"/>
+          </a:solidFill>
+          <a:ln>
+            <a:noFill/>
+          </a:ln>
+        </p:spPr>
+        <p:style>
+          <a:lnRef idx="1">
+            <a:schemeClr val="accent1"/>
+          </a:lnRef>
+          <a:fillRef idx="3">
+            <a:schemeClr val="accent1"/>
+          </a:fillRef>
+          <a:effectRef idx="2">
+            <a:schemeClr val="accent1"/>
+          </a:effectRef>
+          <a:fontRef idx="minor">
+            <a:schemeClr val="lt1"/>
+          </a:fontRef>
+        </p:style>
+        <p:txBody>
+          <a:bodyPr rtlCol="0" anchor="ctr"/>
+          <a:lstStyle/>
+          <a:p>
+            <a:pPr algn="ctr"/>
+          </a:p>
+        </p:txBody>
+      </p:sp>
+      <p:sp>
+        <p:nvSpPr>
+          <p:cNvPr id="30" name="Rectangle 29"/>
+          <p:cNvSpPr/>
+          <p:nvPr/>
+        </p:nvSpPr>
+        <p:spPr>
+          <a:xfrm>
+            <a:off x="594360" y="4498848"/>
+            <a:ext cx="566928" cy="704088"/>
+          </a:xfrm>
+          <a:prstGeom prst="rect">
+            <a:avLst/>
+          </a:prstGeom>
+          <a:solidFill>
+            <a:srgbClr val="F4A800"/>
+          </a:solidFill>
+          <a:ln>
+            <a:noFill/>
+          </a:ln>
+        </p:spPr>
+        <p:style>
+          <a:lnRef idx="1">
+            <a:schemeClr val="accent1"/>
+          </a:lnRef>
+          <a:fillRef idx="3">
+            <a:schemeClr val="accent1"/>
+          </a:fillRef>
+          <a:effectRef idx="2">
+            <a:schemeClr val="accent1"/>
+          </a:effectRef>
+          <a:fontRef idx="minor">
+            <a:schemeClr val="lt1"/>
+          </a:fontRef>
+        </p:style>
+        <p:txBody>
+          <a:bodyPr rtlCol="0" anchor="ctr"/>
+          <a:lstStyle/>
+          <a:p>
+            <a:pPr algn="ctr"/>
+          </a:p>
+        </p:txBody>
+      </p:sp>
+      <p:sp>
+        <p:nvSpPr>
+          <p:cNvPr id="31" name="TextBox 30"/>
+          <p:cNvSpPr txBox="1"/>
+          <p:nvPr/>
+        </p:nvSpPr>
+        <p:spPr>
+          <a:xfrm>
+            <a:off x="612648" y="4626864"/>
+            <a:ext cx="530352" cy="457200"/>
+          </a:xfrm>
+          <a:prstGeom prst="rect">
+            <a:avLst/>
+          </a:prstGeom>
+          <a:noFill/>
+        </p:spPr>
+        <p:txBody>
+          <a:bodyPr wrap="square">
+            <a:spAutoFit/>
+          </a:bodyPr>
+          <a:lstStyle/>
+          <a:p>
+            <a:pPr algn="ctr"/>
+            <a:r>
+              <a:rPr sz="1600" b="1" i="0">
+                <a:solidFill>
+                  <a:srgbClr val="FFFFFF"/>
+                </a:solidFill>
+              </a:rPr>
+              <a:t>05</a:t>
+            </a:r>
+          </a:p>
+        </p:txBody>
+      </p:sp>
+      <p:sp>
+        <p:nvSpPr>
+          <p:cNvPr id="32" name="TextBox 31"/>
+          <p:cNvSpPr txBox="1"/>
+          <p:nvPr/>
+        </p:nvSpPr>
+        <p:spPr>
+          <a:xfrm>
+            <a:off x="1280160" y="4590288"/>
+            <a:ext cx="2651760" cy="457200"/>
+          </a:xfrm>
+          <a:prstGeom prst="rect">
+            <a:avLst/>
+          </a:prstGeom>
+          <a:noFill/>
+        </p:spPr>
+        <p:txBody>
+          <a:bodyPr wrap="square">
+            <a:spAutoFit/>
+          </a:bodyPr>
+          <a:lstStyle/>
+          <a:p>
+            <a:pPr algn="l"/>
+            <a:r>
+              <a:rPr sz="1500" b="1" i="0">
+                <a:solidFill>
+                  <a:srgbClr val="FFFFFF"/>
+                </a:solidFill>
+              </a:rPr>
+              <a:t>Decoupled Design</a:t>
+            </a:r>
+          </a:p>
+        </p:txBody>
+      </p:sp>
+      <p:sp>
+        <p:nvSpPr>
+          <p:cNvPr id="33" name="TextBox 32"/>
+          <p:cNvSpPr txBox="1"/>
+          <p:nvPr/>
+        </p:nvSpPr>
+        <p:spPr>
+          <a:xfrm>
+            <a:off x="4069080" y="4590288"/>
+            <a:ext cx="7315200" cy="457200"/>
+          </a:xfrm>
+          <a:prstGeom prst="rect">
+            <a:avLst/>
+          </a:prstGeom>
+          <a:noFill/>
+        </p:spPr>
+        <p:txBody>
+          <a:bodyPr wrap="square">
+            <a:spAutoFit/>
+          </a:bodyPr>
+          <a:lstStyle/>
+          <a:p>
+            <a:pPr algn="l"/>
+            <a:r>
+              <a:rPr sz="1300" b="0" i="0">
+                <a:solidFill>
+                  <a:srgbClr val="FFFFFF"/>
                 </a:solidFill>
               </a:rPr>
               <a:t>Implement a modern, scalable architecture (FastAPI backend + React frontend).</a:t>
@@ -8603,7 +9081,7 @@
     <p:bg>
       <p:bgPr>
         <a:solidFill>
-          <a:srgbClr val="F2F2F2"/>
+          <a:srgbClr val="FFF8F0"/>
         </a:solidFill>
         <a:effectLst/>
       </p:bgPr>
@@ -8631,13 +9109,13 @@
         <p:spPr>
           <a:xfrm>
             <a:off x="0" y="0"/>
-            <a:ext cx="12188952" cy="1280160"/>
-          </a:xfrm>
-          <a:prstGeom prst="rect">
-            <a:avLst/>
-          </a:prstGeom>
-          <a:solidFill>
-            <a:srgbClr val="1F3564"/>
+            <a:ext cx="12188952" cy="1261872"/>
+          </a:xfrm>
+          <a:prstGeom prst="rect">
+            <a:avLst/>
+          </a:prstGeom>
+          <a:solidFill>
+            <a:srgbClr val="B84000"/>
           </a:solidFill>
           <a:ln>
             <a:noFill/>
@@ -8674,13 +9152,13 @@
         <p:spPr>
           <a:xfrm>
             <a:off x="0" y="0"/>
-            <a:ext cx="109728" cy="1280160"/>
-          </a:xfrm>
-          <a:prstGeom prst="rect">
-            <a:avLst/>
-          </a:prstGeom>
-          <a:solidFill>
-            <a:srgbClr val="C00000"/>
+            <a:ext cx="164592" cy="1261872"/>
+          </a:xfrm>
+          <a:prstGeom prst="rect">
+            <a:avLst/>
+          </a:prstGeom>
+          <a:solidFill>
+            <a:srgbClr val="F4A800"/>
           </a:solidFill>
           <a:ln>
             <a:noFill/>
@@ -8710,82 +9188,14 @@
       </p:sp>
       <p:sp>
         <p:nvSpPr>
-          <p:cNvPr id="4" name="TextBox 3"/>
-          <p:cNvSpPr txBox="1"/>
-          <p:nvPr/>
-        </p:nvSpPr>
-        <p:spPr>
-          <a:xfrm>
-            <a:off x="274320" y="182880"/>
-            <a:ext cx="11430000" cy="914400"/>
-          </a:xfrm>
-          <a:prstGeom prst="rect">
-            <a:avLst/>
-          </a:prstGeom>
-          <a:noFill/>
-        </p:spPr>
-        <p:txBody>
-          <a:bodyPr wrap="square">
-            <a:spAutoFit/>
-          </a:bodyPr>
-          <a:lstStyle/>
-          <a:p>
-            <a:pPr algn="l"/>
-            <a:r>
-              <a:rPr sz="3000" b="1" i="0">
-                <a:solidFill>
-                  <a:srgbClr val="FFFFFF"/>
-                </a:solidFill>
-              </a:rPr>
-              <a:t>Proposed Methodology</a:t>
-            </a:r>
-          </a:p>
-        </p:txBody>
-      </p:sp>
-      <p:sp>
-        <p:nvSpPr>
-          <p:cNvPr id="5" name="TextBox 4"/>
-          <p:cNvSpPr txBox="1"/>
-          <p:nvPr/>
-        </p:nvSpPr>
-        <p:spPr>
-          <a:xfrm>
-            <a:off x="274320" y="749808"/>
-            <a:ext cx="11430000" cy="457200"/>
-          </a:xfrm>
-          <a:prstGeom prst="rect">
-            <a:avLst/>
-          </a:prstGeom>
-          <a:noFill/>
-        </p:spPr>
-        <p:txBody>
-          <a:bodyPr wrap="square">
-            <a:spAutoFit/>
-          </a:bodyPr>
-          <a:lstStyle/>
-          <a:p>
-            <a:pPr algn="l"/>
-            <a:r>
-              <a:rPr sz="1300" b="0" i="0">
-                <a:solidFill>
-                  <a:srgbClr val="00B0F0"/>
-                </a:solidFill>
-              </a:rPr>
-              <a:t>System Architecture  |  Data Flow  |  Algorithm</a:t>
-            </a:r>
-          </a:p>
-        </p:txBody>
-      </p:sp>
-      <p:sp>
-        <p:nvSpPr>
-          <p:cNvPr id="6" name="Rectangle 5"/>
+          <p:cNvPr id="4" name="Rectangle 3"/>
           <p:cNvSpPr/>
           <p:nvPr/>
         </p:nvSpPr>
         <p:spPr>
           <a:xfrm>
-            <a:off x="0" y="6748272"/>
-            <a:ext cx="12188952" cy="109728"/>
+            <a:off x="12115800" y="0"/>
+            <a:ext cx="73152" cy="1261872"/>
           </a:xfrm>
           <a:prstGeom prst="rect">
             <a:avLst/>
@@ -8821,20 +9231,88 @@
       </p:sp>
       <p:sp>
         <p:nvSpPr>
+          <p:cNvPr id="5" name="TextBox 4"/>
+          <p:cNvSpPr txBox="1"/>
+          <p:nvPr/>
+        </p:nvSpPr>
+        <p:spPr>
+          <a:xfrm>
+            <a:off x="320040" y="164592"/>
+            <a:ext cx="11430000" cy="685800"/>
+          </a:xfrm>
+          <a:prstGeom prst="rect">
+            <a:avLst/>
+          </a:prstGeom>
+          <a:noFill/>
+        </p:spPr>
+        <p:txBody>
+          <a:bodyPr wrap="square">
+            <a:spAutoFit/>
+          </a:bodyPr>
+          <a:lstStyle/>
+          <a:p>
+            <a:pPr algn="l"/>
+            <a:r>
+              <a:rPr sz="3000" b="1" i="0">
+                <a:solidFill>
+                  <a:srgbClr val="FFFFFF"/>
+                </a:solidFill>
+              </a:rPr>
+              <a:t>Proposed Methodology</a:t>
+            </a:r>
+          </a:p>
+        </p:txBody>
+      </p:sp>
+      <p:sp>
+        <p:nvSpPr>
+          <p:cNvPr id="6" name="TextBox 5"/>
+          <p:cNvSpPr txBox="1"/>
+          <p:nvPr/>
+        </p:nvSpPr>
+        <p:spPr>
+          <a:xfrm>
+            <a:off x="320040" y="841248"/>
+            <a:ext cx="11430000" cy="347472"/>
+          </a:xfrm>
+          <a:prstGeom prst="rect">
+            <a:avLst/>
+          </a:prstGeom>
+          <a:noFill/>
+        </p:spPr>
+        <p:txBody>
+          <a:bodyPr wrap="square">
+            <a:spAutoFit/>
+          </a:bodyPr>
+          <a:lstStyle/>
+          <a:p>
+            <a:pPr algn="l"/>
+            <a:r>
+              <a:rPr sz="1200" b="0" i="0">
+                <a:solidFill>
+                  <a:srgbClr val="F4A800"/>
+                </a:solidFill>
+              </a:rPr>
+              <a:t>System Architecture  |  Data Flow  |  Algorithm</a:t>
+            </a:r>
+          </a:p>
+        </p:txBody>
+      </p:sp>
+      <p:sp>
+        <p:nvSpPr>
           <p:cNvPr id="7" name="Rectangle 6"/>
           <p:cNvSpPr/>
           <p:nvPr/>
         </p:nvSpPr>
         <p:spPr>
           <a:xfrm>
-            <a:off x="457200" y="1417320"/>
-            <a:ext cx="5212080" cy="960120"/>
-          </a:xfrm>
-          <a:prstGeom prst="rect">
-            <a:avLst/>
-          </a:prstGeom>
-          <a:solidFill>
-            <a:srgbClr val="FFFFFF"/>
+            <a:off x="0" y="6729984"/>
+            <a:ext cx="12188952" cy="128016"/>
+          </a:xfrm>
+          <a:prstGeom prst="rect">
+            <a:avLst/>
+          </a:prstGeom>
+          <a:solidFill>
+            <a:srgbClr val="F4A800"/>
           </a:solidFill>
           <a:ln>
             <a:noFill/>
@@ -8870,8 +9348,8 @@
         </p:nvSpPr>
         <p:spPr>
           <a:xfrm>
-            <a:off x="457200" y="1417320"/>
-            <a:ext cx="1005840" cy="960120"/>
+            <a:off x="0" y="6729984"/>
+            <a:ext cx="320040" cy="128016"/>
           </a:xfrm>
           <a:prstGeom prst="rect">
             <a:avLst/>
@@ -8907,150 +9385,14 @@
       </p:sp>
       <p:sp>
         <p:nvSpPr>
-          <p:cNvPr id="9" name="TextBox 8"/>
-          <p:cNvSpPr txBox="1"/>
-          <p:nvPr/>
-        </p:nvSpPr>
-        <p:spPr>
-          <a:xfrm>
-            <a:off x="475488" y="1463040"/>
-            <a:ext cx="969264" cy="411480"/>
-          </a:xfrm>
-          <a:prstGeom prst="rect">
-            <a:avLst/>
-          </a:prstGeom>
-          <a:noFill/>
-        </p:spPr>
-        <p:txBody>
-          <a:bodyPr wrap="square">
-            <a:spAutoFit/>
-          </a:bodyPr>
-          <a:lstStyle/>
-          <a:p>
-            <a:pPr algn="ctr"/>
-            <a:r>
-              <a:rPr sz="1100" b="1" i="0">
-                <a:solidFill>
-                  <a:srgbClr val="FFFFFF"/>
-                </a:solidFill>
-              </a:rPr>
-              <a:t>Layer 1</a:t>
-            </a:r>
-          </a:p>
-        </p:txBody>
-      </p:sp>
-      <p:sp>
-        <p:nvSpPr>
-          <p:cNvPr id="10" name="TextBox 9"/>
-          <p:cNvSpPr txBox="1"/>
-          <p:nvPr/>
-        </p:nvSpPr>
-        <p:spPr>
-          <a:xfrm>
-            <a:off x="475488" y="1874520"/>
-            <a:ext cx="969264" cy="411480"/>
-          </a:xfrm>
-          <a:prstGeom prst="rect">
-            <a:avLst/>
-          </a:prstGeom>
-          <a:noFill/>
-        </p:spPr>
-        <p:txBody>
-          <a:bodyPr wrap="square">
-            <a:spAutoFit/>
-          </a:bodyPr>
-          <a:lstStyle/>
-          <a:p>
-            <a:pPr algn="ctr"/>
-            <a:r>
-              <a:rPr sz="1000" b="1" i="0">
-                <a:solidFill>
-                  <a:srgbClr val="FFFFFF"/>
-                </a:solidFill>
-              </a:rPr>
-              <a:t>Data Capture</a:t>
-            </a:r>
-          </a:p>
-        </p:txBody>
-      </p:sp>
-      <p:sp>
-        <p:nvSpPr>
-          <p:cNvPr id="11" name="TextBox 10"/>
-          <p:cNvSpPr txBox="1"/>
-          <p:nvPr/>
-        </p:nvSpPr>
-        <p:spPr>
-          <a:xfrm>
-            <a:off x="1572768" y="1508760"/>
-            <a:ext cx="3931920" cy="804672"/>
-          </a:xfrm>
-          <a:prstGeom prst="rect">
-            <a:avLst/>
-          </a:prstGeom>
-          <a:noFill/>
-        </p:spPr>
-        <p:txBody>
-          <a:bodyPr wrap="square">
-            <a:spAutoFit/>
-          </a:bodyPr>
-          <a:lstStyle/>
-          <a:p>
-            <a:pPr algn="l"/>
-            <a:r>
-              <a:rPr sz="1200" b="0" i="0">
-                <a:solidFill>
-                  <a:srgbClr val="222222"/>
-                </a:solidFill>
-              </a:rPr>
-              <a:t>Scapy sniffs packets from network interface OR reads .pcap files via PCAPReader class.</a:t>
-            </a:r>
-          </a:p>
-        </p:txBody>
-      </p:sp>
-      <p:sp>
-        <p:nvSpPr>
-          <p:cNvPr id="12" name="TextBox 11"/>
-          <p:cNvSpPr txBox="1"/>
-          <p:nvPr/>
-        </p:nvSpPr>
-        <p:spPr>
-          <a:xfrm>
-            <a:off x="5486400" y="1920240"/>
-            <a:ext cx="731520" cy="365760"/>
-          </a:xfrm>
-          <a:prstGeom prst="rect">
-            <a:avLst/>
-          </a:prstGeom>
-          <a:noFill/>
-        </p:spPr>
-        <p:txBody>
-          <a:bodyPr wrap="square">
-            <a:spAutoFit/>
-          </a:bodyPr>
-          <a:lstStyle/>
-          <a:p>
-            <a:pPr algn="ctr"/>
-            <a:r>
-              <a:rPr sz="1800" b="1" i="0">
-                <a:solidFill>
-                  <a:srgbClr val="C00000"/>
-                </a:solidFill>
-              </a:rPr>
-              <a:t>▼</a:t>
-            </a:r>
-          </a:p>
-        </p:txBody>
-      </p:sp>
-      <p:sp>
-        <p:nvSpPr>
-          <p:cNvPr id="13" name="Rectangle 12"/>
+          <p:cNvPr id="9" name="Rectangle 8"/>
           <p:cNvSpPr/>
           <p:nvPr/>
         </p:nvSpPr>
         <p:spPr>
           <a:xfrm>
-            <a:off x="457200" y="2560320"/>
-            <a:ext cx="5212080" cy="960120"/>
+            <a:off x="457200" y="1389888"/>
+            <a:ext cx="5303520" cy="987552"/>
           </a:xfrm>
           <a:prstGeom prst="rect">
             <a:avLst/>
@@ -9058,8 +9400,10 @@
           <a:solidFill>
             <a:srgbClr val="FFFFFF"/>
           </a:solidFill>
-          <a:ln>
-            <a:noFill/>
+          <a:ln w="7620">
+            <a:solidFill>
+              <a:srgbClr val="E8601A"/>
+            </a:solidFill>
           </a:ln>
         </p:spPr>
         <p:style>
@@ -9086,20 +9430,20 @@
       </p:sp>
       <p:sp>
         <p:nvSpPr>
-          <p:cNvPr id="14" name="Rectangle 13"/>
+          <p:cNvPr id="10" name="Rectangle 9"/>
           <p:cNvSpPr/>
           <p:nvPr/>
         </p:nvSpPr>
         <p:spPr>
           <a:xfrm>
-            <a:off x="457200" y="2560320"/>
-            <a:ext cx="1005840" cy="960120"/>
-          </a:xfrm>
-          <a:prstGeom prst="rect">
-            <a:avLst/>
-          </a:prstGeom>
-          <a:solidFill>
-            <a:srgbClr val="0070C0"/>
+            <a:off x="457200" y="1389888"/>
+            <a:ext cx="1024128" cy="987552"/>
+          </a:xfrm>
+          <a:prstGeom prst="rect">
+            <a:avLst/>
+          </a:prstGeom>
+          <a:solidFill>
+            <a:srgbClr val="E8601A"/>
           </a:solidFill>
           <a:ln>
             <a:noFill/>
@@ -9129,14 +9473,14 @@
       </p:sp>
       <p:sp>
         <p:nvSpPr>
-          <p:cNvPr id="15" name="TextBox 14"/>
+          <p:cNvPr id="11" name="TextBox 10"/>
           <p:cNvSpPr txBox="1"/>
           <p:nvPr/>
         </p:nvSpPr>
         <p:spPr>
           <a:xfrm>
-            <a:off x="475488" y="2606040"/>
-            <a:ext cx="969264" cy="411480"/>
+            <a:off x="475488" y="1444752"/>
+            <a:ext cx="987552" cy="402336"/>
           </a:xfrm>
           <a:prstGeom prst="rect">
             <a:avLst/>
@@ -9156,21 +9500,21 @@
                   <a:srgbClr val="FFFFFF"/>
                 </a:solidFill>
               </a:rPr>
-              <a:t>Layer 2</a:t>
-            </a:r>
-          </a:p>
-        </p:txBody>
-      </p:sp>
-      <p:sp>
-        <p:nvSpPr>
-          <p:cNvPr id="16" name="TextBox 15"/>
+              <a:t>Layer 1</a:t>
+            </a:r>
+          </a:p>
+        </p:txBody>
+      </p:sp>
+      <p:sp>
+        <p:nvSpPr>
+          <p:cNvPr id="12" name="TextBox 11"/>
           <p:cNvSpPr txBox="1"/>
           <p:nvPr/>
         </p:nvSpPr>
         <p:spPr>
           <a:xfrm>
-            <a:off x="475488" y="3017520"/>
-            <a:ext cx="969264" cy="411480"/>
+            <a:off x="475488" y="1883664"/>
+            <a:ext cx="987552" cy="402336"/>
           </a:xfrm>
           <a:prstGeom prst="rect">
             <a:avLst/>
@@ -9190,21 +9534,21 @@
                   <a:srgbClr val="FFFFFF"/>
                 </a:solidFill>
               </a:rPr>
-              <a:t>Detection Engine</a:t>
-            </a:r>
-          </a:p>
-        </p:txBody>
-      </p:sp>
-      <p:sp>
-        <p:nvSpPr>
-          <p:cNvPr id="17" name="TextBox 16"/>
+              <a:t>Data Capture</a:t>
+            </a:r>
+          </a:p>
+        </p:txBody>
+      </p:sp>
+      <p:sp>
+        <p:nvSpPr>
+          <p:cNvPr id="13" name="TextBox 12"/>
           <p:cNvSpPr txBox="1"/>
           <p:nvPr/>
         </p:nvSpPr>
         <p:spPr>
           <a:xfrm>
-            <a:off x="1572768" y="2651760"/>
-            <a:ext cx="3931920" cy="804672"/>
+            <a:off x="1591056" y="1499616"/>
+            <a:ext cx="4023360" cy="804672"/>
           </a:xfrm>
           <a:prstGeom prst="rect">
             <a:avLst/>
@@ -9221,23 +9565,23 @@
             <a:r>
               <a:rPr sz="1200" b="0" i="0">
                 <a:solidFill>
-                  <a:srgbClr val="222222"/>
+                  <a:srgbClr val="2A1800"/>
                 </a:solidFill>
               </a:rPr>
-              <a:t>Each packet is passed through DoSDetector, PortScanDetector, DNSAnomalyDetector, and MLAnomalyDetector.</a:t>
-            </a:r>
-          </a:p>
-        </p:txBody>
-      </p:sp>
-      <p:sp>
-        <p:nvSpPr>
-          <p:cNvPr id="18" name="TextBox 17"/>
+              <a:t>Scapy sniffs packets from network interface OR reads .pcap files via PCAPReader class.</a:t>
+            </a:r>
+          </a:p>
+        </p:txBody>
+      </p:sp>
+      <p:sp>
+        <p:nvSpPr>
+          <p:cNvPr id="14" name="TextBox 13"/>
           <p:cNvSpPr txBox="1"/>
           <p:nvPr/>
         </p:nvSpPr>
         <p:spPr>
           <a:xfrm>
-            <a:off x="5486400" y="3063240"/>
+            <a:off x="5394960" y="1920240"/>
             <a:ext cx="731520" cy="365760"/>
           </a:xfrm>
           <a:prstGeom prst="rect">
@@ -9255,7 +9599,7 @@
             <a:r>
               <a:rPr sz="1800" b="1" i="0">
                 <a:solidFill>
-                  <a:srgbClr val="C00000"/>
+                  <a:srgbClr val="E8601A"/>
                 </a:solidFill>
               </a:rPr>
               <a:t>▼</a:t>
@@ -9265,14 +9609,14 @@
       </p:sp>
       <p:sp>
         <p:nvSpPr>
-          <p:cNvPr id="19" name="Rectangle 18"/>
+          <p:cNvPr id="15" name="Rectangle 14"/>
           <p:cNvSpPr/>
           <p:nvPr/>
         </p:nvSpPr>
         <p:spPr>
           <a:xfrm>
-            <a:off x="457200" y="3703320"/>
-            <a:ext cx="5212080" cy="960120"/>
+            <a:off x="457200" y="2560320"/>
+            <a:ext cx="5303520" cy="987552"/>
           </a:xfrm>
           <a:prstGeom prst="rect">
             <a:avLst/>
@@ -9280,8 +9624,10 @@
           <a:solidFill>
             <a:srgbClr val="FFFFFF"/>
           </a:solidFill>
-          <a:ln>
-            <a:noFill/>
+          <a:ln w="7620">
+            <a:solidFill>
+              <a:srgbClr val="F4A800"/>
+            </a:solidFill>
           </a:ln>
         </p:spPr>
         <p:style>
@@ -9308,20 +9654,20 @@
       </p:sp>
       <p:sp>
         <p:nvSpPr>
-          <p:cNvPr id="20" name="Rectangle 19"/>
+          <p:cNvPr id="16" name="Rectangle 15"/>
           <p:cNvSpPr/>
           <p:nvPr/>
         </p:nvSpPr>
         <p:spPr>
           <a:xfrm>
-            <a:off x="457200" y="3703320"/>
-            <a:ext cx="1005840" cy="960120"/>
-          </a:xfrm>
-          <a:prstGeom prst="rect">
-            <a:avLst/>
-          </a:prstGeom>
-          <a:solidFill>
-            <a:srgbClr val="002060"/>
+            <a:off x="457200" y="2560320"/>
+            <a:ext cx="1024128" cy="987552"/>
+          </a:xfrm>
+          <a:prstGeom prst="rect">
+            <a:avLst/>
+          </a:prstGeom>
+          <a:solidFill>
+            <a:srgbClr val="F4A800"/>
           </a:solidFill>
           <a:ln>
             <a:noFill/>
@@ -9351,14 +9697,14 @@
       </p:sp>
       <p:sp>
         <p:nvSpPr>
-          <p:cNvPr id="21" name="TextBox 20"/>
+          <p:cNvPr id="17" name="TextBox 16"/>
           <p:cNvSpPr txBox="1"/>
           <p:nvPr/>
         </p:nvSpPr>
         <p:spPr>
           <a:xfrm>
-            <a:off x="475488" y="3749040"/>
-            <a:ext cx="969264" cy="411480"/>
+            <a:off x="475488" y="2615184"/>
+            <a:ext cx="987552" cy="402336"/>
           </a:xfrm>
           <a:prstGeom prst="rect">
             <a:avLst/>
@@ -9375,24 +9721,24 @@
             <a:r>
               <a:rPr sz="1100" b="1" i="0">
                 <a:solidFill>
-                  <a:srgbClr val="FFFFFF"/>
+                  <a:srgbClr val="2A1800"/>
                 </a:solidFill>
               </a:rPr>
-              <a:t>Layer 3</a:t>
-            </a:r>
-          </a:p>
-        </p:txBody>
-      </p:sp>
-      <p:sp>
-        <p:nvSpPr>
-          <p:cNvPr id="22" name="TextBox 21"/>
+              <a:t>Layer 2</a:t>
+            </a:r>
+          </a:p>
+        </p:txBody>
+      </p:sp>
+      <p:sp>
+        <p:nvSpPr>
+          <p:cNvPr id="18" name="TextBox 17"/>
           <p:cNvSpPr txBox="1"/>
           <p:nvPr/>
         </p:nvSpPr>
         <p:spPr>
           <a:xfrm>
-            <a:off x="475488" y="4160520"/>
-            <a:ext cx="969264" cy="411480"/>
+            <a:off x="475488" y="3054096"/>
+            <a:ext cx="987552" cy="402336"/>
           </a:xfrm>
           <a:prstGeom prst="rect">
             <a:avLst/>
@@ -9409,24 +9755,24 @@
             <a:r>
               <a:rPr sz="1000" b="1" i="0">
                 <a:solidFill>
-                  <a:srgbClr val="FFFFFF"/>
+                  <a:srgbClr val="2A1800"/>
                 </a:solidFill>
               </a:rPr>
-              <a:t>Backend API</a:t>
-            </a:r>
-          </a:p>
-        </p:txBody>
-      </p:sp>
-      <p:sp>
-        <p:nvSpPr>
-          <p:cNvPr id="23" name="TextBox 22"/>
+              <a:t>Detection Engine</a:t>
+            </a:r>
+          </a:p>
+        </p:txBody>
+      </p:sp>
+      <p:sp>
+        <p:nvSpPr>
+          <p:cNvPr id="19" name="TextBox 18"/>
           <p:cNvSpPr txBox="1"/>
           <p:nvPr/>
         </p:nvSpPr>
         <p:spPr>
           <a:xfrm>
-            <a:off x="1572768" y="3794760"/>
-            <a:ext cx="3931920" cy="804672"/>
+            <a:off x="1591056" y="2670048"/>
+            <a:ext cx="4023360" cy="804672"/>
           </a:xfrm>
           <a:prstGeom prst="rect">
             <a:avLst/>
@@ -9443,23 +9789,23 @@
             <a:r>
               <a:rPr sz="1200" b="0" i="0">
                 <a:solidFill>
-                  <a:srgbClr val="222222"/>
+                  <a:srgbClr val="2A1800"/>
                 </a:solidFill>
               </a:rPr>
-              <a:t>FastAPI exposes /api/metrics, /api/alerts, and /api/upload_pcap endpoints. WebSocket for live streaming.</a:t>
-            </a:r>
-          </a:p>
-        </p:txBody>
-      </p:sp>
-      <p:sp>
-        <p:nvSpPr>
-          <p:cNvPr id="24" name="TextBox 23"/>
+              <a:t>Each packet passes through DoSDetector, PortScanDetector, DNSAnomalyDetector, MLAnomalyDetector.</a:t>
+            </a:r>
+          </a:p>
+        </p:txBody>
+      </p:sp>
+      <p:sp>
+        <p:nvSpPr>
+          <p:cNvPr id="20" name="TextBox 19"/>
           <p:cNvSpPr txBox="1"/>
           <p:nvPr/>
         </p:nvSpPr>
         <p:spPr>
           <a:xfrm>
-            <a:off x="5486400" y="4206240"/>
+            <a:off x="5394960" y="3090672"/>
             <a:ext cx="731520" cy="365760"/>
           </a:xfrm>
           <a:prstGeom prst="rect">
@@ -9477,7 +9823,7 @@
             <a:r>
               <a:rPr sz="1800" b="1" i="0">
                 <a:solidFill>
-                  <a:srgbClr val="C00000"/>
+                  <a:srgbClr val="E8601A"/>
                 </a:solidFill>
               </a:rPr>
               <a:t>▼</a:t>
@@ -9487,14 +9833,14 @@
       </p:sp>
       <p:sp>
         <p:nvSpPr>
-          <p:cNvPr id="25" name="Rectangle 24"/>
+          <p:cNvPr id="21" name="Rectangle 20"/>
           <p:cNvSpPr/>
           <p:nvPr/>
         </p:nvSpPr>
         <p:spPr>
           <a:xfrm>
-            <a:off x="457200" y="4846320"/>
-            <a:ext cx="5212080" cy="960120"/>
+            <a:off x="457200" y="3730752"/>
+            <a:ext cx="5303520" cy="987552"/>
           </a:xfrm>
           <a:prstGeom prst="rect">
             <a:avLst/>
@@ -9502,8 +9848,10 @@
           <a:solidFill>
             <a:srgbClr val="FFFFFF"/>
           </a:solidFill>
-          <a:ln>
-            <a:noFill/>
+          <a:ln w="7620">
+            <a:solidFill>
+              <a:srgbClr val="B84000"/>
+            </a:solidFill>
           </a:ln>
         </p:spPr>
         <p:style>
@@ -9530,20 +9878,20 @@
       </p:sp>
       <p:sp>
         <p:nvSpPr>
-          <p:cNvPr id="26" name="Rectangle 25"/>
+          <p:cNvPr id="22" name="Rectangle 21"/>
           <p:cNvSpPr/>
           <p:nvPr/>
         </p:nvSpPr>
         <p:spPr>
           <a:xfrm>
-            <a:off x="457200" y="4846320"/>
-            <a:ext cx="1005840" cy="960120"/>
-          </a:xfrm>
-          <a:prstGeom prst="rect">
-            <a:avLst/>
-          </a:prstGeom>
-          <a:solidFill>
-            <a:srgbClr val="008000"/>
+            <a:off x="457200" y="3730752"/>
+            <a:ext cx="1024128" cy="987552"/>
+          </a:xfrm>
+          <a:prstGeom prst="rect">
+            <a:avLst/>
+          </a:prstGeom>
+          <a:solidFill>
+            <a:srgbClr val="B84000"/>
           </a:solidFill>
           <a:ln>
             <a:noFill/>
@@ -9573,14 +9921,14 @@
       </p:sp>
       <p:sp>
         <p:nvSpPr>
-          <p:cNvPr id="27" name="TextBox 26"/>
+          <p:cNvPr id="23" name="TextBox 22"/>
           <p:cNvSpPr txBox="1"/>
           <p:nvPr/>
         </p:nvSpPr>
         <p:spPr>
           <a:xfrm>
-            <a:off x="475488" y="4892040"/>
-            <a:ext cx="969264" cy="411480"/>
+            <a:off x="475488" y="3785616"/>
+            <a:ext cx="987552" cy="402336"/>
           </a:xfrm>
           <a:prstGeom prst="rect">
             <a:avLst/>
@@ -9600,21 +9948,21 @@
                   <a:srgbClr val="FFFFFF"/>
                 </a:solidFill>
               </a:rPr>
-              <a:t>Layer 4</a:t>
-            </a:r>
-          </a:p>
-        </p:txBody>
-      </p:sp>
-      <p:sp>
-        <p:nvSpPr>
-          <p:cNvPr id="28" name="TextBox 27"/>
+              <a:t>Layer 3</a:t>
+            </a:r>
+          </a:p>
+        </p:txBody>
+      </p:sp>
+      <p:sp>
+        <p:nvSpPr>
+          <p:cNvPr id="24" name="TextBox 23"/>
           <p:cNvSpPr txBox="1"/>
           <p:nvPr/>
         </p:nvSpPr>
         <p:spPr>
           <a:xfrm>
-            <a:off x="475488" y="5303520"/>
-            <a:ext cx="969264" cy="411480"/>
+            <a:off x="475488" y="4224528"/>
+            <a:ext cx="987552" cy="402336"/>
           </a:xfrm>
           <a:prstGeom prst="rect">
             <a:avLst/>
@@ -9634,21 +9982,21 @@
                   <a:srgbClr val="FFFFFF"/>
                 </a:solidFill>
               </a:rPr>
-              <a:t>Frontend UI</a:t>
-            </a:r>
-          </a:p>
-        </p:txBody>
-      </p:sp>
-      <p:sp>
-        <p:nvSpPr>
-          <p:cNvPr id="29" name="TextBox 28"/>
+              <a:t>Backend API</a:t>
+            </a:r>
+          </a:p>
+        </p:txBody>
+      </p:sp>
+      <p:sp>
+        <p:nvSpPr>
+          <p:cNvPr id="25" name="TextBox 24"/>
           <p:cNvSpPr txBox="1"/>
           <p:nvPr/>
         </p:nvSpPr>
         <p:spPr>
           <a:xfrm>
-            <a:off x="1572768" y="4937760"/>
-            <a:ext cx="3931920" cy="804672"/>
+            <a:off x="1591056" y="3840480"/>
+            <a:ext cx="4023360" cy="804672"/>
           </a:xfrm>
           <a:prstGeom prst="rect">
             <a:avLst/>
@@ -9665,33 +10013,69 @@
             <a:r>
               <a:rPr sz="1200" b="0" i="0">
                 <a:solidFill>
-                  <a:srgbClr val="222222"/>
+                  <a:srgbClr val="2A1800"/>
                 </a:solidFill>
               </a:rPr>
-              <a:t>React + Vite renders dashboards with charts, alert panels, and a PCAP Forensics upload page.</a:t>
-            </a:r>
-          </a:p>
-        </p:txBody>
-      </p:sp>
-      <p:sp>
-        <p:nvSpPr>
-          <p:cNvPr id="30" name="Rectangle 29"/>
+              <a:t>FastAPI exposes /api/metrics, /api/alerts, /api/upload_pcap endpoints. WebSocket for live data.</a:t>
+            </a:r>
+          </a:p>
+        </p:txBody>
+      </p:sp>
+      <p:sp>
+        <p:nvSpPr>
+          <p:cNvPr id="26" name="TextBox 25"/>
+          <p:cNvSpPr txBox="1"/>
+          <p:nvPr/>
+        </p:nvSpPr>
+        <p:spPr>
+          <a:xfrm>
+            <a:off x="5394960" y="4261104"/>
+            <a:ext cx="731520" cy="365760"/>
+          </a:xfrm>
+          <a:prstGeom prst="rect">
+            <a:avLst/>
+          </a:prstGeom>
+          <a:noFill/>
+        </p:spPr>
+        <p:txBody>
+          <a:bodyPr wrap="square">
+            <a:spAutoFit/>
+          </a:bodyPr>
+          <a:lstStyle/>
+          <a:p>
+            <a:pPr algn="ctr"/>
+            <a:r>
+              <a:rPr sz="1800" b="1" i="0">
+                <a:solidFill>
+                  <a:srgbClr val="E8601A"/>
+                </a:solidFill>
+              </a:rPr>
+              <a:t>▼</a:t>
+            </a:r>
+          </a:p>
+        </p:txBody>
+      </p:sp>
+      <p:sp>
+        <p:nvSpPr>
+          <p:cNvPr id="27" name="Rectangle 26"/>
           <p:cNvSpPr/>
           <p:nvPr/>
         </p:nvSpPr>
         <p:spPr>
           <a:xfrm>
-            <a:off x="6126480" y="1417320"/>
-            <a:ext cx="5394960" cy="4663440"/>
-          </a:xfrm>
-          <a:prstGeom prst="rect">
-            <a:avLst/>
-          </a:prstGeom>
-          <a:solidFill>
-            <a:srgbClr val="1F3564"/>
-          </a:solidFill>
-          <a:ln>
-            <a:noFill/>
+            <a:off x="457200" y="4901184"/>
+            <a:ext cx="5303520" cy="987552"/>
+          </a:xfrm>
+          <a:prstGeom prst="rect">
+            <a:avLst/>
+          </a:prstGeom>
+          <a:solidFill>
+            <a:srgbClr val="FFFFFF"/>
+          </a:solidFill>
+          <a:ln w="7620">
+            <a:solidFill>
+              <a:srgbClr val="E8601A"/>
+            </a:solidFill>
           </a:ln>
         </p:spPr>
         <p:style>
@@ -9718,20 +10102,20 @@
       </p:sp>
       <p:sp>
         <p:nvSpPr>
-          <p:cNvPr id="31" name="Rectangle 30"/>
+          <p:cNvPr id="28" name="Rectangle 27"/>
           <p:cNvSpPr/>
           <p:nvPr/>
         </p:nvSpPr>
         <p:spPr>
           <a:xfrm>
-            <a:off x="6126480" y="1417320"/>
-            <a:ext cx="5394960" cy="457200"/>
-          </a:xfrm>
-          <a:prstGeom prst="rect">
-            <a:avLst/>
-          </a:prstGeom>
-          <a:solidFill>
-            <a:srgbClr val="C00000"/>
+            <a:off x="457200" y="4901184"/>
+            <a:ext cx="1024128" cy="987552"/>
+          </a:xfrm>
+          <a:prstGeom prst="rect">
+            <a:avLst/>
+          </a:prstGeom>
+          <a:solidFill>
+            <a:srgbClr val="E8601A"/>
           </a:solidFill>
           <a:ln>
             <a:noFill/>
@@ -9761,14 +10145,14 @@
       </p:sp>
       <p:sp>
         <p:nvSpPr>
-          <p:cNvPr id="32" name="TextBox 31"/>
+          <p:cNvPr id="29" name="TextBox 28"/>
           <p:cNvSpPr txBox="1"/>
           <p:nvPr/>
         </p:nvSpPr>
         <p:spPr>
           <a:xfrm>
-            <a:off x="6217920" y="1463040"/>
-            <a:ext cx="5212080" cy="365760"/>
+            <a:off x="475488" y="4956048"/>
+            <a:ext cx="987552" cy="402336"/>
           </a:xfrm>
           <a:prstGeom prst="rect">
             <a:avLst/>
@@ -9781,11 +10165,199 @@
           </a:bodyPr>
           <a:lstStyle/>
           <a:p>
+            <a:pPr algn="ctr"/>
+            <a:r>
+              <a:rPr sz="1100" b="1" i="0">
+                <a:solidFill>
+                  <a:srgbClr val="FFFFFF"/>
+                </a:solidFill>
+              </a:rPr>
+              <a:t>Layer 4</a:t>
+            </a:r>
+          </a:p>
+        </p:txBody>
+      </p:sp>
+      <p:sp>
+        <p:nvSpPr>
+          <p:cNvPr id="30" name="TextBox 29"/>
+          <p:cNvSpPr txBox="1"/>
+          <p:nvPr/>
+        </p:nvSpPr>
+        <p:spPr>
+          <a:xfrm>
+            <a:off x="475488" y="5394960"/>
+            <a:ext cx="987552" cy="402336"/>
+          </a:xfrm>
+          <a:prstGeom prst="rect">
+            <a:avLst/>
+          </a:prstGeom>
+          <a:noFill/>
+        </p:spPr>
+        <p:txBody>
+          <a:bodyPr wrap="square">
+            <a:spAutoFit/>
+          </a:bodyPr>
+          <a:lstStyle/>
+          <a:p>
+            <a:pPr algn="ctr"/>
+            <a:r>
+              <a:rPr sz="1000" b="1" i="0">
+                <a:solidFill>
+                  <a:srgbClr val="FFFFFF"/>
+                </a:solidFill>
+              </a:rPr>
+              <a:t>Frontend UI</a:t>
+            </a:r>
+          </a:p>
+        </p:txBody>
+      </p:sp>
+      <p:sp>
+        <p:nvSpPr>
+          <p:cNvPr id="31" name="TextBox 30"/>
+          <p:cNvSpPr txBox="1"/>
+          <p:nvPr/>
+        </p:nvSpPr>
+        <p:spPr>
+          <a:xfrm>
+            <a:off x="1591056" y="5010912"/>
+            <a:ext cx="4023360" cy="804672"/>
+          </a:xfrm>
+          <a:prstGeom prst="rect">
+            <a:avLst/>
+          </a:prstGeom>
+          <a:noFill/>
+        </p:spPr>
+        <p:txBody>
+          <a:bodyPr wrap="square">
+            <a:spAutoFit/>
+          </a:bodyPr>
+          <a:lstStyle/>
+          <a:p>
             <a:pPr algn="l"/>
             <a:r>
+              <a:rPr sz="1200" b="0" i="0">
+                <a:solidFill>
+                  <a:srgbClr val="2A1800"/>
+                </a:solidFill>
+              </a:rPr>
+              <a:t>React + Vite renders dashboards with charts, alert panels, and PCAP Forensics upload page.</a:t>
+            </a:r>
+          </a:p>
+        </p:txBody>
+      </p:sp>
+      <p:sp>
+        <p:nvSpPr>
+          <p:cNvPr id="32" name="Rectangle 31"/>
+          <p:cNvSpPr/>
+          <p:nvPr/>
+        </p:nvSpPr>
+        <p:spPr>
+          <a:xfrm>
+            <a:off x="6144768" y="1389888"/>
+            <a:ext cx="5486400" cy="4709160"/>
+          </a:xfrm>
+          <a:prstGeom prst="rect">
+            <a:avLst/>
+          </a:prstGeom>
+          <a:solidFill>
+            <a:srgbClr val="B84000"/>
+          </a:solidFill>
+          <a:ln>
+            <a:noFill/>
+          </a:ln>
+        </p:spPr>
+        <p:style>
+          <a:lnRef idx="1">
+            <a:schemeClr val="accent1"/>
+          </a:lnRef>
+          <a:fillRef idx="3">
+            <a:schemeClr val="accent1"/>
+          </a:fillRef>
+          <a:effectRef idx="2">
+            <a:schemeClr val="accent1"/>
+          </a:effectRef>
+          <a:fontRef idx="minor">
+            <a:schemeClr val="lt1"/>
+          </a:fontRef>
+        </p:style>
+        <p:txBody>
+          <a:bodyPr rtlCol="0" anchor="ctr"/>
+          <a:lstStyle/>
+          <a:p>
+            <a:pPr algn="ctr"/>
+          </a:p>
+        </p:txBody>
+      </p:sp>
+      <p:sp>
+        <p:nvSpPr>
+          <p:cNvPr id="33" name="Rectangle 32"/>
+          <p:cNvSpPr/>
+          <p:nvPr/>
+        </p:nvSpPr>
+        <p:spPr>
+          <a:xfrm>
+            <a:off x="6144768" y="1389888"/>
+            <a:ext cx="5486400" cy="475488"/>
+          </a:xfrm>
+          <a:prstGeom prst="rect">
+            <a:avLst/>
+          </a:prstGeom>
+          <a:solidFill>
+            <a:srgbClr val="F4A800"/>
+          </a:solidFill>
+          <a:ln>
+            <a:noFill/>
+          </a:ln>
+        </p:spPr>
+        <p:style>
+          <a:lnRef idx="1">
+            <a:schemeClr val="accent1"/>
+          </a:lnRef>
+          <a:fillRef idx="3">
+            <a:schemeClr val="accent1"/>
+          </a:fillRef>
+          <a:effectRef idx="2">
+            <a:schemeClr val="accent1"/>
+          </a:effectRef>
+          <a:fontRef idx="minor">
+            <a:schemeClr val="lt1"/>
+          </a:fontRef>
+        </p:style>
+        <p:txBody>
+          <a:bodyPr rtlCol="0" anchor="ctr"/>
+          <a:lstStyle/>
+          <a:p>
+            <a:pPr algn="ctr"/>
+          </a:p>
+        </p:txBody>
+      </p:sp>
+      <p:sp>
+        <p:nvSpPr>
+          <p:cNvPr id="34" name="TextBox 33"/>
+          <p:cNvSpPr txBox="1"/>
+          <p:nvPr/>
+        </p:nvSpPr>
+        <p:spPr>
+          <a:xfrm>
+            <a:off x="6254496" y="1435608"/>
+            <a:ext cx="5257800" cy="365760"/>
+          </a:xfrm>
+          <a:prstGeom prst="rect">
+            <a:avLst/>
+          </a:prstGeom>
+          <a:noFill/>
+        </p:spPr>
+        <p:txBody>
+          <a:bodyPr wrap="square">
+            <a:spAutoFit/>
+          </a:bodyPr>
+          <a:lstStyle/>
+          <a:p>
+            <a:pPr algn="l"/>
+            <a:r>
               <a:rPr sz="1400" b="1" i="0">
                 <a:solidFill>
-                  <a:srgbClr val="FFFFFF"/>
+                  <a:srgbClr val="2A1800"/>
                 </a:solidFill>
               </a:rPr>
               <a:t>Data Flow Summary</a:t>
@@ -9795,14 +10367,14 @@
       </p:sp>
       <p:sp>
         <p:nvSpPr>
-          <p:cNvPr id="33" name="TextBox 32"/>
+          <p:cNvPr id="35" name="TextBox 34"/>
           <p:cNvSpPr txBox="1"/>
           <p:nvPr/>
         </p:nvSpPr>
         <p:spPr>
           <a:xfrm>
-            <a:off x="6263640" y="2011680"/>
-            <a:ext cx="5029200" cy="3840480"/>
+            <a:off x="6254496" y="1993392"/>
+            <a:ext cx="5257800" cy="3840480"/>
           </a:xfrm>
           <a:prstGeom prst="rect">
             <a:avLst/>
@@ -9856,7 +10428,7 @@
     <p:bg>
       <p:bgPr>
         <a:solidFill>
-          <a:srgbClr val="FFFFFF"/>
+          <a:srgbClr val="FFF8F0"/>
         </a:solidFill>
         <a:effectLst/>
       </p:bgPr>
@@ -9884,13 +10456,13 @@
         <p:spPr>
           <a:xfrm>
             <a:off x="0" y="0"/>
-            <a:ext cx="12188952" cy="1280160"/>
-          </a:xfrm>
-          <a:prstGeom prst="rect">
-            <a:avLst/>
-          </a:prstGeom>
-          <a:solidFill>
-            <a:srgbClr val="1F3564"/>
+            <a:ext cx="12188952" cy="1261872"/>
+          </a:xfrm>
+          <a:prstGeom prst="rect">
+            <a:avLst/>
+          </a:prstGeom>
+          <a:solidFill>
+            <a:srgbClr val="B84000"/>
           </a:solidFill>
           <a:ln>
             <a:noFill/>
@@ -9927,13 +10499,13 @@
         <p:spPr>
           <a:xfrm>
             <a:off x="0" y="0"/>
-            <a:ext cx="109728" cy="1280160"/>
-          </a:xfrm>
-          <a:prstGeom prst="rect">
-            <a:avLst/>
-          </a:prstGeom>
-          <a:solidFill>
-            <a:srgbClr val="C00000"/>
+            <a:ext cx="164592" cy="1261872"/>
+          </a:xfrm>
+          <a:prstGeom prst="rect">
+            <a:avLst/>
+          </a:prstGeom>
+          <a:solidFill>
+            <a:srgbClr val="F4A800"/>
           </a:solidFill>
           <a:ln>
             <a:noFill/>
@@ -9963,82 +10535,14 @@
       </p:sp>
       <p:sp>
         <p:nvSpPr>
-          <p:cNvPr id="4" name="TextBox 3"/>
-          <p:cNvSpPr txBox="1"/>
-          <p:nvPr/>
-        </p:nvSpPr>
-        <p:spPr>
-          <a:xfrm>
-            <a:off x="274320" y="182880"/>
-            <a:ext cx="11430000" cy="914400"/>
-          </a:xfrm>
-          <a:prstGeom prst="rect">
-            <a:avLst/>
-          </a:prstGeom>
-          <a:noFill/>
-        </p:spPr>
-        <p:txBody>
-          <a:bodyPr wrap="square">
-            <a:spAutoFit/>
-          </a:bodyPr>
-          <a:lstStyle/>
-          <a:p>
-            <a:pPr algn="l"/>
-            <a:r>
-              <a:rPr sz="3000" b="1" i="0">
-                <a:solidFill>
-                  <a:srgbClr val="FFFFFF"/>
-                </a:solidFill>
-              </a:rPr>
-              <a:t>Technical Details</a:t>
-            </a:r>
-          </a:p>
-        </p:txBody>
-      </p:sp>
-      <p:sp>
-        <p:nvSpPr>
-          <p:cNvPr id="5" name="TextBox 4"/>
-          <p:cNvSpPr txBox="1"/>
-          <p:nvPr/>
-        </p:nvSpPr>
-        <p:spPr>
-          <a:xfrm>
-            <a:off x="274320" y="749808"/>
-            <a:ext cx="11430000" cy="457200"/>
-          </a:xfrm>
-          <a:prstGeom prst="rect">
-            <a:avLst/>
-          </a:prstGeom>
-          <a:noFill/>
-        </p:spPr>
-        <p:txBody>
-          <a:bodyPr wrap="square">
-            <a:spAutoFit/>
-          </a:bodyPr>
-          <a:lstStyle/>
-          <a:p>
-            <a:pPr algn="l"/>
-            <a:r>
-              <a:rPr sz="1300" b="0" i="0">
-                <a:solidFill>
-                  <a:srgbClr val="00B0F0"/>
-                </a:solidFill>
-              </a:rPr>
-              <a:t>Hardware &amp; Software Requirements  |  Tech Stack</a:t>
-            </a:r>
-          </a:p>
-        </p:txBody>
-      </p:sp>
-      <p:sp>
-        <p:nvSpPr>
-          <p:cNvPr id="6" name="Rectangle 5"/>
+          <p:cNvPr id="4" name="Rectangle 3"/>
           <p:cNvSpPr/>
           <p:nvPr/>
         </p:nvSpPr>
         <p:spPr>
           <a:xfrm>
-            <a:off x="0" y="6748272"/>
-            <a:ext cx="12188952" cy="109728"/>
+            <a:off x="12115800" y="0"/>
+            <a:ext cx="73152" cy="1261872"/>
           </a:xfrm>
           <a:prstGeom prst="rect">
             <a:avLst/>
@@ -10074,20 +10578,88 @@
       </p:sp>
       <p:sp>
         <p:nvSpPr>
+          <p:cNvPr id="5" name="TextBox 4"/>
+          <p:cNvSpPr txBox="1"/>
+          <p:nvPr/>
+        </p:nvSpPr>
+        <p:spPr>
+          <a:xfrm>
+            <a:off x="320040" y="164592"/>
+            <a:ext cx="11430000" cy="685800"/>
+          </a:xfrm>
+          <a:prstGeom prst="rect">
+            <a:avLst/>
+          </a:prstGeom>
+          <a:noFill/>
+        </p:spPr>
+        <p:txBody>
+          <a:bodyPr wrap="square">
+            <a:spAutoFit/>
+          </a:bodyPr>
+          <a:lstStyle/>
+          <a:p>
+            <a:pPr algn="l"/>
+            <a:r>
+              <a:rPr sz="3000" b="1" i="0">
+                <a:solidFill>
+                  <a:srgbClr val="FFFFFF"/>
+                </a:solidFill>
+              </a:rPr>
+              <a:t>Technical Details</a:t>
+            </a:r>
+          </a:p>
+        </p:txBody>
+      </p:sp>
+      <p:sp>
+        <p:nvSpPr>
+          <p:cNvPr id="6" name="TextBox 5"/>
+          <p:cNvSpPr txBox="1"/>
+          <p:nvPr/>
+        </p:nvSpPr>
+        <p:spPr>
+          <a:xfrm>
+            <a:off x="320040" y="841248"/>
+            <a:ext cx="11430000" cy="347472"/>
+          </a:xfrm>
+          <a:prstGeom prst="rect">
+            <a:avLst/>
+          </a:prstGeom>
+          <a:noFill/>
+        </p:spPr>
+        <p:txBody>
+          <a:bodyPr wrap="square">
+            <a:spAutoFit/>
+          </a:bodyPr>
+          <a:lstStyle/>
+          <a:p>
+            <a:pPr algn="l"/>
+            <a:r>
+              <a:rPr sz="1200" b="0" i="0">
+                <a:solidFill>
+                  <a:srgbClr val="F4A800"/>
+                </a:solidFill>
+              </a:rPr>
+              <a:t>Hardware &amp; Software Requirements  |  Tech Stack</a:t>
+            </a:r>
+          </a:p>
+        </p:txBody>
+      </p:sp>
+      <p:sp>
+        <p:nvSpPr>
           <p:cNvPr id="7" name="Rectangle 6"/>
           <p:cNvSpPr/>
           <p:nvPr/>
         </p:nvSpPr>
         <p:spPr>
           <a:xfrm>
-            <a:off x="457200" y="1417320"/>
-            <a:ext cx="5120640" cy="5029200"/>
-          </a:xfrm>
-          <a:prstGeom prst="rect">
-            <a:avLst/>
-          </a:prstGeom>
-          <a:solidFill>
-            <a:srgbClr val="F2F2F2"/>
+            <a:off x="0" y="6729984"/>
+            <a:ext cx="12188952" cy="128016"/>
+          </a:xfrm>
+          <a:prstGeom prst="rect">
+            <a:avLst/>
+          </a:prstGeom>
+          <a:solidFill>
+            <a:srgbClr val="F4A800"/>
           </a:solidFill>
           <a:ln>
             <a:noFill/>
@@ -10123,14 +10695,14 @@
         </p:nvSpPr>
         <p:spPr>
           <a:xfrm>
-            <a:off x="457200" y="1417320"/>
-            <a:ext cx="5120640" cy="502920"/>
-          </a:xfrm>
-          <a:prstGeom prst="rect">
-            <a:avLst/>
-          </a:prstGeom>
-          <a:solidFill>
-            <a:srgbClr val="002060"/>
+            <a:off x="0" y="6729984"/>
+            <a:ext cx="320040" cy="128016"/>
+          </a:xfrm>
+          <a:prstGeom prst="rect">
+            <a:avLst/>
+          </a:prstGeom>
+          <a:solidFill>
+            <a:srgbClr val="C00000"/>
           </a:solidFill>
           <a:ln>
             <a:noFill/>
@@ -10160,224 +10732,20 @@
       </p:sp>
       <p:sp>
         <p:nvSpPr>
-          <p:cNvPr id="9" name="TextBox 8"/>
-          <p:cNvSpPr txBox="1"/>
-          <p:nvPr/>
-        </p:nvSpPr>
-        <p:spPr>
-          <a:xfrm>
-            <a:off x="548640" y="1463040"/>
-            <a:ext cx="4937760" cy="411480"/>
-          </a:xfrm>
-          <a:prstGeom prst="rect">
-            <a:avLst/>
-          </a:prstGeom>
-          <a:noFill/>
-        </p:spPr>
-        <p:txBody>
-          <a:bodyPr wrap="square">
-            <a:spAutoFit/>
-          </a:bodyPr>
-          <a:lstStyle/>
-          <a:p>
-            <a:pPr algn="l"/>
-            <a:r>
-              <a:rPr sz="1400" b="1" i="0">
-                <a:solidFill>
-                  <a:srgbClr val="FFFFFF"/>
-                </a:solidFill>
-              </a:rPr>
-              <a:t>⚙  Hardware Requirements</a:t>
-            </a:r>
-          </a:p>
-        </p:txBody>
-      </p:sp>
-      <p:sp>
-        <p:nvSpPr>
-          <p:cNvPr id="10" name="TextBox 9"/>
-          <p:cNvSpPr txBox="1"/>
-          <p:nvPr/>
-        </p:nvSpPr>
-        <p:spPr>
-          <a:xfrm>
-            <a:off x="594360" y="2057400"/>
-            <a:ext cx="4754880" cy="502920"/>
-          </a:xfrm>
-          <a:prstGeom prst="rect">
-            <a:avLst/>
-          </a:prstGeom>
-          <a:noFill/>
-        </p:spPr>
-        <p:txBody>
-          <a:bodyPr wrap="square">
-            <a:spAutoFit/>
-          </a:bodyPr>
-          <a:lstStyle/>
-          <a:p>
-            <a:pPr algn="l"/>
-            <a:r>
-              <a:rPr sz="1300" b="0" i="0">
-                <a:solidFill>
-                  <a:srgbClr val="222222"/>
-                </a:solidFill>
-              </a:rPr>
-              <a:t>• Standard PC / Laptop</a:t>
-            </a:r>
-          </a:p>
-        </p:txBody>
-      </p:sp>
-      <p:sp>
-        <p:nvSpPr>
-          <p:cNvPr id="11" name="TextBox 10"/>
-          <p:cNvSpPr txBox="1"/>
-          <p:nvPr/>
-        </p:nvSpPr>
-        <p:spPr>
-          <a:xfrm>
-            <a:off x="594360" y="2651760"/>
-            <a:ext cx="4754880" cy="502920"/>
-          </a:xfrm>
-          <a:prstGeom prst="rect">
-            <a:avLst/>
-          </a:prstGeom>
-          <a:noFill/>
-        </p:spPr>
-        <p:txBody>
-          <a:bodyPr wrap="square">
-            <a:spAutoFit/>
-          </a:bodyPr>
-          <a:lstStyle/>
-          <a:p>
-            <a:pPr algn="l"/>
-            <a:r>
-              <a:rPr sz="1300" b="0" i="0">
-                <a:solidFill>
-                  <a:srgbClr val="222222"/>
-                </a:solidFill>
-              </a:rPr>
-              <a:t>• Minimum 4 GB RAM (8 GB Recommended)</a:t>
-            </a:r>
-          </a:p>
-        </p:txBody>
-      </p:sp>
-      <p:sp>
-        <p:nvSpPr>
-          <p:cNvPr id="12" name="TextBox 11"/>
-          <p:cNvSpPr txBox="1"/>
-          <p:nvPr/>
-        </p:nvSpPr>
-        <p:spPr>
-          <a:xfrm>
-            <a:off x="594360" y="3246120"/>
-            <a:ext cx="4754880" cy="502920"/>
-          </a:xfrm>
-          <a:prstGeom prst="rect">
-            <a:avLst/>
-          </a:prstGeom>
-          <a:noFill/>
-        </p:spPr>
-        <p:txBody>
-          <a:bodyPr wrap="square">
-            <a:spAutoFit/>
-          </a:bodyPr>
-          <a:lstStyle/>
-          <a:p>
-            <a:pPr algn="l"/>
-            <a:r>
-              <a:rPr sz="1300" b="0" i="0">
-                <a:solidFill>
-                  <a:srgbClr val="222222"/>
-                </a:solidFill>
-              </a:rPr>
-              <a:t>• Multi-core Processor (Intel i3+ / AMD Ryzen 3+)</a:t>
-            </a:r>
-          </a:p>
-        </p:txBody>
-      </p:sp>
-      <p:sp>
-        <p:nvSpPr>
-          <p:cNvPr id="13" name="TextBox 12"/>
-          <p:cNvSpPr txBox="1"/>
-          <p:nvPr/>
-        </p:nvSpPr>
-        <p:spPr>
-          <a:xfrm>
-            <a:off x="594360" y="3840480"/>
-            <a:ext cx="4754880" cy="502920"/>
-          </a:xfrm>
-          <a:prstGeom prst="rect">
-            <a:avLst/>
-          </a:prstGeom>
-          <a:noFill/>
-        </p:spPr>
-        <p:txBody>
-          <a:bodyPr wrap="square">
-            <a:spAutoFit/>
-          </a:bodyPr>
-          <a:lstStyle/>
-          <a:p>
-            <a:pPr algn="l"/>
-            <a:r>
-              <a:rPr sz="1300" b="0" i="0">
-                <a:solidFill>
-                  <a:srgbClr val="222222"/>
-                </a:solidFill>
-              </a:rPr>
-              <a:t>• Network Interface Card (NIC) for live capture</a:t>
-            </a:r>
-          </a:p>
-        </p:txBody>
-      </p:sp>
-      <p:sp>
-        <p:nvSpPr>
-          <p:cNvPr id="14" name="TextBox 13"/>
-          <p:cNvSpPr txBox="1"/>
-          <p:nvPr/>
-        </p:nvSpPr>
-        <p:spPr>
-          <a:xfrm>
-            <a:off x="594360" y="4434840"/>
-            <a:ext cx="4754880" cy="502920"/>
-          </a:xfrm>
-          <a:prstGeom prst="rect">
-            <a:avLst/>
-          </a:prstGeom>
-          <a:noFill/>
-        </p:spPr>
-        <p:txBody>
-          <a:bodyPr wrap="square">
-            <a:spAutoFit/>
-          </a:bodyPr>
-          <a:lstStyle/>
-          <a:p>
-            <a:pPr algn="l"/>
-            <a:r>
-              <a:rPr sz="1300" b="0" i="0">
-                <a:solidFill>
-                  <a:srgbClr val="222222"/>
-                </a:solidFill>
-              </a:rPr>
-              <a:t>• 500 MB free disk space</a:t>
-            </a:r>
-          </a:p>
-        </p:txBody>
-      </p:sp>
-      <p:sp>
-        <p:nvSpPr>
-          <p:cNvPr id="15" name="Rectangle 14"/>
+          <p:cNvPr id="9" name="Rectangle 8"/>
           <p:cNvSpPr/>
           <p:nvPr/>
         </p:nvSpPr>
         <p:spPr>
           <a:xfrm>
-            <a:off x="6035040" y="1417320"/>
-            <a:ext cx="5669280" cy="5029200"/>
-          </a:xfrm>
-          <a:prstGeom prst="rect">
-            <a:avLst/>
-          </a:prstGeom>
-          <a:solidFill>
-            <a:srgbClr val="1F3564"/>
+            <a:off x="457200" y="1389888"/>
+            <a:ext cx="5230368" cy="5074920"/>
+          </a:xfrm>
+          <a:prstGeom prst="rect">
+            <a:avLst/>
+          </a:prstGeom>
+          <a:solidFill>
+            <a:srgbClr val="FDF0E0"/>
           </a:solidFill>
           <a:ln>
             <a:noFill/>
@@ -10407,20 +10775,20 @@
       </p:sp>
       <p:sp>
         <p:nvSpPr>
-          <p:cNvPr id="16" name="Rectangle 15"/>
+          <p:cNvPr id="10" name="Rectangle 9"/>
           <p:cNvSpPr/>
           <p:nvPr/>
         </p:nvSpPr>
         <p:spPr>
           <a:xfrm>
-            <a:off x="6035040" y="1417320"/>
-            <a:ext cx="5669280" cy="502920"/>
-          </a:xfrm>
-          <a:prstGeom prst="rect">
-            <a:avLst/>
-          </a:prstGeom>
-          <a:solidFill>
-            <a:srgbClr val="C00000"/>
+            <a:off x="457200" y="1389888"/>
+            <a:ext cx="5230368" cy="512064"/>
+          </a:xfrm>
+          <a:prstGeom prst="rect">
+            <a:avLst/>
+          </a:prstGeom>
+          <a:solidFill>
+            <a:srgbClr val="E8601A"/>
           </a:solidFill>
           <a:ln>
             <a:noFill/>
@@ -10450,14 +10818,14 @@
       </p:sp>
       <p:sp>
         <p:nvSpPr>
-          <p:cNvPr id="17" name="TextBox 16"/>
+          <p:cNvPr id="11" name="TextBox 10"/>
           <p:cNvSpPr txBox="1"/>
           <p:nvPr/>
         </p:nvSpPr>
         <p:spPr>
           <a:xfrm>
-            <a:off x="6126480" y="1463040"/>
-            <a:ext cx="5486400" cy="411480"/>
+            <a:off x="566928" y="1435608"/>
+            <a:ext cx="5029200" cy="402336"/>
           </a:xfrm>
           <a:prstGeom prst="rect">
             <a:avLst/>
@@ -10477,21 +10845,21 @@
                   <a:srgbClr val="FFFFFF"/>
                 </a:solidFill>
               </a:rPr>
-              <a:t>💻  Tech Stack</a:t>
-            </a:r>
-          </a:p>
-        </p:txBody>
-      </p:sp>
-      <p:sp>
-        <p:nvSpPr>
-          <p:cNvPr id="18" name="TextBox 17"/>
+              <a:t>⚙  Hardware Requirements</a:t>
+            </a:r>
+          </a:p>
+        </p:txBody>
+      </p:sp>
+      <p:sp>
+        <p:nvSpPr>
+          <p:cNvPr id="12" name="TextBox 11"/>
           <p:cNvSpPr txBox="1"/>
           <p:nvPr/>
         </p:nvSpPr>
         <p:spPr>
           <a:xfrm>
-            <a:off x="6126480" y="2029968"/>
-            <a:ext cx="1828800" cy="457200"/>
+            <a:off x="621792" y="2057400"/>
+            <a:ext cx="4846320" cy="530352"/>
           </a:xfrm>
           <a:prstGeom prst="rect">
             <a:avLst/>
@@ -10506,26 +10874,26 @@
           <a:p>
             <a:pPr algn="l"/>
             <a:r>
-              <a:rPr sz="1200" b="1" i="0">
-                <a:solidFill>
-                  <a:srgbClr val="00B0F0"/>
+              <a:rPr sz="1300" b="0" i="0">
+                <a:solidFill>
+                  <a:srgbClr val="2A1800"/>
                 </a:solidFill>
               </a:rPr>
-              <a:t>Language:</a:t>
-            </a:r>
-          </a:p>
-        </p:txBody>
-      </p:sp>
-      <p:sp>
-        <p:nvSpPr>
-          <p:cNvPr id="19" name="TextBox 18"/>
+              <a:t>• Standard PC / Laptop</a:t>
+            </a:r>
+          </a:p>
+        </p:txBody>
+      </p:sp>
+      <p:sp>
+        <p:nvSpPr>
+          <p:cNvPr id="13" name="TextBox 12"/>
           <p:cNvSpPr txBox="1"/>
           <p:nvPr/>
         </p:nvSpPr>
         <p:spPr>
           <a:xfrm>
-            <a:off x="8092440" y="2029968"/>
-            <a:ext cx="3474720" cy="457200"/>
+            <a:off x="621792" y="2670048"/>
+            <a:ext cx="4846320" cy="530352"/>
           </a:xfrm>
           <a:prstGeom prst="rect">
             <a:avLst/>
@@ -10540,26 +10908,26 @@
           <a:p>
             <a:pPr algn="l"/>
             <a:r>
-              <a:rPr sz="1200" b="0" i="0">
-                <a:solidFill>
-                  <a:srgbClr val="FFFFFF"/>
+              <a:rPr sz="1300" b="0" i="0">
+                <a:solidFill>
+                  <a:srgbClr val="2A1800"/>
                 </a:solidFill>
               </a:rPr>
-              <a:t>Python 3.x  |  JavaScript (ES2022)</a:t>
-            </a:r>
-          </a:p>
-        </p:txBody>
-      </p:sp>
-      <p:sp>
-        <p:nvSpPr>
-          <p:cNvPr id="20" name="TextBox 19"/>
+              <a:t>• Minimum 4 GB RAM (8 GB Recommended)</a:t>
+            </a:r>
+          </a:p>
+        </p:txBody>
+      </p:sp>
+      <p:sp>
+        <p:nvSpPr>
+          <p:cNvPr id="14" name="TextBox 13"/>
           <p:cNvSpPr txBox="1"/>
           <p:nvPr/>
         </p:nvSpPr>
         <p:spPr>
           <a:xfrm>
-            <a:off x="6126480" y="2596896"/>
-            <a:ext cx="1828800" cy="457200"/>
+            <a:off x="621792" y="3282696"/>
+            <a:ext cx="4846320" cy="530352"/>
           </a:xfrm>
           <a:prstGeom prst="rect">
             <a:avLst/>
@@ -10574,26 +10942,26 @@
           <a:p>
             <a:pPr algn="l"/>
             <a:r>
-              <a:rPr sz="1200" b="1" i="0">
-                <a:solidFill>
-                  <a:srgbClr val="00B0F0"/>
+              <a:rPr sz="1300" b="0" i="0">
+                <a:solidFill>
+                  <a:srgbClr val="2A1800"/>
                 </a:solidFill>
               </a:rPr>
-              <a:t>Capture:</a:t>
-            </a:r>
-          </a:p>
-        </p:txBody>
-      </p:sp>
-      <p:sp>
-        <p:nvSpPr>
-          <p:cNvPr id="21" name="TextBox 20"/>
+              <a:t>• Multi-core Processor (Intel i3+ / AMD Ryzen 3+)</a:t>
+            </a:r>
+          </a:p>
+        </p:txBody>
+      </p:sp>
+      <p:sp>
+        <p:nvSpPr>
+          <p:cNvPr id="15" name="TextBox 14"/>
           <p:cNvSpPr txBox="1"/>
           <p:nvPr/>
         </p:nvSpPr>
         <p:spPr>
           <a:xfrm>
-            <a:off x="8092440" y="2596896"/>
-            <a:ext cx="3474720" cy="457200"/>
+            <a:off x="621792" y="3895344"/>
+            <a:ext cx="4846320" cy="530352"/>
           </a:xfrm>
           <a:prstGeom prst="rect">
             <a:avLst/>
@@ -10608,26 +10976,26 @@
           <a:p>
             <a:pPr algn="l"/>
             <a:r>
-              <a:rPr sz="1200" b="0" i="0">
-                <a:solidFill>
-                  <a:srgbClr val="FFFFFF"/>
+              <a:rPr sz="1300" b="0" i="0">
+                <a:solidFill>
+                  <a:srgbClr val="2A1800"/>
                 </a:solidFill>
               </a:rPr>
-              <a:t>Scapy (Packet Sniffing &amp; PCAP Parsing)</a:t>
-            </a:r>
-          </a:p>
-        </p:txBody>
-      </p:sp>
-      <p:sp>
-        <p:nvSpPr>
-          <p:cNvPr id="22" name="TextBox 21"/>
+              <a:t>• Network Interface Card (NIC) for live capture</a:t>
+            </a:r>
+          </a:p>
+        </p:txBody>
+      </p:sp>
+      <p:sp>
+        <p:nvSpPr>
+          <p:cNvPr id="16" name="TextBox 15"/>
           <p:cNvSpPr txBox="1"/>
           <p:nvPr/>
         </p:nvSpPr>
         <p:spPr>
           <a:xfrm>
-            <a:off x="6126480" y="3163824"/>
-            <a:ext cx="1828800" cy="457200"/>
+            <a:off x="621792" y="4507992"/>
+            <a:ext cx="4846320" cy="530352"/>
           </a:xfrm>
           <a:prstGeom prst="rect">
             <a:avLst/>
@@ -10642,26 +11010,112 @@
           <a:p>
             <a:pPr algn="l"/>
             <a:r>
-              <a:rPr sz="1200" b="1" i="0">
-                <a:solidFill>
-                  <a:srgbClr val="00B0F0"/>
+              <a:rPr sz="1300" b="0" i="0">
+                <a:solidFill>
+                  <a:srgbClr val="2A1800"/>
                 </a:solidFill>
               </a:rPr>
-              <a:t>Backend:</a:t>
-            </a:r>
-          </a:p>
-        </p:txBody>
-      </p:sp>
-      <p:sp>
-        <p:nvSpPr>
-          <p:cNvPr id="23" name="TextBox 22"/>
+              <a:t>• 500 MB free disk space</a:t>
+            </a:r>
+          </a:p>
+        </p:txBody>
+      </p:sp>
+      <p:sp>
+        <p:nvSpPr>
+          <p:cNvPr id="17" name="Rectangle 16"/>
+          <p:cNvSpPr/>
+          <p:nvPr/>
+        </p:nvSpPr>
+        <p:spPr>
+          <a:xfrm>
+            <a:off x="6053328" y="1389888"/>
+            <a:ext cx="5715000" cy="5074920"/>
+          </a:xfrm>
+          <a:prstGeom prst="rect">
+            <a:avLst/>
+          </a:prstGeom>
+          <a:solidFill>
+            <a:srgbClr val="B84000"/>
+          </a:solidFill>
+          <a:ln>
+            <a:noFill/>
+          </a:ln>
+        </p:spPr>
+        <p:style>
+          <a:lnRef idx="1">
+            <a:schemeClr val="accent1"/>
+          </a:lnRef>
+          <a:fillRef idx="3">
+            <a:schemeClr val="accent1"/>
+          </a:fillRef>
+          <a:effectRef idx="2">
+            <a:schemeClr val="accent1"/>
+          </a:effectRef>
+          <a:fontRef idx="minor">
+            <a:schemeClr val="lt1"/>
+          </a:fontRef>
+        </p:style>
+        <p:txBody>
+          <a:bodyPr rtlCol="0" anchor="ctr"/>
+          <a:lstStyle/>
+          <a:p>
+            <a:pPr algn="ctr"/>
+          </a:p>
+        </p:txBody>
+      </p:sp>
+      <p:sp>
+        <p:nvSpPr>
+          <p:cNvPr id="18" name="Rectangle 17"/>
+          <p:cNvSpPr/>
+          <p:nvPr/>
+        </p:nvSpPr>
+        <p:spPr>
+          <a:xfrm>
+            <a:off x="6053328" y="1389888"/>
+            <a:ext cx="5715000" cy="512064"/>
+          </a:xfrm>
+          <a:prstGeom prst="rect">
+            <a:avLst/>
+          </a:prstGeom>
+          <a:solidFill>
+            <a:srgbClr val="F4A800"/>
+          </a:solidFill>
+          <a:ln>
+            <a:noFill/>
+          </a:ln>
+        </p:spPr>
+        <p:style>
+          <a:lnRef idx="1">
+            <a:schemeClr val="accent1"/>
+          </a:lnRef>
+          <a:fillRef idx="3">
+            <a:schemeClr val="accent1"/>
+          </a:fillRef>
+          <a:effectRef idx="2">
+            <a:schemeClr val="accent1"/>
+          </a:effectRef>
+          <a:fontRef idx="minor">
+            <a:schemeClr val="lt1"/>
+          </a:fontRef>
+        </p:style>
+        <p:txBody>
+          <a:bodyPr rtlCol="0" anchor="ctr"/>
+          <a:lstStyle/>
+          <a:p>
+            <a:pPr algn="ctr"/>
+          </a:p>
+        </p:txBody>
+      </p:sp>
+      <p:sp>
+        <p:nvSpPr>
+          <p:cNvPr id="19" name="TextBox 18"/>
           <p:cNvSpPr txBox="1"/>
           <p:nvPr/>
         </p:nvSpPr>
         <p:spPr>
           <a:xfrm>
-            <a:off x="8092440" y="3163824"/>
-            <a:ext cx="3474720" cy="457200"/>
+            <a:off x="6163056" y="1435608"/>
+            <a:ext cx="5486400" cy="402336"/>
           </a:xfrm>
           <a:prstGeom prst="rect">
             <a:avLst/>
@@ -10676,26 +11130,26 @@
           <a:p>
             <a:pPr algn="l"/>
             <a:r>
-              <a:rPr sz="1200" b="0" i="0">
-                <a:solidFill>
-                  <a:srgbClr val="FFFFFF"/>
+              <a:rPr sz="1400" b="1" i="0">
+                <a:solidFill>
+                  <a:srgbClr val="2A1800"/>
                 </a:solidFill>
               </a:rPr>
-              <a:t>FastAPI + Uvicorn (REST API, WebSocket)</a:t>
-            </a:r>
-          </a:p>
-        </p:txBody>
-      </p:sp>
-      <p:sp>
-        <p:nvSpPr>
-          <p:cNvPr id="24" name="TextBox 23"/>
+              <a:t>💻  Tech Stack</a:t>
+            </a:r>
+          </a:p>
+        </p:txBody>
+      </p:sp>
+      <p:sp>
+        <p:nvSpPr>
+          <p:cNvPr id="20" name="TextBox 19"/>
           <p:cNvSpPr txBox="1"/>
           <p:nvPr/>
         </p:nvSpPr>
         <p:spPr>
           <a:xfrm>
-            <a:off x="6126480" y="3730752"/>
-            <a:ext cx="1828800" cy="457200"/>
+            <a:off x="6163056" y="2048256"/>
+            <a:ext cx="1920240" cy="457200"/>
           </a:xfrm>
           <a:prstGeom prst="rect">
             <a:avLst/>
@@ -10712,24 +11166,24 @@
             <a:r>
               <a:rPr sz="1200" b="1" i="0">
                 <a:solidFill>
-                  <a:srgbClr val="00B0F0"/>
+                  <a:srgbClr val="F4A800"/>
                 </a:solidFill>
               </a:rPr>
-              <a:t>Frontend:</a:t>
-            </a:r>
-          </a:p>
-        </p:txBody>
-      </p:sp>
-      <p:sp>
-        <p:nvSpPr>
-          <p:cNvPr id="25" name="TextBox 24"/>
+              <a:t>Language:</a:t>
+            </a:r>
+          </a:p>
+        </p:txBody>
+      </p:sp>
+      <p:sp>
+        <p:nvSpPr>
+          <p:cNvPr id="21" name="TextBox 20"/>
           <p:cNvSpPr txBox="1"/>
           <p:nvPr/>
         </p:nvSpPr>
         <p:spPr>
           <a:xfrm>
-            <a:off x="8092440" y="3730752"/>
-            <a:ext cx="3474720" cy="457200"/>
+            <a:off x="8211312" y="2048256"/>
+            <a:ext cx="3401568" cy="457200"/>
           </a:xfrm>
           <a:prstGeom prst="rect">
             <a:avLst/>
@@ -10749,21 +11203,21 @@
                   <a:srgbClr val="FFFFFF"/>
                 </a:solidFill>
               </a:rPr>
-              <a:t>React JS + Vite + TailwindCSS + DaisyUI</a:t>
-            </a:r>
-          </a:p>
-        </p:txBody>
-      </p:sp>
-      <p:sp>
-        <p:nvSpPr>
-          <p:cNvPr id="26" name="TextBox 25"/>
+              <a:t>Python 3.x  |  JavaScript (ES2022)</a:t>
+            </a:r>
+          </a:p>
+        </p:txBody>
+      </p:sp>
+      <p:sp>
+        <p:nvSpPr>
+          <p:cNvPr id="22" name="TextBox 21"/>
           <p:cNvSpPr txBox="1"/>
           <p:nvPr/>
         </p:nvSpPr>
         <p:spPr>
           <a:xfrm>
-            <a:off x="6126480" y="4297680"/>
-            <a:ext cx="1828800" cy="457200"/>
+            <a:off x="6163056" y="2633472"/>
+            <a:ext cx="1920240" cy="457200"/>
           </a:xfrm>
           <a:prstGeom prst="rect">
             <a:avLst/>
@@ -10780,24 +11234,24 @@
             <a:r>
               <a:rPr sz="1200" b="1" i="0">
                 <a:solidFill>
-                  <a:srgbClr val="00B0F0"/>
+                  <a:srgbClr val="F4A800"/>
                 </a:solidFill>
               </a:rPr>
-              <a:t>Charts:</a:t>
-            </a:r>
-          </a:p>
-        </p:txBody>
-      </p:sp>
-      <p:sp>
-        <p:nvSpPr>
-          <p:cNvPr id="27" name="TextBox 26"/>
+              <a:t>Capture:</a:t>
+            </a:r>
+          </a:p>
+        </p:txBody>
+      </p:sp>
+      <p:sp>
+        <p:nvSpPr>
+          <p:cNvPr id="23" name="TextBox 22"/>
           <p:cNvSpPr txBox="1"/>
           <p:nvPr/>
         </p:nvSpPr>
         <p:spPr>
           <a:xfrm>
-            <a:off x="8092440" y="4297680"/>
-            <a:ext cx="3474720" cy="457200"/>
+            <a:off x="8211312" y="2633472"/>
+            <a:ext cx="3401568" cy="457200"/>
           </a:xfrm>
           <a:prstGeom prst="rect">
             <a:avLst/>
@@ -10817,21 +11271,21 @@
                   <a:srgbClr val="FFFFFF"/>
                 </a:solidFill>
               </a:rPr>
-              <a:t>Recharts (Interactive Data Visualizations)</a:t>
-            </a:r>
-          </a:p>
-        </p:txBody>
-      </p:sp>
-      <p:sp>
-        <p:nvSpPr>
-          <p:cNvPr id="28" name="TextBox 27"/>
+              <a:t>Scapy (Packet Sniffing &amp; PCAP Parsing)</a:t>
+            </a:r>
+          </a:p>
+        </p:txBody>
+      </p:sp>
+      <p:sp>
+        <p:nvSpPr>
+          <p:cNvPr id="24" name="TextBox 23"/>
           <p:cNvSpPr txBox="1"/>
           <p:nvPr/>
         </p:nvSpPr>
         <p:spPr>
           <a:xfrm>
-            <a:off x="6126480" y="4864608"/>
-            <a:ext cx="1828800" cy="457200"/>
+            <a:off x="6163056" y="3218688"/>
+            <a:ext cx="1920240" cy="457200"/>
           </a:xfrm>
           <a:prstGeom prst="rect">
             <a:avLst/>
@@ -10848,24 +11302,24 @@
             <a:r>
               <a:rPr sz="1200" b="1" i="0">
                 <a:solidFill>
-                  <a:srgbClr val="00B0F0"/>
+                  <a:srgbClr val="F4A800"/>
                 </a:solidFill>
               </a:rPr>
-              <a:t>Database:</a:t>
-            </a:r>
-          </a:p>
-        </p:txBody>
-      </p:sp>
-      <p:sp>
-        <p:nvSpPr>
-          <p:cNvPr id="29" name="TextBox 28"/>
+              <a:t>Backend:</a:t>
+            </a:r>
+          </a:p>
+        </p:txBody>
+      </p:sp>
+      <p:sp>
+        <p:nvSpPr>
+          <p:cNvPr id="25" name="TextBox 24"/>
           <p:cNvSpPr txBox="1"/>
           <p:nvPr/>
         </p:nvSpPr>
         <p:spPr>
           <a:xfrm>
-            <a:off x="8092440" y="4864608"/>
-            <a:ext cx="3474720" cy="457200"/>
+            <a:off x="8211312" y="3218688"/>
+            <a:ext cx="3401568" cy="457200"/>
           </a:xfrm>
           <a:prstGeom prst="rect">
             <a:avLst/>
@@ -10885,21 +11339,21 @@
                   <a:srgbClr val="FFFFFF"/>
                 </a:solidFill>
               </a:rPr>
-              <a:t>SQLite (via SQLAlchemy ORM)</a:t>
-            </a:r>
-          </a:p>
-        </p:txBody>
-      </p:sp>
-      <p:sp>
-        <p:nvSpPr>
-          <p:cNvPr id="30" name="TextBox 29"/>
+              <a:t>FastAPI + Uvicorn (REST API, WebSocket)</a:t>
+            </a:r>
+          </a:p>
+        </p:txBody>
+      </p:sp>
+      <p:sp>
+        <p:nvSpPr>
+          <p:cNvPr id="26" name="TextBox 25"/>
           <p:cNvSpPr txBox="1"/>
           <p:nvPr/>
         </p:nvSpPr>
         <p:spPr>
           <a:xfrm>
-            <a:off x="6126480" y="5431536"/>
-            <a:ext cx="1828800" cy="457200"/>
+            <a:off x="6163056" y="3803904"/>
+            <a:ext cx="1920240" cy="457200"/>
           </a:xfrm>
           <a:prstGeom prst="rect">
             <a:avLst/>
@@ -10916,7 +11370,211 @@
             <a:r>
               <a:rPr sz="1200" b="1" i="0">
                 <a:solidFill>
-                  <a:srgbClr val="00B0F0"/>
+                  <a:srgbClr val="F4A800"/>
+                </a:solidFill>
+              </a:rPr>
+              <a:t>Frontend:</a:t>
+            </a:r>
+          </a:p>
+        </p:txBody>
+      </p:sp>
+      <p:sp>
+        <p:nvSpPr>
+          <p:cNvPr id="27" name="TextBox 26"/>
+          <p:cNvSpPr txBox="1"/>
+          <p:nvPr/>
+        </p:nvSpPr>
+        <p:spPr>
+          <a:xfrm>
+            <a:off x="8211312" y="3803904"/>
+            <a:ext cx="3401568" cy="457200"/>
+          </a:xfrm>
+          <a:prstGeom prst="rect">
+            <a:avLst/>
+          </a:prstGeom>
+          <a:noFill/>
+        </p:spPr>
+        <p:txBody>
+          <a:bodyPr wrap="square">
+            <a:spAutoFit/>
+          </a:bodyPr>
+          <a:lstStyle/>
+          <a:p>
+            <a:pPr algn="l"/>
+            <a:r>
+              <a:rPr sz="1200" b="0" i="0">
+                <a:solidFill>
+                  <a:srgbClr val="FFFFFF"/>
+                </a:solidFill>
+              </a:rPr>
+              <a:t>React JS + Vite + TailwindCSS + DaisyUI</a:t>
+            </a:r>
+          </a:p>
+        </p:txBody>
+      </p:sp>
+      <p:sp>
+        <p:nvSpPr>
+          <p:cNvPr id="28" name="TextBox 27"/>
+          <p:cNvSpPr txBox="1"/>
+          <p:nvPr/>
+        </p:nvSpPr>
+        <p:spPr>
+          <a:xfrm>
+            <a:off x="6163056" y="4389120"/>
+            <a:ext cx="1920240" cy="457200"/>
+          </a:xfrm>
+          <a:prstGeom prst="rect">
+            <a:avLst/>
+          </a:prstGeom>
+          <a:noFill/>
+        </p:spPr>
+        <p:txBody>
+          <a:bodyPr wrap="square">
+            <a:spAutoFit/>
+          </a:bodyPr>
+          <a:lstStyle/>
+          <a:p>
+            <a:pPr algn="l"/>
+            <a:r>
+              <a:rPr sz="1200" b="1" i="0">
+                <a:solidFill>
+                  <a:srgbClr val="F4A800"/>
+                </a:solidFill>
+              </a:rPr>
+              <a:t>Charts:</a:t>
+            </a:r>
+          </a:p>
+        </p:txBody>
+      </p:sp>
+      <p:sp>
+        <p:nvSpPr>
+          <p:cNvPr id="29" name="TextBox 28"/>
+          <p:cNvSpPr txBox="1"/>
+          <p:nvPr/>
+        </p:nvSpPr>
+        <p:spPr>
+          <a:xfrm>
+            <a:off x="8211312" y="4389120"/>
+            <a:ext cx="3401568" cy="457200"/>
+          </a:xfrm>
+          <a:prstGeom prst="rect">
+            <a:avLst/>
+          </a:prstGeom>
+          <a:noFill/>
+        </p:spPr>
+        <p:txBody>
+          <a:bodyPr wrap="square">
+            <a:spAutoFit/>
+          </a:bodyPr>
+          <a:lstStyle/>
+          <a:p>
+            <a:pPr algn="l"/>
+            <a:r>
+              <a:rPr sz="1200" b="0" i="0">
+                <a:solidFill>
+                  <a:srgbClr val="FFFFFF"/>
+                </a:solidFill>
+              </a:rPr>
+              <a:t>Recharts (Interactive Data Visualizations)</a:t>
+            </a:r>
+          </a:p>
+        </p:txBody>
+      </p:sp>
+      <p:sp>
+        <p:nvSpPr>
+          <p:cNvPr id="30" name="TextBox 29"/>
+          <p:cNvSpPr txBox="1"/>
+          <p:nvPr/>
+        </p:nvSpPr>
+        <p:spPr>
+          <a:xfrm>
+            <a:off x="6163056" y="4974336"/>
+            <a:ext cx="1920240" cy="457200"/>
+          </a:xfrm>
+          <a:prstGeom prst="rect">
+            <a:avLst/>
+          </a:prstGeom>
+          <a:noFill/>
+        </p:spPr>
+        <p:txBody>
+          <a:bodyPr wrap="square">
+            <a:spAutoFit/>
+          </a:bodyPr>
+          <a:lstStyle/>
+          <a:p>
+            <a:pPr algn="l"/>
+            <a:r>
+              <a:rPr sz="1200" b="1" i="0">
+                <a:solidFill>
+                  <a:srgbClr val="F4A800"/>
+                </a:solidFill>
+              </a:rPr>
+              <a:t>Database:</a:t>
+            </a:r>
+          </a:p>
+        </p:txBody>
+      </p:sp>
+      <p:sp>
+        <p:nvSpPr>
+          <p:cNvPr id="31" name="TextBox 30"/>
+          <p:cNvSpPr txBox="1"/>
+          <p:nvPr/>
+        </p:nvSpPr>
+        <p:spPr>
+          <a:xfrm>
+            <a:off x="8211312" y="4974336"/>
+            <a:ext cx="3401568" cy="457200"/>
+          </a:xfrm>
+          <a:prstGeom prst="rect">
+            <a:avLst/>
+          </a:prstGeom>
+          <a:noFill/>
+        </p:spPr>
+        <p:txBody>
+          <a:bodyPr wrap="square">
+            <a:spAutoFit/>
+          </a:bodyPr>
+          <a:lstStyle/>
+          <a:p>
+            <a:pPr algn="l"/>
+            <a:r>
+              <a:rPr sz="1200" b="0" i="0">
+                <a:solidFill>
+                  <a:srgbClr val="FFFFFF"/>
+                </a:solidFill>
+              </a:rPr>
+              <a:t>SQLite (via SQLAlchemy ORM)</a:t>
+            </a:r>
+          </a:p>
+        </p:txBody>
+      </p:sp>
+      <p:sp>
+        <p:nvSpPr>
+          <p:cNvPr id="32" name="TextBox 31"/>
+          <p:cNvSpPr txBox="1"/>
+          <p:nvPr/>
+        </p:nvSpPr>
+        <p:spPr>
+          <a:xfrm>
+            <a:off x="6163056" y="5559552"/>
+            <a:ext cx="1920240" cy="457200"/>
+          </a:xfrm>
+          <a:prstGeom prst="rect">
+            <a:avLst/>
+          </a:prstGeom>
+          <a:noFill/>
+        </p:spPr>
+        <p:txBody>
+          <a:bodyPr wrap="square">
+            <a:spAutoFit/>
+          </a:bodyPr>
+          <a:lstStyle/>
+          <a:p>
+            <a:pPr algn="l"/>
+            <a:r>
+              <a:rPr sz="1200" b="1" i="0">
+                <a:solidFill>
+                  <a:srgbClr val="F4A800"/>
                 </a:solidFill>
               </a:rPr>
               <a:t>OS Support:</a:t>
@@ -10926,14 +11584,14 @@
       </p:sp>
       <p:sp>
         <p:nvSpPr>
-          <p:cNvPr id="31" name="TextBox 30"/>
+          <p:cNvPr id="33" name="TextBox 32"/>
           <p:cNvSpPr txBox="1"/>
           <p:nvPr/>
         </p:nvSpPr>
         <p:spPr>
           <a:xfrm>
-            <a:off x="8092440" y="5431536"/>
-            <a:ext cx="3474720" cy="457200"/>
+            <a:off x="8211312" y="5559552"/>
+            <a:ext cx="3401568" cy="457200"/>
           </a:xfrm>
           <a:prstGeom prst="rect">
             <a:avLst/>
@@ -10977,7 +11635,7 @@
     <p:bg>
       <p:bgPr>
         <a:solidFill>
-          <a:srgbClr val="F2F2F2"/>
+          <a:srgbClr val="FFF8F0"/>
         </a:solidFill>
         <a:effectLst/>
       </p:bgPr>
@@ -11005,13 +11663,13 @@
         <p:spPr>
           <a:xfrm>
             <a:off x="0" y="0"/>
-            <a:ext cx="12188952" cy="1280160"/>
-          </a:xfrm>
-          <a:prstGeom prst="rect">
-            <a:avLst/>
-          </a:prstGeom>
-          <a:solidFill>
-            <a:srgbClr val="1F3564"/>
+            <a:ext cx="12188952" cy="1261872"/>
+          </a:xfrm>
+          <a:prstGeom prst="rect">
+            <a:avLst/>
+          </a:prstGeom>
+          <a:solidFill>
+            <a:srgbClr val="B84000"/>
           </a:solidFill>
           <a:ln>
             <a:noFill/>
@@ -11048,13 +11706,13 @@
         <p:spPr>
           <a:xfrm>
             <a:off x="0" y="0"/>
-            <a:ext cx="109728" cy="1280160"/>
-          </a:xfrm>
-          <a:prstGeom prst="rect">
-            <a:avLst/>
-          </a:prstGeom>
-          <a:solidFill>
-            <a:srgbClr val="C00000"/>
+            <a:ext cx="164592" cy="1261872"/>
+          </a:xfrm>
+          <a:prstGeom prst="rect">
+            <a:avLst/>
+          </a:prstGeom>
+          <a:solidFill>
+            <a:srgbClr val="F4A800"/>
           </a:solidFill>
           <a:ln>
             <a:noFill/>
@@ -11084,82 +11742,14 @@
       </p:sp>
       <p:sp>
         <p:nvSpPr>
-          <p:cNvPr id="4" name="TextBox 3"/>
-          <p:cNvSpPr txBox="1"/>
-          <p:nvPr/>
-        </p:nvSpPr>
-        <p:spPr>
-          <a:xfrm>
-            <a:off x="274320" y="182880"/>
-            <a:ext cx="11430000" cy="914400"/>
-          </a:xfrm>
-          <a:prstGeom prst="rect">
-            <a:avLst/>
-          </a:prstGeom>
-          <a:noFill/>
-        </p:spPr>
-        <p:txBody>
-          <a:bodyPr wrap="square">
-            <a:spAutoFit/>
-          </a:bodyPr>
-          <a:lstStyle/>
-          <a:p>
-            <a:pPr algn="l"/>
-            <a:r>
-              <a:rPr sz="3000" b="1" i="0">
-                <a:solidFill>
-                  <a:srgbClr val="FFFFFF"/>
-                </a:solidFill>
-              </a:rPr>
-              <a:t>Expected Outcome</a:t>
-            </a:r>
-          </a:p>
-        </p:txBody>
-      </p:sp>
-      <p:sp>
-        <p:nvSpPr>
-          <p:cNvPr id="5" name="TextBox 4"/>
-          <p:cNvSpPr txBox="1"/>
-          <p:nvPr/>
-        </p:nvSpPr>
-        <p:spPr>
-          <a:xfrm>
-            <a:off x="274320" y="749808"/>
-            <a:ext cx="11430000" cy="457200"/>
-          </a:xfrm>
-          <a:prstGeom prst="rect">
-            <a:avLst/>
-          </a:prstGeom>
-          <a:noFill/>
-        </p:spPr>
-        <p:txBody>
-          <a:bodyPr wrap="square">
-            <a:spAutoFit/>
-          </a:bodyPr>
-          <a:lstStyle/>
-          <a:p>
-            <a:pPr algn="l"/>
-            <a:r>
-              <a:rPr sz="1300" b="0" i="0">
-                <a:solidFill>
-                  <a:srgbClr val="00B0F0"/>
-                </a:solidFill>
-              </a:rPr>
-              <a:t>Deliverables  |  Results  |  Impact</a:t>
-            </a:r>
-          </a:p>
-        </p:txBody>
-      </p:sp>
-      <p:sp>
-        <p:nvSpPr>
-          <p:cNvPr id="6" name="Rectangle 5"/>
+          <p:cNvPr id="4" name="Rectangle 3"/>
           <p:cNvSpPr/>
           <p:nvPr/>
         </p:nvSpPr>
         <p:spPr>
           <a:xfrm>
-            <a:off x="0" y="6748272"/>
-            <a:ext cx="12188952" cy="109728"/>
+            <a:off x="12115800" y="0"/>
+            <a:ext cx="73152" cy="1261872"/>
           </a:xfrm>
           <a:prstGeom prst="rect">
             <a:avLst/>
@@ -11195,20 +11785,88 @@
       </p:sp>
       <p:sp>
         <p:nvSpPr>
+          <p:cNvPr id="5" name="TextBox 4"/>
+          <p:cNvSpPr txBox="1"/>
+          <p:nvPr/>
+        </p:nvSpPr>
+        <p:spPr>
+          <a:xfrm>
+            <a:off x="320040" y="164592"/>
+            <a:ext cx="11430000" cy="685800"/>
+          </a:xfrm>
+          <a:prstGeom prst="rect">
+            <a:avLst/>
+          </a:prstGeom>
+          <a:noFill/>
+        </p:spPr>
+        <p:txBody>
+          <a:bodyPr wrap="square">
+            <a:spAutoFit/>
+          </a:bodyPr>
+          <a:lstStyle/>
+          <a:p>
+            <a:pPr algn="l"/>
+            <a:r>
+              <a:rPr sz="3000" b="1" i="0">
+                <a:solidFill>
+                  <a:srgbClr val="FFFFFF"/>
+                </a:solidFill>
+              </a:rPr>
+              <a:t>Expected Outcome</a:t>
+            </a:r>
+          </a:p>
+        </p:txBody>
+      </p:sp>
+      <p:sp>
+        <p:nvSpPr>
+          <p:cNvPr id="6" name="TextBox 5"/>
+          <p:cNvSpPr txBox="1"/>
+          <p:nvPr/>
+        </p:nvSpPr>
+        <p:spPr>
+          <a:xfrm>
+            <a:off x="320040" y="841248"/>
+            <a:ext cx="11430000" cy="347472"/>
+          </a:xfrm>
+          <a:prstGeom prst="rect">
+            <a:avLst/>
+          </a:prstGeom>
+          <a:noFill/>
+        </p:spPr>
+        <p:txBody>
+          <a:bodyPr wrap="square">
+            <a:spAutoFit/>
+          </a:bodyPr>
+          <a:lstStyle/>
+          <a:p>
+            <a:pPr algn="l"/>
+            <a:r>
+              <a:rPr sz="1200" b="0" i="0">
+                <a:solidFill>
+                  <a:srgbClr val="F4A800"/>
+                </a:solidFill>
+              </a:rPr>
+              <a:t>Deliverables  |  Results  |  Impact</a:t>
+            </a:r>
+          </a:p>
+        </p:txBody>
+      </p:sp>
+      <p:sp>
+        <p:nvSpPr>
           <p:cNvPr id="7" name="Rectangle 6"/>
           <p:cNvSpPr/>
           <p:nvPr/>
         </p:nvSpPr>
         <p:spPr>
           <a:xfrm>
-            <a:off x="457200" y="1417320"/>
-            <a:ext cx="5212080" cy="2103120"/>
-          </a:xfrm>
-          <a:prstGeom prst="rect">
-            <a:avLst/>
-          </a:prstGeom>
-          <a:solidFill>
-            <a:srgbClr val="FFFFFF"/>
+            <a:off x="0" y="6729984"/>
+            <a:ext cx="12188952" cy="128016"/>
+          </a:xfrm>
+          <a:prstGeom prst="rect">
+            <a:avLst/>
+          </a:prstGeom>
+          <a:solidFill>
+            <a:srgbClr val="F4A800"/>
           </a:solidFill>
           <a:ln>
             <a:noFill/>
@@ -11244,8 +11902,8 @@
         </p:nvSpPr>
         <p:spPr>
           <a:xfrm>
-            <a:off x="457200" y="1417320"/>
-            <a:ext cx="5212080" cy="73152"/>
+            <a:off x="0" y="6729984"/>
+            <a:ext cx="320040" cy="128016"/>
           </a:xfrm>
           <a:prstGeom prst="rect">
             <a:avLst/>
@@ -11281,112 +11939,14 @@
       </p:sp>
       <p:sp>
         <p:nvSpPr>
-          <p:cNvPr id="9" name="TextBox 8"/>
-          <p:cNvSpPr txBox="1"/>
-          <p:nvPr/>
-        </p:nvSpPr>
-        <p:spPr>
-          <a:xfrm>
-            <a:off x="594360" y="1554480"/>
-            <a:ext cx="548640" cy="457200"/>
-          </a:xfrm>
-          <a:prstGeom prst="rect">
-            <a:avLst/>
-          </a:prstGeom>
-          <a:noFill/>
-        </p:spPr>
-        <p:txBody>
-          <a:bodyPr wrap="square">
-            <a:spAutoFit/>
-          </a:bodyPr>
-          <a:lstStyle/>
-          <a:p>
-            <a:pPr algn="ctr"/>
-            <a:r>
-              <a:rPr sz="2400" b="0" i="0"/>
-              <a:t>🛡</a:t>
-            </a:r>
-          </a:p>
-        </p:txBody>
-      </p:sp>
-      <p:sp>
-        <p:nvSpPr>
-          <p:cNvPr id="10" name="TextBox 9"/>
-          <p:cNvSpPr txBox="1"/>
-          <p:nvPr/>
-        </p:nvSpPr>
-        <p:spPr>
-          <a:xfrm>
-            <a:off x="1234440" y="1581912"/>
-            <a:ext cx="4206240" cy="411480"/>
-          </a:xfrm>
-          <a:prstGeom prst="rect">
-            <a:avLst/>
-          </a:prstGeom>
-          <a:noFill/>
-        </p:spPr>
-        <p:txBody>
-          <a:bodyPr wrap="square">
-            <a:spAutoFit/>
-          </a:bodyPr>
-          <a:lstStyle/>
-          <a:p>
-            <a:pPr algn="l"/>
-            <a:r>
-              <a:rPr sz="1500" b="1" i="0">
-                <a:solidFill>
-                  <a:srgbClr val="002060"/>
-                </a:solidFill>
-              </a:rPr>
-              <a:t>Functional Prototype</a:t>
-            </a:r>
-          </a:p>
-        </p:txBody>
-      </p:sp>
-      <p:sp>
-        <p:nvSpPr>
-          <p:cNvPr id="11" name="TextBox 10"/>
-          <p:cNvSpPr txBox="1"/>
-          <p:nvPr/>
-        </p:nvSpPr>
-        <p:spPr>
-          <a:xfrm>
-            <a:off x="594360" y="2103120"/>
-            <a:ext cx="4937760" cy="1280160"/>
-          </a:xfrm>
-          <a:prstGeom prst="rect">
-            <a:avLst/>
-          </a:prstGeom>
-          <a:noFill/>
-        </p:spPr>
-        <p:txBody>
-          <a:bodyPr wrap="square">
-            <a:spAutoFit/>
-          </a:bodyPr>
-          <a:lstStyle/>
-          <a:p>
-            <a:pPr algn="l"/>
-            <a:r>
-              <a:rPr sz="1300" b="0" i="0">
-                <a:solidFill>
-                  <a:srgbClr val="333333"/>
-                </a:solidFill>
-              </a:rPr>
-              <a:t>A working system capable of real-time packet sniffing, anomaly detection, and alert generation.</a:t>
-            </a:r>
-          </a:p>
-        </p:txBody>
-      </p:sp>
-      <p:sp>
-        <p:nvSpPr>
-          <p:cNvPr id="12" name="Rectangle 11"/>
+          <p:cNvPr id="9" name="Rectangle 8"/>
           <p:cNvSpPr/>
           <p:nvPr/>
         </p:nvSpPr>
         <p:spPr>
           <a:xfrm>
-            <a:off x="6309360" y="1417320"/>
-            <a:ext cx="5212080" cy="2103120"/>
+            <a:off x="457200" y="1389888"/>
+            <a:ext cx="5285232" cy="2121408"/>
           </a:xfrm>
           <a:prstGeom prst="rect">
             <a:avLst/>
@@ -11394,8 +11954,10 @@
           <a:solidFill>
             <a:srgbClr val="FFFFFF"/>
           </a:solidFill>
-          <a:ln>
-            <a:noFill/>
+          <a:ln w="7620">
+            <a:solidFill>
+              <a:srgbClr val="F4A800"/>
+            </a:solidFill>
           </a:ln>
         </p:spPr>
         <p:style>
@@ -11422,20 +11984,20 @@
       </p:sp>
       <p:sp>
         <p:nvSpPr>
-          <p:cNvPr id="13" name="Rectangle 12"/>
+          <p:cNvPr id="10" name="Rectangle 9"/>
           <p:cNvSpPr/>
           <p:nvPr/>
         </p:nvSpPr>
         <p:spPr>
           <a:xfrm>
-            <a:off x="6309360" y="1417320"/>
-            <a:ext cx="5212080" cy="73152"/>
-          </a:xfrm>
-          <a:prstGeom prst="rect">
-            <a:avLst/>
-          </a:prstGeom>
-          <a:solidFill>
-            <a:srgbClr val="C00000"/>
+            <a:off x="457200" y="1389888"/>
+            <a:ext cx="5285232" cy="530352"/>
+          </a:xfrm>
+          <a:prstGeom prst="rect">
+            <a:avLst/>
+          </a:prstGeom>
+          <a:solidFill>
+            <a:srgbClr val="E8601A"/>
           </a:solidFill>
           <a:ln>
             <a:noFill/>
@@ -11465,14 +12027,14 @@
       </p:sp>
       <p:sp>
         <p:nvSpPr>
-          <p:cNvPr id="14" name="TextBox 13"/>
+          <p:cNvPr id="11" name="TextBox 10"/>
           <p:cNvSpPr txBox="1"/>
           <p:nvPr/>
         </p:nvSpPr>
         <p:spPr>
           <a:xfrm>
-            <a:off x="6446520" y="1554480"/>
-            <a:ext cx="548640" cy="457200"/>
+            <a:off x="566928" y="1444752"/>
+            <a:ext cx="502920" cy="420624"/>
           </a:xfrm>
           <a:prstGeom prst="rect">
             <a:avLst/>
@@ -11487,22 +12049,22 @@
           <a:p>
             <a:pPr algn="ctr"/>
             <a:r>
-              <a:rPr sz="2400" b="0" i="0"/>
-              <a:t>📊</a:t>
-            </a:r>
-          </a:p>
-        </p:txBody>
-      </p:sp>
-      <p:sp>
-        <p:nvSpPr>
-          <p:cNvPr id="15" name="TextBox 14"/>
+              <a:rPr sz="2200" b="0" i="0"/>
+              <a:t>🛡</a:t>
+            </a:r>
+          </a:p>
+        </p:txBody>
+      </p:sp>
+      <p:sp>
+        <p:nvSpPr>
+          <p:cNvPr id="12" name="TextBox 11"/>
           <p:cNvSpPr txBox="1"/>
           <p:nvPr/>
         </p:nvSpPr>
         <p:spPr>
           <a:xfrm>
-            <a:off x="7086600" y="1581912"/>
-            <a:ext cx="4206240" cy="411480"/>
+            <a:off x="1170432" y="1481328"/>
+            <a:ext cx="4343400" cy="384048"/>
           </a:xfrm>
           <a:prstGeom prst="rect">
             <a:avLst/>
@@ -11517,26 +12079,26 @@
           <a:p>
             <a:pPr algn="l"/>
             <a:r>
-              <a:rPr sz="1500" b="1" i="0">
-                <a:solidFill>
-                  <a:srgbClr val="002060"/>
+              <a:rPr sz="1400" b="1" i="0">
+                <a:solidFill>
+                  <a:srgbClr val="FFFFFF"/>
                 </a:solidFill>
               </a:rPr>
-              <a:t>Modern Web Dashboard</a:t>
-            </a:r>
-          </a:p>
-        </p:txBody>
-      </p:sp>
-      <p:sp>
-        <p:nvSpPr>
-          <p:cNvPr id="16" name="TextBox 15"/>
+              <a:t>Functional Prototype</a:t>
+            </a:r>
+          </a:p>
+        </p:txBody>
+      </p:sp>
+      <p:sp>
+        <p:nvSpPr>
+          <p:cNvPr id="13" name="TextBox 12"/>
           <p:cNvSpPr txBox="1"/>
           <p:nvPr/>
         </p:nvSpPr>
         <p:spPr>
           <a:xfrm>
-            <a:off x="6446520" y="2103120"/>
-            <a:ext cx="4937760" cy="1280160"/>
+            <a:off x="594360" y="2048256"/>
+            <a:ext cx="5029200" cy="1353312"/>
           </a:xfrm>
           <a:prstGeom prst="rect">
             <a:avLst/>
@@ -11553,24 +12115,24 @@
             <a:r>
               <a:rPr sz="1300" b="0" i="0">
                 <a:solidFill>
-                  <a:srgbClr val="333333"/>
+                  <a:srgbClr val="2A1800"/>
                 </a:solidFill>
               </a:rPr>
-              <a:t>A premium React-based UI with live metrics, chart visualizations, and a threat alert panel.</a:t>
-            </a:r>
-          </a:p>
-        </p:txBody>
-      </p:sp>
-      <p:sp>
-        <p:nvSpPr>
-          <p:cNvPr id="17" name="Rectangle 16"/>
+              <a:t>A working system capable of real-time packet sniffing, anomaly detection, and alert generation.</a:t>
+            </a:r>
+          </a:p>
+        </p:txBody>
+      </p:sp>
+      <p:sp>
+        <p:nvSpPr>
+          <p:cNvPr id="14" name="Rectangle 13"/>
           <p:cNvSpPr/>
           <p:nvPr/>
         </p:nvSpPr>
         <p:spPr>
           <a:xfrm>
-            <a:off x="457200" y="3886200"/>
-            <a:ext cx="5212080" cy="2103120"/>
+            <a:off x="6327648" y="1389888"/>
+            <a:ext cx="5285232" cy="2121408"/>
           </a:xfrm>
           <a:prstGeom prst="rect">
             <a:avLst/>
@@ -11578,8 +12140,10 @@
           <a:solidFill>
             <a:srgbClr val="FFFFFF"/>
           </a:solidFill>
-          <a:ln>
-            <a:noFill/>
+          <a:ln w="7620">
+            <a:solidFill>
+              <a:srgbClr val="F4A800"/>
+            </a:solidFill>
           </a:ln>
         </p:spPr>
         <p:style>
@@ -11606,20 +12170,20 @@
       </p:sp>
       <p:sp>
         <p:nvSpPr>
-          <p:cNvPr id="18" name="Rectangle 17"/>
+          <p:cNvPr id="15" name="Rectangle 14"/>
           <p:cNvSpPr/>
           <p:nvPr/>
         </p:nvSpPr>
         <p:spPr>
           <a:xfrm>
-            <a:off x="457200" y="3886200"/>
-            <a:ext cx="5212080" cy="73152"/>
-          </a:xfrm>
-          <a:prstGeom prst="rect">
-            <a:avLst/>
-          </a:prstGeom>
-          <a:solidFill>
-            <a:srgbClr val="C00000"/>
+            <a:off x="6327648" y="1389888"/>
+            <a:ext cx="5285232" cy="530352"/>
+          </a:xfrm>
+          <a:prstGeom prst="rect">
+            <a:avLst/>
+          </a:prstGeom>
+          <a:solidFill>
+            <a:srgbClr val="F4A800"/>
           </a:solidFill>
           <a:ln>
             <a:noFill/>
@@ -11649,14 +12213,14 @@
       </p:sp>
       <p:sp>
         <p:nvSpPr>
-          <p:cNvPr id="19" name="TextBox 18"/>
+          <p:cNvPr id="16" name="TextBox 15"/>
           <p:cNvSpPr txBox="1"/>
           <p:nvPr/>
         </p:nvSpPr>
         <p:spPr>
           <a:xfrm>
-            <a:off x="594360" y="4023360"/>
-            <a:ext cx="548640" cy="457200"/>
+            <a:off x="6437376" y="1444752"/>
+            <a:ext cx="502920" cy="420624"/>
           </a:xfrm>
           <a:prstGeom prst="rect">
             <a:avLst/>
@@ -11671,22 +12235,22 @@
           <a:p>
             <a:pPr algn="ctr"/>
             <a:r>
-              <a:rPr sz="2400" b="0" i="0"/>
-              <a:t>🔍</a:t>
-            </a:r>
-          </a:p>
-        </p:txBody>
-      </p:sp>
-      <p:sp>
-        <p:nvSpPr>
-          <p:cNvPr id="20" name="TextBox 19"/>
+              <a:rPr sz="2200" b="0" i="0"/>
+              <a:t>📊</a:t>
+            </a:r>
+          </a:p>
+        </p:txBody>
+      </p:sp>
+      <p:sp>
+        <p:nvSpPr>
+          <p:cNvPr id="17" name="TextBox 16"/>
           <p:cNvSpPr txBox="1"/>
           <p:nvPr/>
         </p:nvSpPr>
         <p:spPr>
           <a:xfrm>
-            <a:off x="1234440" y="4050792"/>
-            <a:ext cx="4206240" cy="411480"/>
+            <a:off x="7040880" y="1481328"/>
+            <a:ext cx="4343400" cy="384048"/>
           </a:xfrm>
           <a:prstGeom prst="rect">
             <a:avLst/>
@@ -11701,26 +12265,26 @@
           <a:p>
             <a:pPr algn="l"/>
             <a:r>
-              <a:rPr sz="1500" b="1" i="0">
-                <a:solidFill>
-                  <a:srgbClr val="002060"/>
+              <a:rPr sz="1400" b="1" i="0">
+                <a:solidFill>
+                  <a:srgbClr val="2A1800"/>
                 </a:solidFill>
               </a:rPr>
-              <a:t>PCAP Forensics Module</a:t>
-            </a:r>
-          </a:p>
-        </p:txBody>
-      </p:sp>
-      <p:sp>
-        <p:nvSpPr>
-          <p:cNvPr id="21" name="TextBox 20"/>
+              <a:t>Modern Web Dashboard</a:t>
+            </a:r>
+          </a:p>
+        </p:txBody>
+      </p:sp>
+      <p:sp>
+        <p:nvSpPr>
+          <p:cNvPr id="18" name="TextBox 17"/>
           <p:cNvSpPr txBox="1"/>
           <p:nvPr/>
         </p:nvSpPr>
         <p:spPr>
           <a:xfrm>
-            <a:off x="594360" y="4572000"/>
-            <a:ext cx="4937760" cy="1280160"/>
+            <a:off x="6464808" y="2048256"/>
+            <a:ext cx="5029200" cy="1353312"/>
           </a:xfrm>
           <a:prstGeom prst="rect">
             <a:avLst/>
@@ -11737,24 +12301,24 @@
             <a:r>
               <a:rPr sz="1300" b="0" i="0">
                 <a:solidFill>
-                  <a:srgbClr val="333333"/>
+                  <a:srgbClr val="2A1800"/>
                 </a:solidFill>
               </a:rPr>
-              <a:t>Post-incident analysis by uploading .pcap files to extract packets and generate threat reports.</a:t>
-            </a:r>
-          </a:p>
-        </p:txBody>
-      </p:sp>
-      <p:sp>
-        <p:nvSpPr>
-          <p:cNvPr id="22" name="Rectangle 21"/>
+              <a:t>A premium React-based UI with live metrics, chart visualizations, and a threat alert panel.</a:t>
+            </a:r>
+          </a:p>
+        </p:txBody>
+      </p:sp>
+      <p:sp>
+        <p:nvSpPr>
+          <p:cNvPr id="19" name="Rectangle 18"/>
           <p:cNvSpPr/>
           <p:nvPr/>
         </p:nvSpPr>
         <p:spPr>
           <a:xfrm>
-            <a:off x="6309360" y="3886200"/>
-            <a:ext cx="5212080" cy="2103120"/>
+            <a:off x="457200" y="3913632"/>
+            <a:ext cx="5285232" cy="2121408"/>
           </a:xfrm>
           <a:prstGeom prst="rect">
             <a:avLst/>
@@ -11762,8 +12326,10 @@
           <a:solidFill>
             <a:srgbClr val="FFFFFF"/>
           </a:solidFill>
-          <a:ln>
-            <a:noFill/>
+          <a:ln w="7620">
+            <a:solidFill>
+              <a:srgbClr val="F4A800"/>
+            </a:solidFill>
           </a:ln>
         </p:spPr>
         <p:style>
@@ -11790,20 +12356,20 @@
       </p:sp>
       <p:sp>
         <p:nvSpPr>
-          <p:cNvPr id="23" name="Rectangle 22"/>
+          <p:cNvPr id="20" name="Rectangle 19"/>
           <p:cNvSpPr/>
           <p:nvPr/>
         </p:nvSpPr>
         <p:spPr>
           <a:xfrm>
-            <a:off x="6309360" y="3886200"/>
-            <a:ext cx="5212080" cy="73152"/>
-          </a:xfrm>
-          <a:prstGeom prst="rect">
-            <a:avLst/>
-          </a:prstGeom>
-          <a:solidFill>
-            <a:srgbClr val="C00000"/>
+            <a:off x="457200" y="3913632"/>
+            <a:ext cx="5285232" cy="530352"/>
+          </a:xfrm>
+          <a:prstGeom prst="rect">
+            <a:avLst/>
+          </a:prstGeom>
+          <a:solidFill>
+            <a:srgbClr val="B84000"/>
           </a:solidFill>
           <a:ln>
             <a:noFill/>
@@ -11833,14 +12399,14 @@
       </p:sp>
       <p:sp>
         <p:nvSpPr>
-          <p:cNvPr id="24" name="TextBox 23"/>
+          <p:cNvPr id="21" name="TextBox 20"/>
           <p:cNvSpPr txBox="1"/>
           <p:nvPr/>
         </p:nvSpPr>
         <p:spPr>
           <a:xfrm>
-            <a:off x="6446520" y="4023360"/>
-            <a:ext cx="548640" cy="457200"/>
+            <a:off x="566928" y="3968496"/>
+            <a:ext cx="502920" cy="420624"/>
           </a:xfrm>
           <a:prstGeom prst="rect">
             <a:avLst/>
@@ -11855,22 +12421,22 @@
           <a:p>
             <a:pPr algn="ctr"/>
             <a:r>
-              <a:rPr sz="2400" b="0" i="0"/>
-              <a:t>🏗</a:t>
-            </a:r>
-          </a:p>
-        </p:txBody>
-      </p:sp>
-      <p:sp>
-        <p:nvSpPr>
-          <p:cNvPr id="25" name="TextBox 24"/>
+              <a:rPr sz="2200" b="0" i="0"/>
+              <a:t>🔍</a:t>
+            </a:r>
+          </a:p>
+        </p:txBody>
+      </p:sp>
+      <p:sp>
+        <p:nvSpPr>
+          <p:cNvPr id="22" name="TextBox 21"/>
           <p:cNvSpPr txBox="1"/>
           <p:nvPr/>
         </p:nvSpPr>
         <p:spPr>
           <a:xfrm>
-            <a:off x="7086600" y="4050792"/>
-            <a:ext cx="4206240" cy="411480"/>
+            <a:off x="1170432" y="4005072"/>
+            <a:ext cx="4343400" cy="384048"/>
           </a:xfrm>
           <a:prstGeom prst="rect">
             <a:avLst/>
@@ -11885,26 +12451,26 @@
           <a:p>
             <a:pPr algn="l"/>
             <a:r>
-              <a:rPr sz="1500" b="1" i="0">
-                <a:solidFill>
-                  <a:srgbClr val="002060"/>
+              <a:rPr sz="1400" b="1" i="0">
+                <a:solidFill>
+                  <a:srgbClr val="FFFFFF"/>
                 </a:solidFill>
               </a:rPr>
-              <a:t>Scalable Architecture</a:t>
-            </a:r>
-          </a:p>
-        </p:txBody>
-      </p:sp>
-      <p:sp>
-        <p:nvSpPr>
-          <p:cNvPr id="26" name="TextBox 25"/>
+              <a:t>PCAP Forensics Module</a:t>
+            </a:r>
+          </a:p>
+        </p:txBody>
+      </p:sp>
+      <p:sp>
+        <p:nvSpPr>
+          <p:cNvPr id="23" name="TextBox 22"/>
           <p:cNvSpPr txBox="1"/>
           <p:nvPr/>
         </p:nvSpPr>
         <p:spPr>
           <a:xfrm>
-            <a:off x="6446520" y="4572000"/>
-            <a:ext cx="4937760" cy="1280160"/>
+            <a:off x="594360" y="4572000"/>
+            <a:ext cx="5029200" cy="1353312"/>
           </a:xfrm>
           <a:prstGeom prst="rect">
             <a:avLst/>
@@ -11921,7 +12487,193 @@
             <a:r>
               <a:rPr sz="1300" b="0" i="0">
                 <a:solidFill>
-                  <a:srgbClr val="333333"/>
+                  <a:srgbClr val="2A1800"/>
+                </a:solidFill>
+              </a:rPr>
+              <a:t>Post-incident analysis by uploading .pcap files to extract packets and generate threat reports.</a:t>
+            </a:r>
+          </a:p>
+        </p:txBody>
+      </p:sp>
+      <p:sp>
+        <p:nvSpPr>
+          <p:cNvPr id="24" name="Rectangle 23"/>
+          <p:cNvSpPr/>
+          <p:nvPr/>
+        </p:nvSpPr>
+        <p:spPr>
+          <a:xfrm>
+            <a:off x="6327648" y="3913632"/>
+            <a:ext cx="5285232" cy="2121408"/>
+          </a:xfrm>
+          <a:prstGeom prst="rect">
+            <a:avLst/>
+          </a:prstGeom>
+          <a:solidFill>
+            <a:srgbClr val="FFFFFF"/>
+          </a:solidFill>
+          <a:ln w="7620">
+            <a:solidFill>
+              <a:srgbClr val="F4A800"/>
+            </a:solidFill>
+          </a:ln>
+        </p:spPr>
+        <p:style>
+          <a:lnRef idx="1">
+            <a:schemeClr val="accent1"/>
+          </a:lnRef>
+          <a:fillRef idx="3">
+            <a:schemeClr val="accent1"/>
+          </a:fillRef>
+          <a:effectRef idx="2">
+            <a:schemeClr val="accent1"/>
+          </a:effectRef>
+          <a:fontRef idx="minor">
+            <a:schemeClr val="lt1"/>
+          </a:fontRef>
+        </p:style>
+        <p:txBody>
+          <a:bodyPr rtlCol="0" anchor="ctr"/>
+          <a:lstStyle/>
+          <a:p>
+            <a:pPr algn="ctr"/>
+          </a:p>
+        </p:txBody>
+      </p:sp>
+      <p:sp>
+        <p:nvSpPr>
+          <p:cNvPr id="25" name="Rectangle 24"/>
+          <p:cNvSpPr/>
+          <p:nvPr/>
+        </p:nvSpPr>
+        <p:spPr>
+          <a:xfrm>
+            <a:off x="6327648" y="3913632"/>
+            <a:ext cx="5285232" cy="530352"/>
+          </a:xfrm>
+          <a:prstGeom prst="rect">
+            <a:avLst/>
+          </a:prstGeom>
+          <a:solidFill>
+            <a:srgbClr val="E8601A"/>
+          </a:solidFill>
+          <a:ln>
+            <a:noFill/>
+          </a:ln>
+        </p:spPr>
+        <p:style>
+          <a:lnRef idx="1">
+            <a:schemeClr val="accent1"/>
+          </a:lnRef>
+          <a:fillRef idx="3">
+            <a:schemeClr val="accent1"/>
+          </a:fillRef>
+          <a:effectRef idx="2">
+            <a:schemeClr val="accent1"/>
+          </a:effectRef>
+          <a:fontRef idx="minor">
+            <a:schemeClr val="lt1"/>
+          </a:fontRef>
+        </p:style>
+        <p:txBody>
+          <a:bodyPr rtlCol="0" anchor="ctr"/>
+          <a:lstStyle/>
+          <a:p>
+            <a:pPr algn="ctr"/>
+          </a:p>
+        </p:txBody>
+      </p:sp>
+      <p:sp>
+        <p:nvSpPr>
+          <p:cNvPr id="26" name="TextBox 25"/>
+          <p:cNvSpPr txBox="1"/>
+          <p:nvPr/>
+        </p:nvSpPr>
+        <p:spPr>
+          <a:xfrm>
+            <a:off x="6437376" y="3968496"/>
+            <a:ext cx="502920" cy="420624"/>
+          </a:xfrm>
+          <a:prstGeom prst="rect">
+            <a:avLst/>
+          </a:prstGeom>
+          <a:noFill/>
+        </p:spPr>
+        <p:txBody>
+          <a:bodyPr wrap="square">
+            <a:spAutoFit/>
+          </a:bodyPr>
+          <a:lstStyle/>
+          <a:p>
+            <a:pPr algn="ctr"/>
+            <a:r>
+              <a:rPr sz="2200" b="0" i="0"/>
+              <a:t>🏗</a:t>
+            </a:r>
+          </a:p>
+        </p:txBody>
+      </p:sp>
+      <p:sp>
+        <p:nvSpPr>
+          <p:cNvPr id="27" name="TextBox 26"/>
+          <p:cNvSpPr txBox="1"/>
+          <p:nvPr/>
+        </p:nvSpPr>
+        <p:spPr>
+          <a:xfrm>
+            <a:off x="7040880" y="4005072"/>
+            <a:ext cx="4343400" cy="384048"/>
+          </a:xfrm>
+          <a:prstGeom prst="rect">
+            <a:avLst/>
+          </a:prstGeom>
+          <a:noFill/>
+        </p:spPr>
+        <p:txBody>
+          <a:bodyPr wrap="square">
+            <a:spAutoFit/>
+          </a:bodyPr>
+          <a:lstStyle/>
+          <a:p>
+            <a:pPr algn="l"/>
+            <a:r>
+              <a:rPr sz="1400" b="1" i="0">
+                <a:solidFill>
+                  <a:srgbClr val="FFFFFF"/>
+                </a:solidFill>
+              </a:rPr>
+              <a:t>Scalable Architecture</a:t>
+            </a:r>
+          </a:p>
+        </p:txBody>
+      </p:sp>
+      <p:sp>
+        <p:nvSpPr>
+          <p:cNvPr id="28" name="TextBox 27"/>
+          <p:cNvSpPr txBox="1"/>
+          <p:nvPr/>
+        </p:nvSpPr>
+        <p:spPr>
+          <a:xfrm>
+            <a:off x="6464808" y="4572000"/>
+            <a:ext cx="5029200" cy="1353312"/>
+          </a:xfrm>
+          <a:prstGeom prst="rect">
+            <a:avLst/>
+          </a:prstGeom>
+          <a:noFill/>
+        </p:spPr>
+        <p:txBody>
+          <a:bodyPr wrap="square">
+            <a:spAutoFit/>
+          </a:bodyPr>
+          <a:lstStyle/>
+          <a:p>
+            <a:pPr algn="l"/>
+            <a:r>
+              <a:rPr sz="1300" b="0" i="0">
+                <a:solidFill>
+                  <a:srgbClr val="2A1800"/>
                 </a:solidFill>
               </a:rPr>
               <a:t>A fully decoupled FastAPI + React pattern that can be easily extended for production use.</a:t>
@@ -11948,7 +12700,7 @@
     <p:bg>
       <p:bgPr>
         <a:solidFill>
-          <a:srgbClr val="FFFFFF"/>
+          <a:srgbClr val="FFF8F0"/>
         </a:solidFill>
         <a:effectLst/>
       </p:bgPr>
@@ -11976,13 +12728,13 @@
         <p:spPr>
           <a:xfrm>
             <a:off x="0" y="0"/>
-            <a:ext cx="12188952" cy="1280160"/>
-          </a:xfrm>
-          <a:prstGeom prst="rect">
-            <a:avLst/>
-          </a:prstGeom>
-          <a:solidFill>
-            <a:srgbClr val="1F3564"/>
+            <a:ext cx="12188952" cy="1261872"/>
+          </a:xfrm>
+          <a:prstGeom prst="rect">
+            <a:avLst/>
+          </a:prstGeom>
+          <a:solidFill>
+            <a:srgbClr val="B84000"/>
           </a:solidFill>
           <a:ln>
             <a:noFill/>
@@ -12019,13 +12771,13 @@
         <p:spPr>
           <a:xfrm>
             <a:off x="0" y="0"/>
-            <a:ext cx="109728" cy="1280160"/>
-          </a:xfrm>
-          <a:prstGeom prst="rect">
-            <a:avLst/>
-          </a:prstGeom>
-          <a:solidFill>
-            <a:srgbClr val="C00000"/>
+            <a:ext cx="164592" cy="1261872"/>
+          </a:xfrm>
+          <a:prstGeom prst="rect">
+            <a:avLst/>
+          </a:prstGeom>
+          <a:solidFill>
+            <a:srgbClr val="F4A800"/>
           </a:solidFill>
           <a:ln>
             <a:noFill/>
@@ -12055,48 +12807,14 @@
       </p:sp>
       <p:sp>
         <p:nvSpPr>
-          <p:cNvPr id="4" name="TextBox 3"/>
-          <p:cNvSpPr txBox="1"/>
-          <p:nvPr/>
-        </p:nvSpPr>
-        <p:spPr>
-          <a:xfrm>
-            <a:off x="274320" y="182880"/>
-            <a:ext cx="11430000" cy="914400"/>
-          </a:xfrm>
-          <a:prstGeom prst="rect">
-            <a:avLst/>
-          </a:prstGeom>
-          <a:noFill/>
-        </p:spPr>
-        <p:txBody>
-          <a:bodyPr wrap="square">
-            <a:spAutoFit/>
-          </a:bodyPr>
-          <a:lstStyle/>
-          <a:p>
-            <a:pPr algn="l"/>
-            <a:r>
-              <a:rPr sz="3000" b="1" i="0">
-                <a:solidFill>
-                  <a:srgbClr val="FFFFFF"/>
-                </a:solidFill>
-              </a:rPr>
-              <a:t>References</a:t>
-            </a:r>
-          </a:p>
-        </p:txBody>
-      </p:sp>
-      <p:sp>
-        <p:nvSpPr>
-          <p:cNvPr id="5" name="Rectangle 4"/>
+          <p:cNvPr id="4" name="Rectangle 3"/>
           <p:cNvSpPr/>
           <p:nvPr/>
         </p:nvSpPr>
         <p:spPr>
           <a:xfrm>
-            <a:off x="0" y="6748272"/>
-            <a:ext cx="12188952" cy="109728"/>
+            <a:off x="12115800" y="0"/>
+            <a:ext cx="73152" cy="1261872"/>
           </a:xfrm>
           <a:prstGeom prst="rect">
             <a:avLst/>
@@ -12132,20 +12850,54 @@
       </p:sp>
       <p:sp>
         <p:nvSpPr>
+          <p:cNvPr id="5" name="TextBox 4"/>
+          <p:cNvSpPr txBox="1"/>
+          <p:nvPr/>
+        </p:nvSpPr>
+        <p:spPr>
+          <a:xfrm>
+            <a:off x="320040" y="164592"/>
+            <a:ext cx="11430000" cy="685800"/>
+          </a:xfrm>
+          <a:prstGeom prst="rect">
+            <a:avLst/>
+          </a:prstGeom>
+          <a:noFill/>
+        </p:spPr>
+        <p:txBody>
+          <a:bodyPr wrap="square">
+            <a:spAutoFit/>
+          </a:bodyPr>
+          <a:lstStyle/>
+          <a:p>
+            <a:pPr algn="l"/>
+            <a:r>
+              <a:rPr sz="3000" b="1" i="0">
+                <a:solidFill>
+                  <a:srgbClr val="FFFFFF"/>
+                </a:solidFill>
+              </a:rPr>
+              <a:t>References</a:t>
+            </a:r>
+          </a:p>
+        </p:txBody>
+      </p:sp>
+      <p:sp>
+        <p:nvSpPr>
           <p:cNvPr id="6" name="Rectangle 5"/>
           <p:cNvSpPr/>
           <p:nvPr/>
         </p:nvSpPr>
         <p:spPr>
           <a:xfrm>
-            <a:off x="457200" y="1417320"/>
-            <a:ext cx="11247120" cy="5029200"/>
-          </a:xfrm>
-          <a:prstGeom prst="rect">
-            <a:avLst/>
-          </a:prstGeom>
-          <a:solidFill>
-            <a:srgbClr val="F2F2F2"/>
+            <a:off x="0" y="6729984"/>
+            <a:ext cx="12188952" cy="128016"/>
+          </a:xfrm>
+          <a:prstGeom prst="rect">
+            <a:avLst/>
+          </a:prstGeom>
+          <a:solidFill>
+            <a:srgbClr val="F4A800"/>
           </a:solidFill>
           <a:ln>
             <a:noFill/>
@@ -12181,14 +12933,14 @@
         </p:nvSpPr>
         <p:spPr>
           <a:xfrm>
-            <a:off x="548640" y="1600200"/>
-            <a:ext cx="11064240" cy="658368"/>
-          </a:xfrm>
-          <a:prstGeom prst="rect">
-            <a:avLst/>
-          </a:prstGeom>
-          <a:solidFill>
-            <a:srgbClr val="FFFFFF"/>
+            <a:off x="0" y="6729984"/>
+            <a:ext cx="320040" cy="128016"/>
+          </a:xfrm>
+          <a:prstGeom prst="rect">
+            <a:avLst/>
+          </a:prstGeom>
+          <a:solidFill>
+            <a:srgbClr val="C00000"/>
           </a:solidFill>
           <a:ln>
             <a:noFill/>
@@ -12224,14 +12976,14 @@
         </p:nvSpPr>
         <p:spPr>
           <a:xfrm>
-            <a:off x="548640" y="1600200"/>
-            <a:ext cx="64008" cy="658368"/>
-          </a:xfrm>
-          <a:prstGeom prst="rect">
-            <a:avLst/>
-          </a:prstGeom>
-          <a:solidFill>
-            <a:srgbClr val="C00000"/>
+            <a:off x="457200" y="1389888"/>
+            <a:ext cx="11292840" cy="5120640"/>
+          </a:xfrm>
+          <a:prstGeom prst="rect">
+            <a:avLst/>
+          </a:prstGeom>
+          <a:solidFill>
+            <a:srgbClr val="FDF0E0"/>
           </a:solidFill>
           <a:ln>
             <a:noFill/>
@@ -12261,48 +13013,14 @@
       </p:sp>
       <p:sp>
         <p:nvSpPr>
-          <p:cNvPr id="9" name="TextBox 8"/>
-          <p:cNvSpPr txBox="1"/>
-          <p:nvPr/>
-        </p:nvSpPr>
-        <p:spPr>
-          <a:xfrm>
-            <a:off x="731520" y="1691640"/>
-            <a:ext cx="10789920" cy="475488"/>
-          </a:xfrm>
-          <a:prstGeom prst="rect">
-            <a:avLst/>
-          </a:prstGeom>
-          <a:noFill/>
-        </p:spPr>
-        <p:txBody>
-          <a:bodyPr wrap="square">
-            <a:spAutoFit/>
-          </a:bodyPr>
-          <a:lstStyle/>
-          <a:p>
-            <a:pPr algn="l"/>
-            <a:r>
-              <a:rPr sz="1300" b="0" i="0">
-                <a:solidFill>
-                  <a:srgbClr val="222222"/>
-                </a:solidFill>
-              </a:rPr>
-              <a:t>[1]  RFC 793 – Transmission Control Protocol (TCP). IETF, 1981.</a:t>
-            </a:r>
-          </a:p>
-        </p:txBody>
-      </p:sp>
-      <p:sp>
-        <p:nvSpPr>
-          <p:cNvPr id="10" name="Rectangle 9"/>
+          <p:cNvPr id="9" name="Rectangle 8"/>
           <p:cNvSpPr/>
           <p:nvPr/>
         </p:nvSpPr>
         <p:spPr>
           <a:xfrm>
-            <a:off x="548640" y="2350008"/>
-            <a:ext cx="11064240" cy="658368"/>
+            <a:off x="566928" y="1572768"/>
+            <a:ext cx="11064240" cy="676656"/>
           </a:xfrm>
           <a:prstGeom prst="rect">
             <a:avLst/>
@@ -12338,20 +13056,20 @@
       </p:sp>
       <p:sp>
         <p:nvSpPr>
-          <p:cNvPr id="11" name="Rectangle 10"/>
+          <p:cNvPr id="10" name="Rectangle 9"/>
           <p:cNvSpPr/>
           <p:nvPr/>
         </p:nvSpPr>
         <p:spPr>
           <a:xfrm>
-            <a:off x="548640" y="2350008"/>
-            <a:ext cx="64008" cy="658368"/>
-          </a:xfrm>
-          <a:prstGeom prst="rect">
-            <a:avLst/>
-          </a:prstGeom>
-          <a:solidFill>
-            <a:srgbClr val="C00000"/>
+            <a:off x="566928" y="1572768"/>
+            <a:ext cx="73152" cy="676656"/>
+          </a:xfrm>
+          <a:prstGeom prst="rect">
+            <a:avLst/>
+          </a:prstGeom>
+          <a:solidFill>
+            <a:srgbClr val="E8601A"/>
           </a:solidFill>
           <a:ln>
             <a:noFill/>
@@ -12381,14 +13099,14 @@
       </p:sp>
       <p:sp>
         <p:nvSpPr>
-          <p:cNvPr id="12" name="TextBox 11"/>
+          <p:cNvPr id="11" name="TextBox 10"/>
           <p:cNvSpPr txBox="1"/>
           <p:nvPr/>
         </p:nvSpPr>
         <p:spPr>
           <a:xfrm>
-            <a:off x="731520" y="2441448"/>
-            <a:ext cx="10789920" cy="475488"/>
+            <a:off x="768096" y="1682496"/>
+            <a:ext cx="10744200" cy="475488"/>
           </a:xfrm>
           <a:prstGeom prst="rect">
             <a:avLst/>
@@ -12405,24 +13123,24 @@
             <a:r>
               <a:rPr sz="1300" b="0" i="0">
                 <a:solidFill>
-                  <a:srgbClr val="222222"/>
+                  <a:srgbClr val="2A1800"/>
                 </a:solidFill>
               </a:rPr>
-              <a:t>[2]  Scapy Documentation – Packet Manipulation Library. https://scapy.net</a:t>
-            </a:r>
-          </a:p>
-        </p:txBody>
-      </p:sp>
-      <p:sp>
-        <p:nvSpPr>
-          <p:cNvPr id="13" name="Rectangle 12"/>
+              <a:t>[1]  RFC 793 – Transmission Control Protocol (TCP). IETF, 1981.</a:t>
+            </a:r>
+          </a:p>
+        </p:txBody>
+      </p:sp>
+      <p:sp>
+        <p:nvSpPr>
+          <p:cNvPr id="12" name="Rectangle 11"/>
           <p:cNvSpPr/>
           <p:nvPr/>
         </p:nvSpPr>
         <p:spPr>
           <a:xfrm>
-            <a:off x="548640" y="3099816"/>
-            <a:ext cx="11064240" cy="658368"/>
+            <a:off x="566928" y="2340864"/>
+            <a:ext cx="11064240" cy="676656"/>
           </a:xfrm>
           <a:prstGeom prst="rect">
             <a:avLst/>
@@ -12458,20 +13176,20 @@
       </p:sp>
       <p:sp>
         <p:nvSpPr>
-          <p:cNvPr id="14" name="Rectangle 13"/>
+          <p:cNvPr id="13" name="Rectangle 12"/>
           <p:cNvSpPr/>
           <p:nvPr/>
         </p:nvSpPr>
         <p:spPr>
           <a:xfrm>
-            <a:off x="548640" y="3099816"/>
-            <a:ext cx="64008" cy="658368"/>
-          </a:xfrm>
-          <a:prstGeom prst="rect">
-            <a:avLst/>
-          </a:prstGeom>
-          <a:solidFill>
-            <a:srgbClr val="C00000"/>
+            <a:off x="566928" y="2340864"/>
+            <a:ext cx="73152" cy="676656"/>
+          </a:xfrm>
+          <a:prstGeom prst="rect">
+            <a:avLst/>
+          </a:prstGeom>
+          <a:solidFill>
+            <a:srgbClr val="F4A800"/>
           </a:solidFill>
           <a:ln>
             <a:noFill/>
@@ -12501,14 +13219,14 @@
       </p:sp>
       <p:sp>
         <p:nvSpPr>
-          <p:cNvPr id="15" name="TextBox 14"/>
+          <p:cNvPr id="14" name="TextBox 13"/>
           <p:cNvSpPr txBox="1"/>
           <p:nvPr/>
         </p:nvSpPr>
         <p:spPr>
           <a:xfrm>
-            <a:off x="731520" y="3191256"/>
-            <a:ext cx="10789920" cy="475488"/>
+            <a:off x="768096" y="2450592"/>
+            <a:ext cx="10744200" cy="475488"/>
           </a:xfrm>
           <a:prstGeom prst="rect">
             <a:avLst/>
@@ -12525,24 +13243,24 @@
             <a:r>
               <a:rPr sz="1300" b="0" i="0">
                 <a:solidFill>
-                  <a:srgbClr val="222222"/>
+                  <a:srgbClr val="2A1800"/>
                 </a:solidFill>
               </a:rPr>
-              <a:t>[3]  FastAPI Official Documentation – High Performance APIs with Python. https://fastapi.tiangolo.com</a:t>
-            </a:r>
-          </a:p>
-        </p:txBody>
-      </p:sp>
-      <p:sp>
-        <p:nvSpPr>
-          <p:cNvPr id="16" name="Rectangle 15"/>
+              <a:t>[2]  Scapy Documentation – Packet Manipulation Library. https://scapy.net</a:t>
+            </a:r>
+          </a:p>
+        </p:txBody>
+      </p:sp>
+      <p:sp>
+        <p:nvSpPr>
+          <p:cNvPr id="15" name="Rectangle 14"/>
           <p:cNvSpPr/>
           <p:nvPr/>
         </p:nvSpPr>
         <p:spPr>
           <a:xfrm>
-            <a:off x="548640" y="3849624"/>
-            <a:ext cx="11064240" cy="658368"/>
+            <a:off x="566928" y="3108960"/>
+            <a:ext cx="11064240" cy="676656"/>
           </a:xfrm>
           <a:prstGeom prst="rect">
             <a:avLst/>
@@ -12578,20 +13296,20 @@
       </p:sp>
       <p:sp>
         <p:nvSpPr>
-          <p:cNvPr id="17" name="Rectangle 16"/>
+          <p:cNvPr id="16" name="Rectangle 15"/>
           <p:cNvSpPr/>
           <p:nvPr/>
         </p:nvSpPr>
         <p:spPr>
           <a:xfrm>
-            <a:off x="548640" y="3849624"/>
-            <a:ext cx="64008" cy="658368"/>
-          </a:xfrm>
-          <a:prstGeom prst="rect">
-            <a:avLst/>
-          </a:prstGeom>
-          <a:solidFill>
-            <a:srgbClr val="C00000"/>
+            <a:off x="566928" y="3108960"/>
+            <a:ext cx="73152" cy="676656"/>
+          </a:xfrm>
+          <a:prstGeom prst="rect">
+            <a:avLst/>
+          </a:prstGeom>
+          <a:solidFill>
+            <a:srgbClr val="E8601A"/>
           </a:solidFill>
           <a:ln>
             <a:noFill/>
@@ -12621,14 +13339,14 @@
       </p:sp>
       <p:sp>
         <p:nvSpPr>
-          <p:cNvPr id="18" name="TextBox 17"/>
+          <p:cNvPr id="17" name="TextBox 16"/>
           <p:cNvSpPr txBox="1"/>
           <p:nvPr/>
         </p:nvSpPr>
         <p:spPr>
           <a:xfrm>
-            <a:off x="731520" y="3941064"/>
-            <a:ext cx="10789920" cy="475488"/>
+            <a:off x="768096" y="3218688"/>
+            <a:ext cx="10744200" cy="475488"/>
           </a:xfrm>
           <a:prstGeom prst="rect">
             <a:avLst/>
@@ -12645,24 +13363,24 @@
             <a:r>
               <a:rPr sz="1300" b="0" i="0">
                 <a:solidFill>
-                  <a:srgbClr val="222222"/>
+                  <a:srgbClr val="2A1800"/>
                 </a:solidFill>
               </a:rPr>
-              <a:t>[4]  React JS Official Documentation – A JavaScript Library for Building UIs. https://react.dev</a:t>
-            </a:r>
-          </a:p>
-        </p:txBody>
-      </p:sp>
-      <p:sp>
-        <p:nvSpPr>
-          <p:cNvPr id="19" name="Rectangle 18"/>
+              <a:t>[3]  FastAPI Official Documentation – High Performance APIs with Python. https://fastapi.tiangolo.com</a:t>
+            </a:r>
+          </a:p>
+        </p:txBody>
+      </p:sp>
+      <p:sp>
+        <p:nvSpPr>
+          <p:cNvPr id="18" name="Rectangle 17"/>
           <p:cNvSpPr/>
           <p:nvPr/>
         </p:nvSpPr>
         <p:spPr>
           <a:xfrm>
-            <a:off x="548640" y="4599432"/>
-            <a:ext cx="11064240" cy="658368"/>
+            <a:off x="566928" y="3877056"/>
+            <a:ext cx="11064240" cy="676656"/>
           </a:xfrm>
           <a:prstGeom prst="rect">
             <a:avLst/>
@@ -12698,20 +13416,20 @@
       </p:sp>
       <p:sp>
         <p:nvSpPr>
-          <p:cNvPr id="20" name="Rectangle 19"/>
+          <p:cNvPr id="19" name="Rectangle 18"/>
           <p:cNvSpPr/>
           <p:nvPr/>
         </p:nvSpPr>
         <p:spPr>
           <a:xfrm>
-            <a:off x="548640" y="4599432"/>
-            <a:ext cx="64008" cy="658368"/>
-          </a:xfrm>
-          <a:prstGeom prst="rect">
-            <a:avLst/>
-          </a:prstGeom>
-          <a:solidFill>
-            <a:srgbClr val="C00000"/>
+            <a:off x="566928" y="3877056"/>
+            <a:ext cx="73152" cy="676656"/>
+          </a:xfrm>
+          <a:prstGeom prst="rect">
+            <a:avLst/>
+          </a:prstGeom>
+          <a:solidFill>
+            <a:srgbClr val="F4A800"/>
           </a:solidFill>
           <a:ln>
             <a:noFill/>
@@ -12741,14 +13459,14 @@
       </p:sp>
       <p:sp>
         <p:nvSpPr>
-          <p:cNvPr id="21" name="TextBox 20"/>
+          <p:cNvPr id="20" name="TextBox 19"/>
           <p:cNvSpPr txBox="1"/>
           <p:nvPr/>
         </p:nvSpPr>
         <p:spPr>
           <a:xfrm>
-            <a:off x="731520" y="4690872"/>
-            <a:ext cx="10789920" cy="475488"/>
+            <a:off x="768096" y="3986784"/>
+            <a:ext cx="10744200" cy="475488"/>
           </a:xfrm>
           <a:prstGeom prst="rect">
             <a:avLst/>
@@ -12765,24 +13483,24 @@
             <a:r>
               <a:rPr sz="1300" b="0" i="0">
                 <a:solidFill>
-                  <a:srgbClr val="222222"/>
+                  <a:srgbClr val="2A1800"/>
                 </a:solidFill>
               </a:rPr>
-              <a:t>[5]  V. Chandola, A. Banerjee, V. Kumar – "Anomaly Detection: A Survey". ACM Computing Surveys, 2009.</a:t>
-            </a:r>
-          </a:p>
-        </p:txBody>
-      </p:sp>
-      <p:sp>
-        <p:nvSpPr>
-          <p:cNvPr id="22" name="Rectangle 21"/>
+              <a:t>[4]  React JS Official Documentation – A JavaScript Library for Building UIs. https://react.dev</a:t>
+            </a:r>
+          </a:p>
+        </p:txBody>
+      </p:sp>
+      <p:sp>
+        <p:nvSpPr>
+          <p:cNvPr id="21" name="Rectangle 20"/>
           <p:cNvSpPr/>
           <p:nvPr/>
         </p:nvSpPr>
         <p:spPr>
           <a:xfrm>
-            <a:off x="548640" y="5349240"/>
-            <a:ext cx="11064240" cy="658368"/>
+            <a:off x="566928" y="4645152"/>
+            <a:ext cx="11064240" cy="676656"/>
           </a:xfrm>
           <a:prstGeom prst="rect">
             <a:avLst/>
@@ -12818,20 +13536,20 @@
       </p:sp>
       <p:sp>
         <p:nvSpPr>
-          <p:cNvPr id="23" name="Rectangle 22"/>
+          <p:cNvPr id="22" name="Rectangle 21"/>
           <p:cNvSpPr/>
           <p:nvPr/>
         </p:nvSpPr>
         <p:spPr>
           <a:xfrm>
-            <a:off x="548640" y="5349240"/>
-            <a:ext cx="64008" cy="658368"/>
-          </a:xfrm>
-          <a:prstGeom prst="rect">
-            <a:avLst/>
-          </a:prstGeom>
-          <a:solidFill>
-            <a:srgbClr val="C00000"/>
+            <a:off x="566928" y="4645152"/>
+            <a:ext cx="73152" cy="676656"/>
+          </a:xfrm>
+          <a:prstGeom prst="rect">
+            <a:avLst/>
+          </a:prstGeom>
+          <a:solidFill>
+            <a:srgbClr val="E8601A"/>
           </a:solidFill>
           <a:ln>
             <a:noFill/>
@@ -12861,14 +13579,14 @@
       </p:sp>
       <p:sp>
         <p:nvSpPr>
-          <p:cNvPr id="24" name="TextBox 23"/>
+          <p:cNvPr id="23" name="TextBox 22"/>
           <p:cNvSpPr txBox="1"/>
           <p:nvPr/>
         </p:nvSpPr>
         <p:spPr>
           <a:xfrm>
-            <a:off x="731520" y="5440680"/>
-            <a:ext cx="10789920" cy="475488"/>
+            <a:off x="768096" y="4754880"/>
+            <a:ext cx="10744200" cy="475488"/>
           </a:xfrm>
           <a:prstGeom prst="rect">
             <a:avLst/>
@@ -12885,7 +13603,127 @@
             <a:r>
               <a:rPr sz="1300" b="0" i="0">
                 <a:solidFill>
-                  <a:srgbClr val="222222"/>
+                  <a:srgbClr val="2A1800"/>
+                </a:solidFill>
+              </a:rPr>
+              <a:t>[5]  V. Chandola et al. – "Anomaly Detection: A Survey". ACM Computing Surveys, 2009.</a:t>
+            </a:r>
+          </a:p>
+        </p:txBody>
+      </p:sp>
+      <p:sp>
+        <p:nvSpPr>
+          <p:cNvPr id="24" name="Rectangle 23"/>
+          <p:cNvSpPr/>
+          <p:nvPr/>
+        </p:nvSpPr>
+        <p:spPr>
+          <a:xfrm>
+            <a:off x="566928" y="5413248"/>
+            <a:ext cx="11064240" cy="676656"/>
+          </a:xfrm>
+          <a:prstGeom prst="rect">
+            <a:avLst/>
+          </a:prstGeom>
+          <a:solidFill>
+            <a:srgbClr val="FFFFFF"/>
+          </a:solidFill>
+          <a:ln>
+            <a:noFill/>
+          </a:ln>
+        </p:spPr>
+        <p:style>
+          <a:lnRef idx="1">
+            <a:schemeClr val="accent1"/>
+          </a:lnRef>
+          <a:fillRef idx="3">
+            <a:schemeClr val="accent1"/>
+          </a:fillRef>
+          <a:effectRef idx="2">
+            <a:schemeClr val="accent1"/>
+          </a:effectRef>
+          <a:fontRef idx="minor">
+            <a:schemeClr val="lt1"/>
+          </a:fontRef>
+        </p:style>
+        <p:txBody>
+          <a:bodyPr rtlCol="0" anchor="ctr"/>
+          <a:lstStyle/>
+          <a:p>
+            <a:pPr algn="ctr"/>
+          </a:p>
+        </p:txBody>
+      </p:sp>
+      <p:sp>
+        <p:nvSpPr>
+          <p:cNvPr id="25" name="Rectangle 24"/>
+          <p:cNvSpPr/>
+          <p:nvPr/>
+        </p:nvSpPr>
+        <p:spPr>
+          <a:xfrm>
+            <a:off x="566928" y="5413248"/>
+            <a:ext cx="73152" cy="676656"/>
+          </a:xfrm>
+          <a:prstGeom prst="rect">
+            <a:avLst/>
+          </a:prstGeom>
+          <a:solidFill>
+            <a:srgbClr val="F4A800"/>
+          </a:solidFill>
+          <a:ln>
+            <a:noFill/>
+          </a:ln>
+        </p:spPr>
+        <p:style>
+          <a:lnRef idx="1">
+            <a:schemeClr val="accent1"/>
+          </a:lnRef>
+          <a:fillRef idx="3">
+            <a:schemeClr val="accent1"/>
+          </a:fillRef>
+          <a:effectRef idx="2">
+            <a:schemeClr val="accent1"/>
+          </a:effectRef>
+          <a:fontRef idx="minor">
+            <a:schemeClr val="lt1"/>
+          </a:fontRef>
+        </p:style>
+        <p:txBody>
+          <a:bodyPr rtlCol="0" anchor="ctr"/>
+          <a:lstStyle/>
+          <a:p>
+            <a:pPr algn="ctr"/>
+          </a:p>
+        </p:txBody>
+      </p:sp>
+      <p:sp>
+        <p:nvSpPr>
+          <p:cNvPr id="26" name="TextBox 25"/>
+          <p:cNvSpPr txBox="1"/>
+          <p:nvPr/>
+        </p:nvSpPr>
+        <p:spPr>
+          <a:xfrm>
+            <a:off x="768096" y="5522976"/>
+            <a:ext cx="10744200" cy="475488"/>
+          </a:xfrm>
+          <a:prstGeom prst="rect">
+            <a:avLst/>
+          </a:prstGeom>
+          <a:noFill/>
+        </p:spPr>
+        <p:txBody>
+          <a:bodyPr wrap="square">
+            <a:spAutoFit/>
+          </a:bodyPr>
+          <a:lstStyle/>
+          <a:p>
+            <a:pPr algn="l"/>
+            <a:r>
+              <a:rPr sz="1300" b="0" i="0">
+                <a:solidFill>
+                  <a:srgbClr val="2A1800"/>
                 </a:solidFill>
               </a:rPr>
               <a:t>[6]  TailwindCSS &amp; DaisyUI Component Library – https://daisyui.com</a:t>
